--- a/topic06-arrays/unit-1/talk-2-array-classes/b-array-classes.pptx
+++ b/topic06-arrays/unit-1/talk-2-array-classes/b-array-classes.pptx
@@ -5,35 +5,36 @@
     <p:sldMasterId id="2147483660" r:id="rId1"/>
   </p:sldMasterIdLst>
   <p:notesMasterIdLst>
-    <p:notesMasterId r:id="rId28"/>
+    <p:notesMasterId r:id="rId29"/>
   </p:notesMasterIdLst>
   <p:sldIdLst>
     <p:sldId id="325" r:id="rId2"/>
-    <p:sldId id="649" r:id="rId3"/>
-    <p:sldId id="616" r:id="rId4"/>
-    <p:sldId id="645" r:id="rId5"/>
-    <p:sldId id="606" r:id="rId6"/>
-    <p:sldId id="605" r:id="rId7"/>
-    <p:sldId id="610" r:id="rId8"/>
-    <p:sldId id="611" r:id="rId9"/>
-    <p:sldId id="614" r:id="rId10"/>
-    <p:sldId id="646" r:id="rId11"/>
-    <p:sldId id="652" r:id="rId12"/>
-    <p:sldId id="618" r:id="rId13"/>
-    <p:sldId id="619" r:id="rId14"/>
-    <p:sldId id="620" r:id="rId15"/>
-    <p:sldId id="623" r:id="rId16"/>
-    <p:sldId id="621" r:id="rId17"/>
-    <p:sldId id="624" r:id="rId18"/>
-    <p:sldId id="622" r:id="rId19"/>
-    <p:sldId id="647" r:id="rId20"/>
-    <p:sldId id="653" r:id="rId21"/>
-    <p:sldId id="638" r:id="rId22"/>
-    <p:sldId id="628" r:id="rId23"/>
-    <p:sldId id="641" r:id="rId24"/>
-    <p:sldId id="642" r:id="rId25"/>
-    <p:sldId id="634" r:id="rId26"/>
-    <p:sldId id="347" r:id="rId27"/>
+    <p:sldId id="257" r:id="rId3"/>
+    <p:sldId id="649" r:id="rId4"/>
+    <p:sldId id="616" r:id="rId5"/>
+    <p:sldId id="654" r:id="rId6"/>
+    <p:sldId id="606" r:id="rId7"/>
+    <p:sldId id="605" r:id="rId8"/>
+    <p:sldId id="610" r:id="rId9"/>
+    <p:sldId id="611" r:id="rId10"/>
+    <p:sldId id="614" r:id="rId11"/>
+    <p:sldId id="655" r:id="rId12"/>
+    <p:sldId id="652" r:id="rId13"/>
+    <p:sldId id="618" r:id="rId14"/>
+    <p:sldId id="619" r:id="rId15"/>
+    <p:sldId id="620" r:id="rId16"/>
+    <p:sldId id="623" r:id="rId17"/>
+    <p:sldId id="621" r:id="rId18"/>
+    <p:sldId id="624" r:id="rId19"/>
+    <p:sldId id="622" r:id="rId20"/>
+    <p:sldId id="656" r:id="rId21"/>
+    <p:sldId id="653" r:id="rId22"/>
+    <p:sldId id="638" r:id="rId23"/>
+    <p:sldId id="628" r:id="rId24"/>
+    <p:sldId id="641" r:id="rId25"/>
+    <p:sldId id="642" r:id="rId26"/>
+    <p:sldId id="634" r:id="rId27"/>
+    <p:sldId id="347" r:id="rId28"/>
   </p:sldIdLst>
   <p:sldSz cx="12192000" cy="6858000"/>
   <p:notesSz cx="6858000" cy="9144000"/>
@@ -233,7 +234,7 @@
           <a:p>
             <a:fld id="{58C3D141-1E1C-433C-AD3A-CD56CBBB4F9F}" type="datetimeFigureOut">
               <a:rPr lang="en-IE" smtClean="0"/>
-              <a:t>16/10/2025</a:t>
+              <a:t>18/10/2025</a:t>
             </a:fld>
             <a:endParaRPr lang="en-IE"/>
           </a:p>
@@ -943,7 +944,7 @@
                 <a:latin typeface="Times New Roman" pitchFamily="-32" charset="0"/>
               </a:rPr>
               <a:pPr/>
-              <a:t>5</a:t>
+              <a:t>6</a:t>
             </a:fld>
             <a:endParaRPr lang="en-GB" sz="1200" b="0">
               <a:latin typeface="Times New Roman" pitchFamily="-32" charset="0"/>
@@ -1465,7 +1466,7 @@
                 <a:latin typeface="Times New Roman" pitchFamily="-32" charset="0"/>
               </a:rPr>
               <a:pPr/>
-              <a:t>16</a:t>
+              <a:t>17</a:t>
             </a:fld>
             <a:endParaRPr lang="en-GB" sz="1200" b="0">
               <a:latin typeface="Times New Roman" pitchFamily="-32" charset="0"/>
@@ -1987,7 +1988,7 @@
                 <a:latin typeface="Times New Roman" pitchFamily="-32" charset="0"/>
               </a:rPr>
               <a:pPr/>
-              <a:t>17</a:t>
+              <a:t>18</a:t>
             </a:fld>
             <a:endParaRPr lang="en-GB" sz="1200" b="0">
               <a:latin typeface="Times New Roman" pitchFamily="-32" charset="0"/>
@@ -2144,7 +2145,7 @@
           <a:p>
             <a:fld id="{F963DB36-5273-45A5-A77C-FE9BE0779D84}" type="slidenum">
               <a:rPr lang="en-IE" smtClean="0"/>
-              <a:t>18</a:t>
+              <a:t>19</a:t>
             </a:fld>
             <a:endParaRPr lang="en-IE"/>
           </a:p>
@@ -2605,7 +2606,7 @@
                 <a:latin typeface="Times New Roman" pitchFamily="-32" charset="0"/>
               </a:rPr>
               <a:pPr/>
-              <a:t>22</a:t>
+              <a:t>23</a:t>
             </a:fld>
             <a:endParaRPr lang="en-GB" sz="1200" b="0">
               <a:latin typeface="Times New Roman" pitchFamily="-32" charset="0"/>
@@ -3127,7 +3128,7 @@
                 <a:latin typeface="Times New Roman" pitchFamily="-32" charset="0"/>
               </a:rPr>
               <a:pPr/>
-              <a:t>23</a:t>
+              <a:t>24</a:t>
             </a:fld>
             <a:endParaRPr lang="en-GB" sz="1200" b="0">
               <a:latin typeface="Times New Roman" pitchFamily="-32" charset="0"/>
@@ -3649,7 +3650,7 @@
                 <a:latin typeface="Times New Roman" pitchFamily="-32" charset="0"/>
               </a:rPr>
               <a:pPr/>
-              <a:t>24</a:t>
+              <a:t>25</a:t>
             </a:fld>
             <a:endParaRPr lang="en-GB" sz="1200" b="0">
               <a:latin typeface="Times New Roman" pitchFamily="-32" charset="0"/>
@@ -4171,7 +4172,7 @@
                 <a:latin typeface="Times New Roman" pitchFamily="-32" charset="0"/>
               </a:rPr>
               <a:pPr/>
-              <a:t>6</a:t>
+              <a:t>7</a:t>
             </a:fld>
             <a:endParaRPr lang="en-GB" sz="1200" b="0">
               <a:latin typeface="Times New Roman" pitchFamily="-32" charset="0"/>
@@ -4693,7 +4694,7 @@
                 <a:latin typeface="Times New Roman" pitchFamily="-32" charset="0"/>
               </a:rPr>
               <a:pPr/>
-              <a:t>7</a:t>
+              <a:t>8</a:t>
             </a:fld>
             <a:endParaRPr lang="en-GB" sz="1200" b="0">
               <a:latin typeface="Times New Roman" pitchFamily="-32" charset="0"/>
@@ -5215,7 +5216,7 @@
                 <a:latin typeface="Times New Roman" pitchFamily="-32" charset="0"/>
               </a:rPr>
               <a:pPr/>
-              <a:t>8</a:t>
+              <a:t>9</a:t>
             </a:fld>
             <a:endParaRPr lang="en-GB" sz="1200" b="0">
               <a:latin typeface="Times New Roman" pitchFamily="-32" charset="0"/>
@@ -5737,7 +5738,7 @@
                 <a:latin typeface="Times New Roman" pitchFamily="-32" charset="0"/>
               </a:rPr>
               <a:pPr/>
-              <a:t>9</a:t>
+              <a:t>10</a:t>
             </a:fld>
             <a:endParaRPr lang="en-GB" sz="1200" b="0">
               <a:latin typeface="Times New Roman" pitchFamily="-32" charset="0"/>
@@ -6259,7 +6260,7 @@
                 <a:latin typeface="Times New Roman" pitchFamily="-32" charset="0"/>
               </a:rPr>
               <a:pPr/>
-              <a:t>12</a:t>
+              <a:t>13</a:t>
             </a:fld>
             <a:endParaRPr lang="en-GB" sz="1200" b="0">
               <a:latin typeface="Times New Roman" pitchFamily="-32" charset="0"/>
@@ -6781,7 +6782,7 @@
                 <a:latin typeface="Times New Roman" pitchFamily="-32" charset="0"/>
               </a:rPr>
               <a:pPr/>
-              <a:t>13</a:t>
+              <a:t>14</a:t>
             </a:fld>
             <a:endParaRPr lang="en-GB" sz="1200" b="0">
               <a:latin typeface="Times New Roman" pitchFamily="-32" charset="0"/>
@@ -7303,7 +7304,7 @@
                 <a:latin typeface="Times New Roman" pitchFamily="-32" charset="0"/>
               </a:rPr>
               <a:pPr/>
-              <a:t>14</a:t>
+              <a:t>15</a:t>
             </a:fld>
             <a:endParaRPr lang="en-GB" sz="1200" b="0">
               <a:latin typeface="Times New Roman" pitchFamily="-32" charset="0"/>
@@ -7825,7 +7826,7 @@
                 <a:latin typeface="Times New Roman" pitchFamily="-32" charset="0"/>
               </a:rPr>
               <a:pPr/>
-              <a:t>15</a:t>
+              <a:t>16</a:t>
             </a:fld>
             <a:endParaRPr lang="en-GB" sz="1200" b="0">
               <a:latin typeface="Times New Roman" pitchFamily="-32" charset="0"/>
@@ -8087,7 +8088,7 @@
             <a:fld id="{1D8BD707-D9CF-40AE-B4C6-C98DA3205C09}" type="datetimeFigureOut">
               <a:rPr lang="en-US" smtClean="0"/>
               <a:pPr/>
-              <a:t>10/16/25</a:t>
+              <a:t>10/18/25</a:t>
             </a:fld>
             <a:endParaRPr lang="en-US"/>
           </a:p>
@@ -8259,7 +8260,7 @@
             <a:fld id="{1D8BD707-D9CF-40AE-B4C6-C98DA3205C09}" type="datetimeFigureOut">
               <a:rPr lang="en-US" smtClean="0"/>
               <a:pPr/>
-              <a:t>10/16/25</a:t>
+              <a:t>10/18/25</a:t>
             </a:fld>
             <a:endParaRPr lang="en-US"/>
           </a:p>
@@ -8441,7 +8442,7 @@
             <a:fld id="{1D8BD707-D9CF-40AE-B4C6-C98DA3205C09}" type="datetimeFigureOut">
               <a:rPr lang="en-US" smtClean="0"/>
               <a:pPr/>
-              <a:t>10/16/25</a:t>
+              <a:t>10/18/25</a:t>
             </a:fld>
             <a:endParaRPr lang="en-US"/>
           </a:p>
@@ -9174,7 +9175,7 @@
             <a:fld id="{1D8BD707-D9CF-40AE-B4C6-C98DA3205C09}" type="datetimeFigureOut">
               <a:rPr lang="en-US" smtClean="0"/>
               <a:pPr/>
-              <a:t>10/16/25</a:t>
+              <a:t>10/18/25</a:t>
             </a:fld>
             <a:endParaRPr lang="en-US"/>
           </a:p>
@@ -9636,7 +9637,7 @@
             <a:fld id="{1D8BD707-D9CF-40AE-B4C6-C98DA3205C09}" type="datetimeFigureOut">
               <a:rPr lang="en-US" smtClean="0"/>
               <a:pPr/>
-              <a:t>10/16/25</a:t>
+              <a:t>10/18/25</a:t>
             </a:fld>
             <a:endParaRPr lang="en-US"/>
           </a:p>
@@ -9937,7 +9938,7 @@
             <a:fld id="{1D8BD707-D9CF-40AE-B4C6-C98DA3205C09}" type="datetimeFigureOut">
               <a:rPr lang="en-US" smtClean="0"/>
               <a:pPr/>
-              <a:t>10/16/25</a:t>
+              <a:t>10/18/25</a:t>
             </a:fld>
             <a:endParaRPr lang="en-US"/>
           </a:p>
@@ -10567,7 +10568,7 @@
             <a:fld id="{1D8BD707-D9CF-40AE-B4C6-C98DA3205C09}" type="datetimeFigureOut">
               <a:rPr lang="en-US" smtClean="0"/>
               <a:pPr/>
-              <a:t>10/16/25</a:t>
+              <a:t>10/18/25</a:t>
             </a:fld>
             <a:endParaRPr lang="en-US"/>
           </a:p>
@@ -10856,7 +10857,7 @@
             <a:fld id="{1D8BD707-D9CF-40AE-B4C6-C98DA3205C09}" type="datetimeFigureOut">
               <a:rPr lang="en-US" smtClean="0"/>
               <a:pPr/>
-              <a:t>10/16/25</a:t>
+              <a:t>10/18/25</a:t>
             </a:fld>
             <a:endParaRPr lang="en-US"/>
           </a:p>
@@ -11152,7 +11153,7 @@
             <a:fld id="{1D8BD707-D9CF-40AE-B4C6-C98DA3205C09}" type="datetimeFigureOut">
               <a:rPr lang="en-US" smtClean="0"/>
               <a:pPr/>
-              <a:t>10/16/25</a:t>
+              <a:t>10/18/25</a:t>
             </a:fld>
             <a:endParaRPr lang="en-US"/>
           </a:p>
@@ -11431,7 +11432,7 @@
             <a:fld id="{1D8BD707-D9CF-40AE-B4C6-C98DA3205C09}" type="datetimeFigureOut">
               <a:rPr lang="en-US" smtClean="0"/>
               <a:pPr/>
-              <a:t>10/16/25</a:t>
+              <a:t>10/18/25</a:t>
             </a:fld>
             <a:endParaRPr lang="en-US"/>
           </a:p>
@@ -11690,7 +11691,7 @@
             <a:fld id="{1D8BD707-D9CF-40AE-B4C6-C98DA3205C09}" type="datetimeFigureOut">
               <a:rPr lang="en-US" smtClean="0"/>
               <a:pPr/>
-              <a:t>10/16/25</a:t>
+              <a:t>10/18/25</a:t>
             </a:fld>
             <a:endParaRPr lang="en-US"/>
           </a:p>
@@ -11910,7 +11911,7 @@
             <a:fld id="{1D8BD707-D9CF-40AE-B4C6-C98DA3205C09}" type="datetimeFigureOut">
               <a:rPr lang="en-US" smtClean="0"/>
               <a:pPr/>
-              <a:t>10/16/25</a:t>
+              <a:t>10/18/25</a:t>
             </a:fld>
             <a:endParaRPr lang="en-US"/>
           </a:p>
@@ -12302,7 +12303,7 @@
         </p:nvSpPr>
         <p:spPr>
           <a:xfrm>
-            <a:off x="2251841" y="1501776"/>
+            <a:off x="2175641" y="1495958"/>
             <a:ext cx="7772400" cy="1470025"/>
           </a:xfrm>
         </p:spPr>
@@ -12313,12 +12314,8 @@
           <a:lstStyle/>
           <a:p>
             <a:r>
-              <a:rPr lang="en-IE" sz="4000"/>
-              <a:t>Arrays </a:t>
-            </a:r>
-            <a:r>
               <a:rPr lang="en-IE" sz="4000" dirty="0"/>
-              <a:t>and Classes</a:t>
+              <a:t>Arrays and Classes</a:t>
             </a:r>
           </a:p>
         </p:txBody>
@@ -12677,73 +12674,948 @@
       </p:grpSpPr>
       <p:sp>
         <p:nvSpPr>
-          <p:cNvPr id="4" name="TextBox 3"/>
-          <p:cNvSpPr txBox="1"/>
+          <p:cNvPr id="3075" name="Rectangle 2"/>
+          <p:cNvSpPr>
+            <a:spLocks noGrp="1" noChangeArrowheads="1"/>
+          </p:cNvSpPr>
+          <p:nvPr>
+            <p:ph type="title"/>
+          </p:nvPr>
+        </p:nvSpPr>
+        <p:spPr/>
+        <p:txBody>
+          <a:bodyPr>
+            <a:normAutofit/>
+          </a:bodyPr>
+          <a:lstStyle/>
+          <a:p>
+            <a:pPr algn="ctr"/>
+            <a:r>
+              <a:rPr lang="en-IE" dirty="0"/>
+              <a:t>Structure of an </a:t>
+            </a:r>
+            <a:r>
+              <a:rPr lang="en-IE" b="1" dirty="0">
+                <a:solidFill>
+                  <a:srgbClr val="FF0000"/>
+                </a:solidFill>
+              </a:rPr>
+              <a:t>int</a:t>
+            </a:r>
+            <a:r>
+              <a:rPr lang="en-IE" dirty="0"/>
+              <a:t> primitive array</a:t>
+            </a:r>
+            <a:endParaRPr lang="en-GB" dirty="0"/>
+          </a:p>
+        </p:txBody>
+      </p:sp>
+      <p:sp>
+        <p:nvSpPr>
+          <p:cNvPr id="2" name="Rectangle 1">
+            <a:extLst>
+              <a:ext uri="{FF2B5EF4-FFF2-40B4-BE49-F238E27FC236}">
+                <a16:creationId xmlns:a16="http://schemas.microsoft.com/office/drawing/2014/main" id="{35F7EA93-B44B-4A4E-9E6B-B94903E49E4C}"/>
+              </a:ext>
+            </a:extLst>
+          </p:cNvPr>
+          <p:cNvSpPr/>
           <p:nvPr/>
         </p:nvSpPr>
         <p:spPr>
           <a:xfrm>
-            <a:off x="3852767" y="2514600"/>
-            <a:ext cx="5019965" cy="1569660"/>
+            <a:off x="2057400" y="1713934"/>
+            <a:ext cx="2345642" cy="523220"/>
+          </a:xfrm>
+          <a:prstGeom prst="rect">
+            <a:avLst/>
+          </a:prstGeom>
+        </p:spPr>
+        <p:style>
+          <a:lnRef idx="1">
+            <a:schemeClr val="accent6"/>
+          </a:lnRef>
+          <a:fillRef idx="2">
+            <a:schemeClr val="accent6"/>
+          </a:fillRef>
+          <a:effectRef idx="1">
+            <a:schemeClr val="accent6"/>
+          </a:effectRef>
+          <a:fontRef idx="minor">
+            <a:schemeClr val="dk1"/>
+          </a:fontRef>
+        </p:style>
+        <p:txBody>
+          <a:bodyPr wrap="none">
+            <a:spAutoFit/>
+          </a:bodyPr>
+          <a:lstStyle/>
+          <a:p>
+            <a:r>
+              <a:rPr lang="en-GB" sz="2800" dirty="0" err="1">
+                <a:solidFill>
+                  <a:schemeClr val="bg1">
+                    <a:lumMod val="65000"/>
+                  </a:schemeClr>
+                </a:solidFill>
+              </a:rPr>
+              <a:t>int</a:t>
+            </a:r>
+            <a:r>
+              <a:rPr lang="en-GB" sz="2800" dirty="0">
+                <a:solidFill>
+                  <a:schemeClr val="bg1">
+                    <a:lumMod val="65000"/>
+                  </a:schemeClr>
+                </a:solidFill>
+              </a:rPr>
+              <a:t>[]  numbers;</a:t>
+            </a:r>
+          </a:p>
+        </p:txBody>
+      </p:sp>
+      <p:sp>
+        <p:nvSpPr>
+          <p:cNvPr id="17" name="Rectangle 5">
+            <a:extLst>
+              <a:ext uri="{FF2B5EF4-FFF2-40B4-BE49-F238E27FC236}">
+                <a16:creationId xmlns:a16="http://schemas.microsoft.com/office/drawing/2014/main" id="{FBFD3A2D-FE4D-4B00-B298-A720C5FC1B6E}"/>
+              </a:ext>
+            </a:extLst>
+          </p:cNvPr>
+          <p:cNvSpPr>
+            <a:spLocks noChangeArrowheads="1"/>
+          </p:cNvSpPr>
+          <p:nvPr/>
+        </p:nvSpPr>
+        <p:spPr bwMode="auto">
+          <a:xfrm>
+            <a:off x="6625066" y="2276406"/>
+            <a:ext cx="762000" cy="533400"/>
           </a:xfrm>
           <a:prstGeom prst="rect">
             <a:avLst/>
           </a:prstGeom>
           <a:noFill/>
+          <a:ln w="19050">
+            <a:solidFill>
+              <a:schemeClr val="tx1"/>
+            </a:solidFill>
+            <a:miter lim="800000"/>
+            <a:headEnd/>
+            <a:tailEnd/>
+          </a:ln>
+          <a:extLst>
+            <a:ext uri="{909E8E84-426E-40DD-AFC4-6F175D3DCCD1}">
+              <a14:hiddenFill xmlns:a14="http://schemas.microsoft.com/office/drawing/2010/main">
+                <a:solidFill>
+                  <a:srgbClr val="FFFFFF"/>
+                </a:solidFill>
+              </a14:hiddenFill>
+            </a:ext>
+          </a:extLst>
         </p:spPr>
         <p:txBody>
-          <a:bodyPr wrap="none" rtlCol="0">
+          <a:bodyPr wrap="none" anchor="ctr"/>
+          <a:lstStyle/>
+          <a:p>
+            <a:endParaRPr lang="en-IE"/>
+          </a:p>
+        </p:txBody>
+      </p:sp>
+      <p:sp>
+        <p:nvSpPr>
+          <p:cNvPr id="18" name="Text Box 11">
+            <a:extLst>
+              <a:ext uri="{FF2B5EF4-FFF2-40B4-BE49-F238E27FC236}">
+                <a16:creationId xmlns:a16="http://schemas.microsoft.com/office/drawing/2014/main" id="{A11F9141-ED94-4AF8-8E9C-6B257DD50E84}"/>
+              </a:ext>
+            </a:extLst>
+          </p:cNvPr>
+          <p:cNvSpPr txBox="1">
+            <a:spLocks noChangeArrowheads="1"/>
+          </p:cNvSpPr>
+          <p:nvPr/>
+        </p:nvSpPr>
+        <p:spPr bwMode="auto">
+          <a:xfrm>
+            <a:off x="6236925" y="1731755"/>
+            <a:ext cx="1905000" cy="523220"/>
+          </a:xfrm>
+          <a:prstGeom prst="rect">
+            <a:avLst/>
+          </a:prstGeom>
+          <a:noFill/>
+          <a:ln>
+            <a:noFill/>
+          </a:ln>
+          <a:extLst>
+            <a:ext uri="{909E8E84-426E-40DD-AFC4-6F175D3DCCD1}">
+              <a14:hiddenFill xmlns:a14="http://schemas.microsoft.com/office/drawing/2010/main">
+                <a:solidFill>
+                  <a:srgbClr val="FFFFFF"/>
+                </a:solidFill>
+              </a14:hiddenFill>
+            </a:ext>
+            <a:ext uri="{91240B29-F687-4F45-9708-019B960494DF}">
+              <a14:hiddenLine xmlns:a14="http://schemas.microsoft.com/office/drawing/2010/main" w="9525">
+                <a:solidFill>
+                  <a:srgbClr val="000000"/>
+                </a:solidFill>
+                <a:miter lim="800000"/>
+                <a:headEnd/>
+                <a:tailEnd/>
+              </a14:hiddenLine>
+            </a:ext>
+          </a:extLst>
+        </p:spPr>
+        <p:txBody>
+          <a:bodyPr wrap="square">
+            <a:spAutoFit/>
+          </a:bodyPr>
+          <a:lstStyle>
+            <a:lvl1pPr>
+              <a:defRPr sz="2400" b="1">
+                <a:solidFill>
+                  <a:schemeClr val="tx1"/>
+                </a:solidFill>
+                <a:latin typeface="Times" pitchFamily="-32" charset="0"/>
+              </a:defRPr>
+            </a:lvl1pPr>
+            <a:lvl2pPr marL="742950" indent="-285750">
+              <a:defRPr sz="2400" b="1">
+                <a:solidFill>
+                  <a:schemeClr val="tx1"/>
+                </a:solidFill>
+                <a:latin typeface="Times" pitchFamily="-32" charset="0"/>
+              </a:defRPr>
+            </a:lvl2pPr>
+            <a:lvl3pPr marL="1143000" indent="-228600">
+              <a:defRPr sz="2400" b="1">
+                <a:solidFill>
+                  <a:schemeClr val="tx1"/>
+                </a:solidFill>
+                <a:latin typeface="Times" pitchFamily="-32" charset="0"/>
+              </a:defRPr>
+            </a:lvl3pPr>
+            <a:lvl4pPr marL="1600200" indent="-228600">
+              <a:defRPr sz="2400" b="1">
+                <a:solidFill>
+                  <a:schemeClr val="tx1"/>
+                </a:solidFill>
+                <a:latin typeface="Times" pitchFamily="-32" charset="0"/>
+              </a:defRPr>
+            </a:lvl4pPr>
+            <a:lvl5pPr marL="2057400" indent="-228600">
+              <a:defRPr sz="2400" b="1">
+                <a:solidFill>
+                  <a:schemeClr val="tx1"/>
+                </a:solidFill>
+                <a:latin typeface="Times" pitchFamily="-32" charset="0"/>
+              </a:defRPr>
+            </a:lvl5pPr>
+            <a:lvl6pPr marL="2514600" indent="-228600" eaLnBrk="0" fontAlgn="base" hangingPunct="0">
+              <a:spcBef>
+                <a:spcPct val="0"/>
+              </a:spcBef>
+              <a:spcAft>
+                <a:spcPct val="0"/>
+              </a:spcAft>
+              <a:defRPr sz="2400" b="1">
+                <a:solidFill>
+                  <a:schemeClr val="tx1"/>
+                </a:solidFill>
+                <a:latin typeface="Times" pitchFamily="-32" charset="0"/>
+              </a:defRPr>
+            </a:lvl6pPr>
+            <a:lvl7pPr marL="2971800" indent="-228600" eaLnBrk="0" fontAlgn="base" hangingPunct="0">
+              <a:spcBef>
+                <a:spcPct val="0"/>
+              </a:spcBef>
+              <a:spcAft>
+                <a:spcPct val="0"/>
+              </a:spcAft>
+              <a:defRPr sz="2400" b="1">
+                <a:solidFill>
+                  <a:schemeClr val="tx1"/>
+                </a:solidFill>
+                <a:latin typeface="Times" pitchFamily="-32" charset="0"/>
+              </a:defRPr>
+            </a:lvl7pPr>
+            <a:lvl8pPr marL="3429000" indent="-228600" eaLnBrk="0" fontAlgn="base" hangingPunct="0">
+              <a:spcBef>
+                <a:spcPct val="0"/>
+              </a:spcBef>
+              <a:spcAft>
+                <a:spcPct val="0"/>
+              </a:spcAft>
+              <a:defRPr sz="2400" b="1">
+                <a:solidFill>
+                  <a:schemeClr val="tx1"/>
+                </a:solidFill>
+                <a:latin typeface="Times" pitchFamily="-32" charset="0"/>
+              </a:defRPr>
+            </a:lvl8pPr>
+            <a:lvl9pPr marL="3886200" indent="-228600" eaLnBrk="0" fontAlgn="base" hangingPunct="0">
+              <a:spcBef>
+                <a:spcPct val="0"/>
+              </a:spcBef>
+              <a:spcAft>
+                <a:spcPct val="0"/>
+              </a:spcAft>
+              <a:defRPr sz="2400" b="1">
+                <a:solidFill>
+                  <a:schemeClr val="tx1"/>
+                </a:solidFill>
+                <a:latin typeface="Times" pitchFamily="-32" charset="0"/>
+              </a:defRPr>
+            </a:lvl9pPr>
+          </a:lstStyle>
+          <a:p>
+            <a:pPr eaLnBrk="1" hangingPunct="1"/>
+            <a:r>
+              <a:rPr lang="en-GB" sz="2800" dirty="0">
+                <a:latin typeface="Courier New" pitchFamily="-32" charset="0"/>
+              </a:rPr>
+              <a:t>numbers</a:t>
+            </a:r>
+          </a:p>
+        </p:txBody>
+      </p:sp>
+      <p:cxnSp>
+        <p:nvCxnSpPr>
+          <p:cNvPr id="8" name="Straight Connector 7">
+            <a:extLst>
+              <a:ext uri="{FF2B5EF4-FFF2-40B4-BE49-F238E27FC236}">
+                <a16:creationId xmlns:a16="http://schemas.microsoft.com/office/drawing/2014/main" id="{2A041949-519F-45B3-B942-2E85729C0E5B}"/>
+              </a:ext>
+            </a:extLst>
+          </p:cNvPr>
+          <p:cNvCxnSpPr/>
+          <p:nvPr/>
+        </p:nvCxnSpPr>
+        <p:spPr>
+          <a:xfrm>
+            <a:off x="5181600" y="1447800"/>
+            <a:ext cx="0" cy="5516562"/>
+          </a:xfrm>
+          <a:prstGeom prst="line">
+            <a:avLst/>
+          </a:prstGeom>
+          <a:ln w="12700"/>
+        </p:spPr>
+        <p:style>
+          <a:lnRef idx="1">
+            <a:schemeClr val="dk1"/>
+          </a:lnRef>
+          <a:fillRef idx="0">
+            <a:schemeClr val="dk1"/>
+          </a:fillRef>
+          <a:effectRef idx="0">
+            <a:schemeClr val="dk1"/>
+          </a:effectRef>
+          <a:fontRef idx="minor">
+            <a:schemeClr val="tx1"/>
+          </a:fontRef>
+        </p:style>
+      </p:cxnSp>
+      <p:graphicFrame>
+        <p:nvGraphicFramePr>
+          <p:cNvPr id="9" name="Table 8">
+            <a:extLst>
+              <a:ext uri="{FF2B5EF4-FFF2-40B4-BE49-F238E27FC236}">
+                <a16:creationId xmlns:a16="http://schemas.microsoft.com/office/drawing/2014/main" id="{1ECF9212-2D61-43FF-9314-EB995008633C}"/>
+              </a:ext>
+            </a:extLst>
+          </p:cNvPr>
+          <p:cNvGraphicFramePr>
+            <a:graphicFrameLocks noGrp="1"/>
+          </p:cNvGraphicFramePr>
+          <p:nvPr/>
+        </p:nvGraphicFramePr>
+        <p:xfrm>
+          <a:off x="7086601" y="3733800"/>
+          <a:ext cx="2209801" cy="1828800"/>
+        </p:xfrm>
+        <a:graphic>
+          <a:graphicData uri="http://schemas.openxmlformats.org/drawingml/2006/table">
+            <a:tbl>
+              <a:tblPr>
+                <a:tableStyleId>{3C2FFA5D-87B4-456A-9821-1D502468CF0F}</a:tableStyleId>
+              </a:tblPr>
+              <a:tblGrid>
+                <a:gridCol w="685800">
+                  <a:extLst>
+                    <a:ext uri="{9D8B030D-6E8A-4147-A177-3AD203B41FA5}">
+                      <a16:colId xmlns:a16="http://schemas.microsoft.com/office/drawing/2014/main" val="3029030374"/>
+                    </a:ext>
+                  </a:extLst>
+                </a:gridCol>
+                <a:gridCol w="1524001">
+                  <a:extLst>
+                    <a:ext uri="{9D8B030D-6E8A-4147-A177-3AD203B41FA5}">
+                      <a16:colId xmlns:a16="http://schemas.microsoft.com/office/drawing/2014/main" val="4245855580"/>
+                    </a:ext>
+                  </a:extLst>
+                </a:gridCol>
+              </a:tblGrid>
+              <a:tr h="374610">
+                <a:tc>
+                  <a:txBody>
+                    <a:bodyPr/>
+                    <a:lstStyle/>
+                    <a:p>
+                      <a:pPr algn="ctr"/>
+                      <a:r>
+                        <a:rPr lang="en-IE" sz="2400" b="1" dirty="0">
+                          <a:solidFill>
+                            <a:srgbClr val="0070C0"/>
+                          </a:solidFill>
+                        </a:rPr>
+                        <a:t>0</a:t>
+                      </a:r>
+                    </a:p>
+                  </a:txBody>
+                  <a:tcPr/>
+                </a:tc>
+                <a:tc>
+                  <a:txBody>
+                    <a:bodyPr/>
+                    <a:lstStyle/>
+                    <a:p>
+                      <a:pPr algn="ctr"/>
+                      <a:r>
+                        <a:rPr lang="en-IE" sz="2400" b="1" dirty="0"/>
+                        <a:t>12</a:t>
+                      </a:r>
+                    </a:p>
+                  </a:txBody>
+                  <a:tcPr/>
+                </a:tc>
+                <a:extLst>
+                  <a:ext uri="{0D108BD9-81ED-4DB2-BD59-A6C34878D82A}">
+                    <a16:rowId xmlns:a16="http://schemas.microsoft.com/office/drawing/2014/main" val="1821123948"/>
+                  </a:ext>
+                </a:extLst>
+              </a:tr>
+              <a:tr h="374610">
+                <a:tc>
+                  <a:txBody>
+                    <a:bodyPr/>
+                    <a:lstStyle/>
+                    <a:p>
+                      <a:pPr algn="ctr"/>
+                      <a:r>
+                        <a:rPr lang="en-IE" sz="2400" b="1" dirty="0">
+                          <a:solidFill>
+                            <a:srgbClr val="0070C0"/>
+                          </a:solidFill>
+                        </a:rPr>
+                        <a:t>1</a:t>
+                      </a:r>
+                    </a:p>
+                  </a:txBody>
+                  <a:tcPr/>
+                </a:tc>
+                <a:tc>
+                  <a:txBody>
+                    <a:bodyPr/>
+                    <a:lstStyle/>
+                    <a:p>
+                      <a:pPr algn="ctr"/>
+                      <a:r>
+                        <a:rPr lang="en-IE" sz="2400" b="1" dirty="0"/>
+                        <a:t>0</a:t>
+                      </a:r>
+                    </a:p>
+                  </a:txBody>
+                  <a:tcPr/>
+                </a:tc>
+                <a:extLst>
+                  <a:ext uri="{0D108BD9-81ED-4DB2-BD59-A6C34878D82A}">
+                    <a16:rowId xmlns:a16="http://schemas.microsoft.com/office/drawing/2014/main" val="4286675138"/>
+                  </a:ext>
+                </a:extLst>
+              </a:tr>
+              <a:tr h="374610">
+                <a:tc>
+                  <a:txBody>
+                    <a:bodyPr/>
+                    <a:lstStyle/>
+                    <a:p>
+                      <a:pPr algn="ctr"/>
+                      <a:r>
+                        <a:rPr lang="en-IE" sz="2400" b="1" dirty="0">
+                          <a:solidFill>
+                            <a:srgbClr val="0070C0"/>
+                          </a:solidFill>
+                        </a:rPr>
+                        <a:t>2</a:t>
+                      </a:r>
+                    </a:p>
+                  </a:txBody>
+                  <a:tcPr/>
+                </a:tc>
+                <a:tc>
+                  <a:txBody>
+                    <a:bodyPr/>
+                    <a:lstStyle/>
+                    <a:p>
+                      <a:pPr algn="ctr"/>
+                      <a:r>
+                        <a:rPr lang="en-IE" sz="2400" b="1" dirty="0"/>
+                        <a:t>18</a:t>
+                      </a:r>
+                    </a:p>
+                  </a:txBody>
+                  <a:tcPr/>
+                </a:tc>
+                <a:extLst>
+                  <a:ext uri="{0D108BD9-81ED-4DB2-BD59-A6C34878D82A}">
+                    <a16:rowId xmlns:a16="http://schemas.microsoft.com/office/drawing/2014/main" val="1375079718"/>
+                  </a:ext>
+                </a:extLst>
+              </a:tr>
+              <a:tr h="374610">
+                <a:tc>
+                  <a:txBody>
+                    <a:bodyPr/>
+                    <a:lstStyle/>
+                    <a:p>
+                      <a:pPr algn="ctr"/>
+                      <a:r>
+                        <a:rPr lang="en-IE" sz="2400" b="1" dirty="0">
+                          <a:solidFill>
+                            <a:srgbClr val="0070C0"/>
+                          </a:solidFill>
+                        </a:rPr>
+                        <a:t>3</a:t>
+                      </a:r>
+                    </a:p>
+                  </a:txBody>
+                  <a:tcPr/>
+                </a:tc>
+                <a:tc>
+                  <a:txBody>
+                    <a:bodyPr/>
+                    <a:lstStyle/>
+                    <a:p>
+                      <a:pPr algn="ctr"/>
+                      <a:r>
+                        <a:rPr lang="en-IE" sz="2400" b="1" dirty="0"/>
+                        <a:t>0</a:t>
+                      </a:r>
+                    </a:p>
+                  </a:txBody>
+                  <a:tcPr/>
+                </a:tc>
+                <a:extLst>
+                  <a:ext uri="{0D108BD9-81ED-4DB2-BD59-A6C34878D82A}">
+                    <a16:rowId xmlns:a16="http://schemas.microsoft.com/office/drawing/2014/main" val="365423453"/>
+                  </a:ext>
+                </a:extLst>
+              </a:tr>
+            </a:tbl>
+          </a:graphicData>
+        </a:graphic>
+      </p:graphicFrame>
+      <p:cxnSp>
+        <p:nvCxnSpPr>
+          <p:cNvPr id="6" name="Straight Arrow Connector 5">
+            <a:extLst>
+              <a:ext uri="{FF2B5EF4-FFF2-40B4-BE49-F238E27FC236}">
+                <a16:creationId xmlns:a16="http://schemas.microsoft.com/office/drawing/2014/main" id="{2E0691DA-9F50-43E8-A565-BD56F9D71203}"/>
+              </a:ext>
+            </a:extLst>
+          </p:cNvPr>
+          <p:cNvCxnSpPr>
+            <a:endCxn id="9" idx="0"/>
+          </p:cNvCxnSpPr>
+          <p:nvPr/>
+        </p:nvCxnSpPr>
+        <p:spPr>
+          <a:xfrm>
+            <a:off x="7006066" y="2543106"/>
+            <a:ext cx="1185434" cy="1190694"/>
+          </a:xfrm>
+          <a:prstGeom prst="straightConnector1">
+            <a:avLst/>
+          </a:prstGeom>
+          <a:ln w="38100">
+            <a:tailEnd type="triangle"/>
+          </a:ln>
+        </p:spPr>
+        <p:style>
+          <a:lnRef idx="1">
+            <a:schemeClr val="accent1"/>
+          </a:lnRef>
+          <a:fillRef idx="0">
+            <a:schemeClr val="accent1"/>
+          </a:fillRef>
+          <a:effectRef idx="0">
+            <a:schemeClr val="accent1"/>
+          </a:effectRef>
+          <a:fontRef idx="minor">
+            <a:schemeClr val="tx1"/>
+          </a:fontRef>
+        </p:style>
+      </p:cxnSp>
+      <p:sp>
+        <p:nvSpPr>
+          <p:cNvPr id="14" name="Rectangle 13">
+            <a:extLst>
+              <a:ext uri="{FF2B5EF4-FFF2-40B4-BE49-F238E27FC236}">
+                <a16:creationId xmlns:a16="http://schemas.microsoft.com/office/drawing/2014/main" id="{7F374B64-6BC7-42EC-8C09-493550023041}"/>
+              </a:ext>
+            </a:extLst>
+          </p:cNvPr>
+          <p:cNvSpPr/>
+          <p:nvPr/>
+        </p:nvSpPr>
+        <p:spPr>
+          <a:xfrm>
+            <a:off x="1905001" y="4658380"/>
+            <a:ext cx="2685607" cy="523220"/>
+          </a:xfrm>
+          <a:prstGeom prst="rect">
+            <a:avLst/>
+          </a:prstGeom>
+        </p:spPr>
+        <p:style>
+          <a:lnRef idx="1">
+            <a:schemeClr val="accent6"/>
+          </a:lnRef>
+          <a:fillRef idx="2">
+            <a:schemeClr val="accent6"/>
+          </a:fillRef>
+          <a:effectRef idx="1">
+            <a:schemeClr val="accent6"/>
+          </a:effectRef>
+          <a:fontRef idx="minor">
+            <a:schemeClr val="dk1"/>
+          </a:fontRef>
+        </p:style>
+        <p:txBody>
+          <a:bodyPr wrap="none">
             <a:spAutoFit/>
           </a:bodyPr>
           <a:lstStyle/>
           <a:p>
+            <a:r>
+              <a:rPr lang="en-GB" sz="2800" dirty="0">
+                <a:solidFill>
+                  <a:schemeClr val="bg1">
+                    <a:lumMod val="65000"/>
+                  </a:schemeClr>
+                </a:solidFill>
+              </a:rPr>
+              <a:t>numbers[0] = 12;</a:t>
+            </a:r>
+            <a:endParaRPr lang="en-IE" sz="2800" dirty="0">
+              <a:solidFill>
+                <a:schemeClr val="bg1">
+                  <a:lumMod val="65000"/>
+                </a:schemeClr>
+              </a:solidFill>
+            </a:endParaRPr>
+          </a:p>
+        </p:txBody>
+      </p:sp>
+      <p:sp>
+        <p:nvSpPr>
+          <p:cNvPr id="15" name="Rectangle 14">
+            <a:extLst>
+              <a:ext uri="{FF2B5EF4-FFF2-40B4-BE49-F238E27FC236}">
+                <a16:creationId xmlns:a16="http://schemas.microsoft.com/office/drawing/2014/main" id="{9AF5FC9E-82FB-4509-9783-9F3D9B5246D3}"/>
+              </a:ext>
+            </a:extLst>
+          </p:cNvPr>
+          <p:cNvSpPr/>
+          <p:nvPr/>
+        </p:nvSpPr>
+        <p:spPr>
+          <a:xfrm>
+            <a:off x="1676401" y="2667000"/>
+            <a:ext cx="3411511" cy="523220"/>
+          </a:xfrm>
+          <a:prstGeom prst="rect">
+            <a:avLst/>
+          </a:prstGeom>
+        </p:spPr>
+        <p:style>
+          <a:lnRef idx="1">
+            <a:schemeClr val="accent6"/>
+          </a:lnRef>
+          <a:fillRef idx="2">
+            <a:schemeClr val="accent6"/>
+          </a:fillRef>
+          <a:effectRef idx="1">
+            <a:schemeClr val="accent6"/>
+          </a:effectRef>
+          <a:fontRef idx="minor">
+            <a:schemeClr val="dk1"/>
+          </a:fontRef>
+        </p:style>
+        <p:txBody>
+          <a:bodyPr wrap="none">
+            <a:spAutoFit/>
+          </a:bodyPr>
+          <a:lstStyle/>
+          <a:p>
+            <a:r>
+              <a:rPr lang="en-GB" sz="2800" dirty="0">
+                <a:solidFill>
+                  <a:schemeClr val="bg1">
+                    <a:lumMod val="65000"/>
+                  </a:schemeClr>
+                </a:solidFill>
+              </a:rPr>
+              <a:t>numbers = new </a:t>
+            </a:r>
+            <a:r>
+              <a:rPr lang="en-GB" sz="2800" dirty="0" err="1">
+                <a:solidFill>
+                  <a:schemeClr val="bg1">
+                    <a:lumMod val="65000"/>
+                  </a:schemeClr>
+                </a:solidFill>
+              </a:rPr>
+              <a:t>int</a:t>
+            </a:r>
+            <a:r>
+              <a:rPr lang="en-GB" sz="2800" dirty="0">
+                <a:solidFill>
+                  <a:schemeClr val="bg1">
+                    <a:lumMod val="65000"/>
+                  </a:schemeClr>
+                </a:solidFill>
+              </a:rPr>
+              <a:t>[4];</a:t>
+            </a:r>
+            <a:endParaRPr lang="en-IE" sz="2800" dirty="0">
+              <a:solidFill>
+                <a:schemeClr val="bg1">
+                  <a:lumMod val="65000"/>
+                </a:schemeClr>
+              </a:solidFill>
+            </a:endParaRPr>
+          </a:p>
+        </p:txBody>
+      </p:sp>
+      <p:sp>
+        <p:nvSpPr>
+          <p:cNvPr id="16" name="Rectangle 15">
+            <a:extLst>
+              <a:ext uri="{FF2B5EF4-FFF2-40B4-BE49-F238E27FC236}">
+                <a16:creationId xmlns:a16="http://schemas.microsoft.com/office/drawing/2014/main" id="{8D084A7C-13AA-4193-880D-38973F9A4D1B}"/>
+              </a:ext>
+            </a:extLst>
+          </p:cNvPr>
+          <p:cNvSpPr/>
+          <p:nvPr/>
+        </p:nvSpPr>
+        <p:spPr>
+          <a:xfrm>
+            <a:off x="1933798" y="3657600"/>
+            <a:ext cx="2685607" cy="523220"/>
+          </a:xfrm>
+          <a:prstGeom prst="rect">
+            <a:avLst/>
+          </a:prstGeom>
+        </p:spPr>
+        <p:style>
+          <a:lnRef idx="1">
+            <a:schemeClr val="accent6"/>
+          </a:lnRef>
+          <a:fillRef idx="2">
+            <a:schemeClr val="accent6"/>
+          </a:fillRef>
+          <a:effectRef idx="1">
+            <a:schemeClr val="accent6"/>
+          </a:effectRef>
+          <a:fontRef idx="minor">
+            <a:schemeClr val="dk1"/>
+          </a:fontRef>
+        </p:style>
+        <p:txBody>
+          <a:bodyPr wrap="none">
+            <a:spAutoFit/>
+          </a:bodyPr>
+          <a:lstStyle/>
+          <a:p>
+            <a:r>
+              <a:rPr lang="en-GB" sz="2800" dirty="0">
+                <a:solidFill>
+                  <a:schemeClr val="bg1">
+                    <a:lumMod val="65000"/>
+                  </a:schemeClr>
+                </a:solidFill>
+              </a:rPr>
+              <a:t>numbers[2] = 18;</a:t>
+            </a:r>
+            <a:endParaRPr lang="en-IE" sz="2800" dirty="0">
+              <a:solidFill>
+                <a:schemeClr val="bg1">
+                  <a:lumMod val="65000"/>
+                </a:schemeClr>
+              </a:solidFill>
+            </a:endParaRPr>
+          </a:p>
+        </p:txBody>
+      </p:sp>
+      <p:sp>
+        <p:nvSpPr>
+          <p:cNvPr id="20" name="Rectangle: Rounded Corners 19">
+            <a:extLst>
+              <a:ext uri="{FF2B5EF4-FFF2-40B4-BE49-F238E27FC236}">
+                <a16:creationId xmlns:a16="http://schemas.microsoft.com/office/drawing/2014/main" id="{287FEE5B-B7DB-4364-8031-BB5CD89E9089}"/>
+              </a:ext>
+            </a:extLst>
+          </p:cNvPr>
+          <p:cNvSpPr/>
+          <p:nvPr/>
+        </p:nvSpPr>
+        <p:spPr>
+          <a:xfrm>
+            <a:off x="5503695" y="5638869"/>
+            <a:ext cx="4859505" cy="1143000"/>
+          </a:xfrm>
+          <a:prstGeom prst="roundRect">
+            <a:avLst/>
+          </a:prstGeom>
+        </p:spPr>
+        <p:style>
+          <a:lnRef idx="1">
+            <a:schemeClr val="accent2"/>
+          </a:lnRef>
+          <a:fillRef idx="2">
+            <a:schemeClr val="accent2"/>
+          </a:fillRef>
+          <a:effectRef idx="1">
+            <a:schemeClr val="accent2"/>
+          </a:effectRef>
+          <a:fontRef idx="minor">
+            <a:schemeClr val="dk1"/>
+          </a:fontRef>
+        </p:style>
+        <p:txBody>
+          <a:bodyPr rtlCol="0" anchor="ctr"/>
+          <a:lstStyle/>
+          <a:p>
             <a:pPr algn="ctr"/>
             <a:r>
-              <a:rPr lang="en-GB" sz="4800" dirty="0">
-                <a:solidFill>
-                  <a:srgbClr val="FF0000"/>
-                </a:solidFill>
-              </a:rPr>
-              <a:t>2) Array of </a:t>
-            </a:r>
-            <a:r>
-              <a:rPr lang="en-GB" sz="4800" b="1" dirty="0">
-                <a:solidFill>
-                  <a:srgbClr val="FF0000"/>
-                </a:solidFill>
-              </a:rPr>
-              <a:t>Objects</a:t>
-            </a:r>
-            <a:r>
-              <a:rPr lang="en-GB" sz="4800" dirty="0">
-                <a:solidFill>
-                  <a:srgbClr val="FF0000"/>
-                </a:solidFill>
-              </a:rPr>
-              <a:t> </a:t>
+              <a:rPr lang="en-IE" sz="2400" dirty="0"/>
+              <a:t>Here we are printing the contents of index location 2 </a:t>
             </a:r>
             <a:br>
-              <a:rPr lang="en-GB" sz="4800" dirty="0">
-                <a:solidFill>
-                  <a:srgbClr val="FF0000"/>
-                </a:solidFill>
-              </a:rPr>
+              <a:rPr lang="en-IE" sz="2400" dirty="0"/>
             </a:br>
             <a:r>
-              <a:rPr lang="en-GB" sz="4800" dirty="0">
-                <a:solidFill>
-                  <a:srgbClr val="FF0000"/>
-                </a:solidFill>
-              </a:rPr>
-              <a:t>e.g. String</a:t>
-            </a:r>
+              <a:rPr lang="en-IE" sz="2400" dirty="0"/>
+              <a:t>i.e. 18 will be printed to the console.</a:t>
+            </a:r>
+          </a:p>
+        </p:txBody>
+      </p:sp>
+      <p:sp>
+        <p:nvSpPr>
+          <p:cNvPr id="21" name="Rectangle 20">
+            <a:extLst>
+              <a:ext uri="{FF2B5EF4-FFF2-40B4-BE49-F238E27FC236}">
+                <a16:creationId xmlns:a16="http://schemas.microsoft.com/office/drawing/2014/main" id="{75A44A42-7850-424F-8580-12BEFA62B01D}"/>
+              </a:ext>
+            </a:extLst>
+          </p:cNvPr>
+          <p:cNvSpPr/>
+          <p:nvPr/>
+        </p:nvSpPr>
+        <p:spPr>
+          <a:xfrm>
+            <a:off x="1828062" y="5682972"/>
+            <a:ext cx="2964594" cy="523220"/>
+          </a:xfrm>
+          <a:prstGeom prst="rect">
+            <a:avLst/>
+          </a:prstGeom>
+        </p:spPr>
+        <p:style>
+          <a:lnRef idx="1">
+            <a:schemeClr val="accent6"/>
+          </a:lnRef>
+          <a:fillRef idx="2">
+            <a:schemeClr val="accent6"/>
+          </a:fillRef>
+          <a:effectRef idx="1">
+            <a:schemeClr val="accent6"/>
+          </a:effectRef>
+          <a:fontRef idx="minor">
+            <a:schemeClr val="dk1"/>
+          </a:fontRef>
+        </p:style>
+        <p:txBody>
+          <a:bodyPr wrap="none">
+            <a:spAutoFit/>
+          </a:bodyPr>
+          <a:lstStyle/>
+          <a:p>
+            <a:r>
+              <a:rPr lang="en-GB" sz="2800" b="1" dirty="0"/>
+              <a:t>print(numbers[2]);</a:t>
+            </a:r>
+            <a:endParaRPr lang="en-IE" sz="2800" b="1" dirty="0"/>
+          </a:p>
+        </p:txBody>
+      </p:sp>
+      <p:sp>
+        <p:nvSpPr>
+          <p:cNvPr id="22" name="Oval 21">
+            <a:extLst>
+              <a:ext uri="{FF2B5EF4-FFF2-40B4-BE49-F238E27FC236}">
+                <a16:creationId xmlns:a16="http://schemas.microsoft.com/office/drawing/2014/main" id="{D5DF7F76-128F-4003-87B4-11F6C4CEE431}"/>
+              </a:ext>
+            </a:extLst>
+          </p:cNvPr>
+          <p:cNvSpPr/>
+          <p:nvPr/>
+        </p:nvSpPr>
+        <p:spPr>
+          <a:xfrm>
+            <a:off x="6781800" y="4597365"/>
+            <a:ext cx="2971800" cy="523806"/>
+          </a:xfrm>
+          <a:prstGeom prst="ellipse">
+            <a:avLst/>
+          </a:prstGeom>
+          <a:noFill/>
+          <a:ln w="76200"/>
+        </p:spPr>
+        <p:style>
+          <a:lnRef idx="2">
+            <a:schemeClr val="accent2"/>
+          </a:lnRef>
+          <a:fillRef idx="1">
+            <a:schemeClr val="lt1"/>
+          </a:fillRef>
+          <a:effectRef idx="0">
+            <a:schemeClr val="accent2"/>
+          </a:effectRef>
+          <a:fontRef idx="minor">
+            <a:schemeClr val="dk1"/>
+          </a:fontRef>
+        </p:style>
+        <p:txBody>
+          <a:bodyPr rtlCol="0" anchor="ctr"/>
+          <a:lstStyle/>
+          <a:p>
+            <a:pPr algn="ctr"/>
+            <a:endParaRPr lang="en-IE"/>
           </a:p>
         </p:txBody>
       </p:sp>
     </p:spTree>
     <p:extLst>
       <p:ext uri="{BB962C8B-B14F-4D97-AF65-F5344CB8AC3E}">
-        <p14:creationId xmlns:p14="http://schemas.microsoft.com/office/powerpoint/2010/main" val="1252720450"/>
+        <p14:creationId xmlns:p14="http://schemas.microsoft.com/office/powerpoint/2010/main" val="2177511620"/>
       </p:ext>
     </p:extLst>
   </p:cSld>
@@ -12754,6 +13626,378 @@
 </file>
 
 <file path=ppt/slides/slide11.xml><?xml version="1.0" encoding="utf-8"?>
+<p:sld xmlns:a="http://schemas.openxmlformats.org/drawingml/2006/main" xmlns:r="http://schemas.openxmlformats.org/officeDocument/2006/relationships" xmlns:p="http://schemas.openxmlformats.org/presentationml/2006/main">
+  <p:cSld>
+    <p:spTree>
+      <p:nvGrpSpPr>
+        <p:cNvPr id="1" name="">
+          <a:extLst>
+            <a:ext uri="{FF2B5EF4-FFF2-40B4-BE49-F238E27FC236}">
+              <a16:creationId xmlns:a16="http://schemas.microsoft.com/office/drawing/2014/main" id="{447F2EFD-A820-381C-0CA8-7645E85AEDF1}"/>
+            </a:ext>
+          </a:extLst>
+        </p:cNvPr>
+        <p:cNvGrpSpPr/>
+        <p:nvPr/>
+      </p:nvGrpSpPr>
+      <p:grpSpPr>
+        <a:xfrm>
+          <a:off x="0" y="0"/>
+          <a:ext cx="0" cy="0"/>
+          <a:chOff x="0" y="0"/>
+          <a:chExt cx="0" cy="0"/>
+        </a:xfrm>
+      </p:grpSpPr>
+      <p:sp>
+        <p:nvSpPr>
+          <p:cNvPr id="2" name="Title 1">
+            <a:extLst>
+              <a:ext uri="{FF2B5EF4-FFF2-40B4-BE49-F238E27FC236}">
+                <a16:creationId xmlns:a16="http://schemas.microsoft.com/office/drawing/2014/main" id="{259DA616-D2A2-5805-0197-64D9BD24B7E6}"/>
+              </a:ext>
+            </a:extLst>
+          </p:cNvPr>
+          <p:cNvSpPr>
+            <a:spLocks noGrp="1"/>
+          </p:cNvSpPr>
+          <p:nvPr>
+            <p:ph type="title"/>
+          </p:nvPr>
+        </p:nvSpPr>
+        <p:spPr/>
+        <p:txBody>
+          <a:bodyPr/>
+          <a:lstStyle/>
+          <a:p>
+            <a:r>
+              <a:rPr lang="en-IE"/>
+              <a:t>Topics list</a:t>
+            </a:r>
+            <a:endParaRPr lang="en-IE" dirty="0"/>
+          </a:p>
+        </p:txBody>
+      </p:sp>
+      <p:sp>
+        <p:nvSpPr>
+          <p:cNvPr id="5" name="Content Placeholder 4">
+            <a:extLst>
+              <a:ext uri="{FF2B5EF4-FFF2-40B4-BE49-F238E27FC236}">
+                <a16:creationId xmlns:a16="http://schemas.microsoft.com/office/drawing/2014/main" id="{300EEC30-8C09-CBA4-12A2-EEEE445B2AF0}"/>
+              </a:ext>
+            </a:extLst>
+          </p:cNvPr>
+          <p:cNvSpPr>
+            <a:spLocks noGrp="1"/>
+          </p:cNvSpPr>
+          <p:nvPr>
+            <p:ph idx="1"/>
+          </p:nvPr>
+        </p:nvSpPr>
+        <p:spPr/>
+        <p:txBody>
+          <a:bodyPr>
+            <a:normAutofit/>
+          </a:bodyPr>
+          <a:lstStyle/>
+          <a:p>
+            <a:pPr marL="0" indent="0">
+              <a:buNone/>
+            </a:pPr>
+            <a:r>
+              <a:rPr lang="en-IE" dirty="0"/>
+              <a:t>1.  </a:t>
+            </a:r>
+            <a:r>
+              <a:rPr lang="en-IE" sz="4000" dirty="0"/>
+              <a:t>Arrays of different types</a:t>
+            </a:r>
+          </a:p>
+          <a:p>
+            <a:pPr marL="514350" indent="-514350">
+              <a:buFont typeface="+mj-lt"/>
+              <a:buAutoNum type="arabicPeriod" startAt="2"/>
+            </a:pPr>
+            <a:r>
+              <a:rPr lang="en-IE" sz="4000" dirty="0"/>
+              <a:t>Arrays of primitive types</a:t>
+            </a:r>
+          </a:p>
+          <a:p>
+            <a:pPr marL="514350" indent="-514350">
+              <a:buFont typeface="+mj-lt"/>
+              <a:buAutoNum type="arabicPeriod" startAt="2"/>
+            </a:pPr>
+            <a:r>
+              <a:rPr lang="en-IE" sz="4000" dirty="0"/>
+              <a:t>Arrays of objects</a:t>
+            </a:r>
+          </a:p>
+          <a:p>
+            <a:pPr marL="914400" lvl="1" indent="-514350"/>
+            <a:r>
+              <a:rPr lang="en-IE" sz="4000" dirty="0"/>
+              <a:t>String</a:t>
+            </a:r>
+          </a:p>
+          <a:p>
+            <a:pPr marL="914400" lvl="1" indent="-514350"/>
+            <a:r>
+              <a:rPr lang="en-IE" sz="4000" dirty="0"/>
+              <a:t>Person</a:t>
+            </a:r>
+          </a:p>
+          <a:p>
+            <a:pPr marL="0" indent="0">
+              <a:buNone/>
+            </a:pPr>
+            <a:endParaRPr lang="en-IE" dirty="0"/>
+          </a:p>
+        </p:txBody>
+      </p:sp>
+      <p:sp>
+        <p:nvSpPr>
+          <p:cNvPr id="6" name="Rectangle 5">
+            <a:extLst>
+              <a:ext uri="{FF2B5EF4-FFF2-40B4-BE49-F238E27FC236}">
+                <a16:creationId xmlns:a16="http://schemas.microsoft.com/office/drawing/2014/main" id="{3B828E23-FA13-B0C2-68DE-5FCC7AD2D33B}"/>
+              </a:ext>
+            </a:extLst>
+          </p:cNvPr>
+          <p:cNvSpPr/>
+          <p:nvPr/>
+        </p:nvSpPr>
+        <p:spPr>
+          <a:xfrm>
+            <a:off x="599661" y="3162300"/>
+            <a:ext cx="6172200" cy="533400"/>
+          </a:xfrm>
+          <a:prstGeom prst="rect">
+            <a:avLst/>
+          </a:prstGeom>
+          <a:noFill/>
+          <a:ln w="44450">
+            <a:solidFill>
+              <a:srgbClr val="FF0000"/>
+            </a:solidFill>
+          </a:ln>
+        </p:spPr>
+        <p:style>
+          <a:lnRef idx="2">
+            <a:schemeClr val="accent1">
+              <a:shade val="50000"/>
+            </a:schemeClr>
+          </a:lnRef>
+          <a:fillRef idx="1">
+            <a:schemeClr val="accent1"/>
+          </a:fillRef>
+          <a:effectRef idx="0">
+            <a:schemeClr val="accent1"/>
+          </a:effectRef>
+          <a:fontRef idx="minor">
+            <a:schemeClr val="lt1"/>
+          </a:fontRef>
+        </p:style>
+        <p:txBody>
+          <a:bodyPr rtlCol="0" anchor="ctr"/>
+          <a:lstStyle/>
+          <a:p>
+            <a:pPr algn="ctr"/>
+            <a:endParaRPr lang="en-IE"/>
+          </a:p>
+        </p:txBody>
+      </p:sp>
+      <p:sp>
+        <p:nvSpPr>
+          <p:cNvPr id="3" name="Arrow: Right 1">
+            <a:extLst>
+              <a:ext uri="{FF2B5EF4-FFF2-40B4-BE49-F238E27FC236}">
+                <a16:creationId xmlns:a16="http://schemas.microsoft.com/office/drawing/2014/main" id="{A20DB7A9-8799-91D3-F68C-6398877D8DB2}"/>
+              </a:ext>
+            </a:extLst>
+          </p:cNvPr>
+          <p:cNvSpPr/>
+          <p:nvPr/>
+        </p:nvSpPr>
+        <p:spPr>
+          <a:xfrm flipH="1">
+            <a:off x="2971800" y="4038600"/>
+            <a:ext cx="3984878" cy="381001"/>
+          </a:xfrm>
+          <a:prstGeom prst="rightArrow">
+            <a:avLst/>
+          </a:prstGeom>
+        </p:spPr>
+        <p:style>
+          <a:lnRef idx="2">
+            <a:schemeClr val="accent2">
+              <a:shade val="50000"/>
+            </a:schemeClr>
+          </a:lnRef>
+          <a:fillRef idx="1">
+            <a:schemeClr val="accent2"/>
+          </a:fillRef>
+          <a:effectRef idx="0">
+            <a:schemeClr val="accent2"/>
+          </a:effectRef>
+          <a:fontRef idx="minor">
+            <a:schemeClr val="lt1"/>
+          </a:fontRef>
+        </p:style>
+        <p:txBody>
+          <a:bodyPr rtlCol="0" anchor="ctr"/>
+          <a:lstStyle/>
+          <a:p>
+            <a:pPr algn="ctr"/>
+            <a:endParaRPr lang="en-IE"/>
+          </a:p>
+        </p:txBody>
+      </p:sp>
+    </p:spTree>
+    <p:extLst>
+      <p:ext uri="{BB962C8B-B14F-4D97-AF65-F5344CB8AC3E}">
+        <p14:creationId xmlns:p14="http://schemas.microsoft.com/office/powerpoint/2010/main" val="2208125787"/>
+      </p:ext>
+    </p:extLst>
+  </p:cSld>
+  <p:clrMapOvr>
+    <a:masterClrMapping/>
+  </p:clrMapOvr>
+  <p:timing>
+    <p:tnLst>
+      <p:par>
+        <p:cTn id="1" dur="indefinite" restart="never" nodeType="tmRoot">
+          <p:childTnLst>
+            <p:seq concurrent="1" nextAc="seek">
+              <p:cTn id="2" dur="indefinite" nodeType="mainSeq">
+                <p:childTnLst>
+                  <p:par>
+                    <p:cTn id="3" fill="hold">
+                      <p:stCondLst>
+                        <p:cond delay="indefinite"/>
+                      </p:stCondLst>
+                      <p:childTnLst>
+                        <p:par>
+                          <p:cTn id="4" fill="hold">
+                            <p:stCondLst>
+                              <p:cond delay="0"/>
+                            </p:stCondLst>
+                            <p:childTnLst>
+                              <p:par>
+                                <p:cTn id="5" presetID="21" presetClass="entr" presetSubtype="1" fill="hold" grpId="0" nodeType="clickEffect">
+                                  <p:stCondLst>
+                                    <p:cond delay="0"/>
+                                  </p:stCondLst>
+                                  <p:childTnLst>
+                                    <p:set>
+                                      <p:cBhvr>
+                                        <p:cTn id="6" dur="1" fill="hold">
+                                          <p:stCondLst>
+                                            <p:cond delay="0"/>
+                                          </p:stCondLst>
+                                        </p:cTn>
+                                        <p:tgtEl>
+                                          <p:spTgt spid="6"/>
+                                        </p:tgtEl>
+                                        <p:attrNameLst>
+                                          <p:attrName>style.visibility</p:attrName>
+                                        </p:attrNameLst>
+                                      </p:cBhvr>
+                                      <p:to>
+                                        <p:strVal val="visible"/>
+                                      </p:to>
+                                    </p:set>
+                                    <p:animEffect transition="in" filter="wheel(1)">
+                                      <p:cBhvr>
+                                        <p:cTn id="7" dur="2000"/>
+                                        <p:tgtEl>
+                                          <p:spTgt spid="6"/>
+                                        </p:tgtEl>
+                                      </p:cBhvr>
+                                    </p:animEffect>
+                                  </p:childTnLst>
+                                </p:cTn>
+                              </p:par>
+                            </p:childTnLst>
+                          </p:cTn>
+                        </p:par>
+                      </p:childTnLst>
+                    </p:cTn>
+                  </p:par>
+                  <p:par>
+                    <p:cTn id="8" fill="hold">
+                      <p:stCondLst>
+                        <p:cond delay="indefinite"/>
+                      </p:stCondLst>
+                      <p:childTnLst>
+                        <p:par>
+                          <p:cTn id="9" fill="hold">
+                            <p:stCondLst>
+                              <p:cond delay="0"/>
+                            </p:stCondLst>
+                            <p:childTnLst>
+                              <p:par>
+                                <p:cTn id="10" presetID="1" presetClass="entr" presetSubtype="0" fill="hold" grpId="0" nodeType="clickEffect">
+                                  <p:stCondLst>
+                                    <p:cond delay="0"/>
+                                  </p:stCondLst>
+                                  <p:childTnLst>
+                                    <p:set>
+                                      <p:cBhvr>
+                                        <p:cTn id="11" dur="1" fill="hold">
+                                          <p:stCondLst>
+                                            <p:cond delay="0"/>
+                                          </p:stCondLst>
+                                        </p:cTn>
+                                        <p:tgtEl>
+                                          <p:spTgt spid="3"/>
+                                        </p:tgtEl>
+                                        <p:attrNameLst>
+                                          <p:attrName>style.visibility</p:attrName>
+                                        </p:attrNameLst>
+                                      </p:cBhvr>
+                                      <p:to>
+                                        <p:strVal val="visible"/>
+                                      </p:to>
+                                    </p:set>
+                                  </p:childTnLst>
+                                </p:cTn>
+                              </p:par>
+                            </p:childTnLst>
+                          </p:cTn>
+                        </p:par>
+                      </p:childTnLst>
+                    </p:cTn>
+                  </p:par>
+                </p:childTnLst>
+              </p:cTn>
+              <p:prevCondLst>
+                <p:cond evt="onPrev" delay="0">
+                  <p:tgtEl>
+                    <p:sldTgt/>
+                  </p:tgtEl>
+                </p:cond>
+              </p:prevCondLst>
+              <p:nextCondLst>
+                <p:cond evt="onNext" delay="0">
+                  <p:tgtEl>
+                    <p:sldTgt/>
+                  </p:tgtEl>
+                </p:cond>
+              </p:nextCondLst>
+            </p:seq>
+          </p:childTnLst>
+        </p:cTn>
+      </p:par>
+    </p:tnLst>
+    <p:bldLst>
+      <p:bldP spid="6" grpId="0" animBg="1"/>
+      <p:bldP spid="3" grpId="0" animBg="1"/>
+    </p:bldLst>
+  </p:timing>
+</p:sld>
+</file>
+
+<file path=ppt/slides/slide12.xml><?xml version="1.0" encoding="utf-8"?>
 <p:sld xmlns:a="http://schemas.openxmlformats.org/drawingml/2006/main" xmlns:r="http://schemas.openxmlformats.org/officeDocument/2006/relationships" xmlns:p="http://schemas.openxmlformats.org/presentationml/2006/main">
   <p:cSld>
     <p:spTree>
@@ -12770,6 +14014,64 @@
           <a:chExt cx="0" cy="0"/>
         </a:xfrm>
       </p:grpSpPr>
+      <p:sp>
+        <p:nvSpPr>
+          <p:cNvPr id="3" name="TextBox 2">
+            <a:extLst>
+              <a:ext uri="{FF2B5EF4-FFF2-40B4-BE49-F238E27FC236}">
+                <a16:creationId xmlns:a16="http://schemas.microsoft.com/office/drawing/2014/main" id="{6E5CDF64-02E3-55CC-5BFD-1223CED49EC9}"/>
+              </a:ext>
+            </a:extLst>
+          </p:cNvPr>
+          <p:cNvSpPr txBox="1"/>
+          <p:nvPr/>
+        </p:nvSpPr>
+        <p:spPr>
+          <a:xfrm>
+            <a:off x="2079722" y="5361522"/>
+            <a:ext cx="5220147" cy="1384995"/>
+          </a:xfrm>
+          <a:prstGeom prst="rect">
+            <a:avLst/>
+          </a:prstGeom>
+          <a:ln/>
+        </p:spPr>
+        <p:style>
+          <a:lnRef idx="1">
+            <a:schemeClr val="accent1"/>
+          </a:lnRef>
+          <a:fillRef idx="2">
+            <a:schemeClr val="accent1"/>
+          </a:fillRef>
+          <a:effectRef idx="1">
+            <a:schemeClr val="accent1"/>
+          </a:effectRef>
+          <a:fontRef idx="minor">
+            <a:schemeClr val="dk1"/>
+          </a:fontRef>
+        </p:style>
+        <p:txBody>
+          <a:bodyPr wrap="none" rtlCol="0">
+            <a:spAutoFit/>
+          </a:bodyPr>
+          <a:lstStyle/>
+          <a:p>
+            <a:r>
+              <a:rPr lang="en-US" sz="2800" dirty="0"/>
+              <a:t>String[] words = new String[4];</a:t>
+            </a:r>
+          </a:p>
+          <a:p>
+            <a:endParaRPr lang="en-US" sz="2800" dirty="0"/>
+          </a:p>
+          <a:p>
+            <a:r>
+              <a:rPr lang="en-US" sz="2800" dirty="0"/>
+              <a:t>Person[] friends = new Person[4];</a:t>
+            </a:r>
+          </a:p>
+        </p:txBody>
+      </p:sp>
       <p:sp>
         <p:nvSpPr>
           <p:cNvPr id="13" name="TextBox 12"/>
@@ -12809,58 +14111,6 @@
             <a:r>
               <a:rPr lang="en-GB" sz="2800" b="1" dirty="0"/>
               <a:t>An array can store any type of data.</a:t>
-            </a:r>
-          </a:p>
-        </p:txBody>
-      </p:sp>
-      <p:sp>
-        <p:nvSpPr>
-          <p:cNvPr id="5" name="TextBox 4"/>
-          <p:cNvSpPr txBox="1"/>
-          <p:nvPr/>
-        </p:nvSpPr>
-        <p:spPr>
-          <a:xfrm>
-            <a:off x="2049534" y="5249288"/>
-            <a:ext cx="5796972" cy="1384995"/>
-          </a:xfrm>
-          <a:prstGeom prst="rect">
-            <a:avLst/>
-          </a:prstGeom>
-          <a:ln/>
-        </p:spPr>
-        <p:style>
-          <a:lnRef idx="1">
-            <a:schemeClr val="accent1"/>
-          </a:lnRef>
-          <a:fillRef idx="2">
-            <a:schemeClr val="accent1"/>
-          </a:fillRef>
-          <a:effectRef idx="1">
-            <a:schemeClr val="accent1"/>
-          </a:effectRef>
-          <a:fontRef idx="minor">
-            <a:schemeClr val="dk1"/>
-          </a:fontRef>
-        </p:style>
-        <p:txBody>
-          <a:bodyPr wrap="none" rtlCol="0">
-            <a:spAutoFit/>
-          </a:bodyPr>
-          <a:lstStyle/>
-          <a:p>
-            <a:r>
-              <a:rPr lang="en-US" sz="2800" dirty="0"/>
-              <a:t>String[] words = new String[4];</a:t>
-            </a:r>
-          </a:p>
-          <a:p>
-            <a:endParaRPr lang="en-US" sz="2800" dirty="0"/>
-          </a:p>
-          <a:p>
-            <a:r>
-              <a:rPr lang="en-US" sz="2800" dirty="0"/>
-              <a:t>Product products[] = new Product[10];</a:t>
             </a:r>
           </a:p>
         </p:txBody>
@@ -13274,33 +14524,6 @@
                                   </p:childTnLst>
                                 </p:cTn>
                               </p:par>
-                              <p:par>
-                                <p:cTn id="13" presetID="1" presetClass="entr" presetSubtype="0" fill="hold" grpId="0" nodeType="withEffect">
-                                  <p:stCondLst>
-                                    <p:cond delay="0"/>
-                                  </p:stCondLst>
-                                  <p:childTnLst>
-                                    <p:set>
-                                      <p:cBhvr>
-                                        <p:cTn id="14" dur="1" fill="hold">
-                                          <p:stCondLst>
-                                            <p:cond delay="0"/>
-                                          </p:stCondLst>
-                                        </p:cTn>
-                                        <p:tgtEl>
-                                          <p:spTgt spid="5"/>
-                                        </p:tgtEl>
-                                        <p:attrNameLst>
-                                          <p:attrName>style.visibility</p:attrName>
-                                        </p:attrNameLst>
-                                      </p:cBhvr>
-                                      <p:to>
-                                        <p:strVal val="visible"/>
-                                      </p:to>
-                                    </p:set>
-                                  </p:childTnLst>
-                                </p:cTn>
-                              </p:par>
                             </p:childTnLst>
                           </p:cTn>
                         </p:par>
@@ -13308,26 +14531,26 @@
                     </p:cTn>
                   </p:par>
                   <p:par>
-                    <p:cTn id="15" fill="hold">
+                    <p:cTn id="13" fill="hold">
                       <p:stCondLst>
                         <p:cond delay="indefinite"/>
                       </p:stCondLst>
                       <p:childTnLst>
                         <p:par>
-                          <p:cTn id="16" fill="hold">
+                          <p:cTn id="14" fill="hold">
                             <p:stCondLst>
                               <p:cond delay="0"/>
                             </p:stCondLst>
                             <p:childTnLst>
                               <p:par>
-                                <p:cTn id="17" presetID="1" presetClass="entr" presetSubtype="0" fill="hold" grpId="0" nodeType="clickEffect">
+                                <p:cTn id="15" presetID="1" presetClass="entr" presetSubtype="0" fill="hold" grpId="0" nodeType="clickEffect">
                                   <p:stCondLst>
                                     <p:cond delay="0"/>
                                   </p:stCondLst>
                                   <p:childTnLst>
                                     <p:set>
                                       <p:cBhvr>
-                                        <p:cTn id="18" dur="1" fill="hold">
+                                        <p:cTn id="16" dur="1" fill="hold">
                                           <p:stCondLst>
                                             <p:cond delay="0"/>
                                           </p:stCondLst>
@@ -13350,20 +14573,20 @@
                           </p:cTn>
                         </p:par>
                         <p:par>
-                          <p:cTn id="19" fill="hold">
+                          <p:cTn id="17" fill="hold">
                             <p:stCondLst>
                               <p:cond delay="0"/>
                             </p:stCondLst>
                             <p:childTnLst>
                               <p:par>
-                                <p:cTn id="20" presetID="21" presetClass="entr" presetSubtype="1" fill="hold" grpId="0" nodeType="afterEffect">
+                                <p:cTn id="18" presetID="21" presetClass="entr" presetSubtype="1" fill="hold" grpId="0" nodeType="afterEffect">
                                   <p:stCondLst>
                                     <p:cond delay="0"/>
                                   </p:stCondLst>
                                   <p:childTnLst>
                                     <p:set>
                                       <p:cBhvr>
-                                        <p:cTn id="21" dur="1" fill="hold">
+                                        <p:cTn id="19" dur="1" fill="hold">
                                           <p:stCondLst>
                                             <p:cond delay="0"/>
                                           </p:stCondLst>
@@ -13381,12 +14604,39 @@
                                     </p:set>
                                     <p:animEffect transition="in" filter="wheel(1)">
                                       <p:cBhvr>
-                                        <p:cTn id="22" dur="2000"/>
+                                        <p:cTn id="20" dur="2000"/>
                                         <p:tgtEl>
                                           <p:spTgt spid="7"/>
                                         </p:tgtEl>
                                       </p:cBhvr>
                                     </p:animEffect>
+                                  </p:childTnLst>
+                                </p:cTn>
+                              </p:par>
+                              <p:par>
+                                <p:cTn id="21" presetID="1" presetClass="entr" presetSubtype="0" fill="hold" grpId="0" nodeType="withEffect">
+                                  <p:stCondLst>
+                                    <p:cond delay="0"/>
+                                  </p:stCondLst>
+                                  <p:childTnLst>
+                                    <p:set>
+                                      <p:cBhvr>
+                                        <p:cTn id="22" dur="1" fill="hold">
+                                          <p:stCondLst>
+                                            <p:cond delay="0"/>
+                                          </p:stCondLst>
+                                        </p:cTn>
+                                        <p:tgtEl>
+                                          <p:spTgt spid="3"/>
+                                        </p:tgtEl>
+                                        <p:attrNameLst>
+                                          <p:attrName>style.visibility</p:attrName>
+                                        </p:attrNameLst>
+                                      </p:cBhvr>
+                                      <p:to>
+                                        <p:strVal val="visible"/>
+                                      </p:to>
+                                    </p:set>
                                   </p:childTnLst>
                                 </p:cTn>
                               </p:par>
@@ -13418,7 +14668,7 @@
       </p:par>
     </p:tnLst>
     <p:bldLst>
-      <p:bldP spid="5" grpId="0" animBg="1"/>
+      <p:bldP spid="3" grpId="0" animBg="1"/>
       <p:bldP spid="12" grpId="0" animBg="1"/>
       <p:bldP spid="14" grpId="0" animBg="1"/>
       <p:bldP spid="15" grpId="0" animBg="1"/>
@@ -13429,7 +14679,7 @@
 </p:sld>
 </file>
 
-<file path=ppt/slides/slide12.xml><?xml version="1.0" encoding="utf-8"?>
+<file path=ppt/slides/slide13.xml><?xml version="1.0" encoding="utf-8"?>
 <p:sld xmlns:a="http://schemas.openxmlformats.org/drawingml/2006/main" xmlns:r="http://schemas.openxmlformats.org/officeDocument/2006/relationships" xmlns:p="http://schemas.openxmlformats.org/presentationml/2006/main">
   <p:cSld>
     <p:spTree>
@@ -13825,7 +15075,7 @@
 </p:sld>
 </file>
 
-<file path=ppt/slides/slide13.xml><?xml version="1.0" encoding="utf-8"?>
+<file path=ppt/slides/slide14.xml><?xml version="1.0" encoding="utf-8"?>
 <p:sld xmlns:a="http://schemas.openxmlformats.org/drawingml/2006/main" xmlns:r="http://schemas.openxmlformats.org/officeDocument/2006/relationships" xmlns:p="http://schemas.openxmlformats.org/presentationml/2006/main">
   <p:cSld>
     <p:spTree>
@@ -14538,7 +15788,7 @@
 </p:sld>
 </file>
 
-<file path=ppt/slides/slide14.xml><?xml version="1.0" encoding="utf-8"?>
+<file path=ppt/slides/slide15.xml><?xml version="1.0" encoding="utf-8"?>
 <p:sld xmlns:a="http://schemas.openxmlformats.org/drawingml/2006/main" xmlns:r="http://schemas.openxmlformats.org/officeDocument/2006/relationships" xmlns:p="http://schemas.openxmlformats.org/presentationml/2006/main">
   <p:cSld>
     <p:spTree>
@@ -15435,7 +16685,7 @@
 </p:sld>
 </file>
 
-<file path=ppt/slides/slide15.xml><?xml version="1.0" encoding="utf-8"?>
+<file path=ppt/slides/slide16.xml><?xml version="1.0" encoding="utf-8"?>
 <p:sld xmlns:a="http://schemas.openxmlformats.org/drawingml/2006/main" xmlns:r="http://schemas.openxmlformats.org/officeDocument/2006/relationships" xmlns:p="http://schemas.openxmlformats.org/presentationml/2006/main">
   <p:cSld>
     <p:spTree>
@@ -16389,7 +17639,7 @@
 </p:sld>
 </file>
 
-<file path=ppt/slides/slide16.xml><?xml version="1.0" encoding="utf-8"?>
+<file path=ppt/slides/slide17.xml><?xml version="1.0" encoding="utf-8"?>
 <p:sld xmlns:a="http://schemas.openxmlformats.org/drawingml/2006/main" xmlns:r="http://schemas.openxmlformats.org/officeDocument/2006/relationships" xmlns:p="http://schemas.openxmlformats.org/presentationml/2006/main">
   <p:cSld>
     <p:spTree>
@@ -17433,7 +18683,7 @@
 </p:sld>
 </file>
 
-<file path=ppt/slides/slide17.xml><?xml version="1.0" encoding="utf-8"?>
+<file path=ppt/slides/slide18.xml><?xml version="1.0" encoding="utf-8"?>
 <p:sld xmlns:a="http://schemas.openxmlformats.org/drawingml/2006/main" xmlns:r="http://schemas.openxmlformats.org/officeDocument/2006/relationships" xmlns:p="http://schemas.openxmlformats.org/presentationml/2006/main">
   <p:cSld>
     <p:spTree>
@@ -18534,7 +19784,7 @@
 </p:sld>
 </file>
 
-<file path=ppt/slides/slide18.xml><?xml version="1.0" encoding="utf-8"?>
+<file path=ppt/slides/slide19.xml><?xml version="1.0" encoding="utf-8"?>
 <p:sld xmlns:a="http://schemas.openxmlformats.org/drawingml/2006/main" xmlns:r="http://schemas.openxmlformats.org/officeDocument/2006/relationships" xmlns:p="http://schemas.openxmlformats.org/presentationml/2006/main">
   <p:cSld>
     <p:spTree>
@@ -18829,101 +20079,6 @@
 </p:sld>
 </file>
 
-<file path=ppt/slides/slide19.xml><?xml version="1.0" encoding="utf-8"?>
-<p:sld xmlns:a="http://schemas.openxmlformats.org/drawingml/2006/main" xmlns:r="http://schemas.openxmlformats.org/officeDocument/2006/relationships" xmlns:p="http://schemas.openxmlformats.org/presentationml/2006/main">
-  <p:cSld>
-    <p:spTree>
-      <p:nvGrpSpPr>
-        <p:cNvPr id="1" name=""/>
-        <p:cNvGrpSpPr/>
-        <p:nvPr/>
-      </p:nvGrpSpPr>
-      <p:grpSpPr>
-        <a:xfrm>
-          <a:off x="0" y="0"/>
-          <a:ext cx="0" cy="0"/>
-          <a:chOff x="0" y="0"/>
-          <a:chExt cx="0" cy="0"/>
-        </a:xfrm>
-      </p:grpSpPr>
-      <p:sp>
-        <p:nvSpPr>
-          <p:cNvPr id="4" name="TextBox 3"/>
-          <p:cNvSpPr txBox="1"/>
-          <p:nvPr/>
-        </p:nvSpPr>
-        <p:spPr>
-          <a:xfrm>
-            <a:off x="3872003" y="2514600"/>
-            <a:ext cx="4981492" cy="1569660"/>
-          </a:xfrm>
-          <a:prstGeom prst="rect">
-            <a:avLst/>
-          </a:prstGeom>
-          <a:noFill/>
-        </p:spPr>
-        <p:txBody>
-          <a:bodyPr wrap="none" rtlCol="0">
-            <a:spAutoFit/>
-          </a:bodyPr>
-          <a:lstStyle/>
-          <a:p>
-            <a:pPr algn="ctr"/>
-            <a:r>
-              <a:rPr lang="en-GB" sz="4800" dirty="0">
-                <a:solidFill>
-                  <a:srgbClr val="FF0000"/>
-                </a:solidFill>
-              </a:rPr>
-              <a:t>3) Array of </a:t>
-            </a:r>
-            <a:r>
-              <a:rPr lang="en-GB" sz="4800" b="1" dirty="0">
-                <a:solidFill>
-                  <a:srgbClr val="FF0000"/>
-                </a:solidFill>
-              </a:rPr>
-              <a:t>Objects</a:t>
-            </a:r>
-            <a:r>
-              <a:rPr lang="en-GB" sz="4800" dirty="0">
-                <a:solidFill>
-                  <a:srgbClr val="FF0000"/>
-                </a:solidFill>
-              </a:rPr>
-              <a:t> </a:t>
-            </a:r>
-            <a:br>
-              <a:rPr lang="en-GB" sz="4800" dirty="0">
-                <a:solidFill>
-                  <a:srgbClr val="FF0000"/>
-                </a:solidFill>
-              </a:rPr>
-            </a:br>
-            <a:r>
-              <a:rPr lang="en-GB" sz="4800" dirty="0">
-                <a:solidFill>
-                  <a:srgbClr val="FF0000"/>
-                </a:solidFill>
-              </a:rPr>
-              <a:t>e.g. Product</a:t>
-            </a:r>
-          </a:p>
-        </p:txBody>
-      </p:sp>
-    </p:spTree>
-    <p:extLst>
-      <p:ext uri="{BB962C8B-B14F-4D97-AF65-F5344CB8AC3E}">
-        <p14:creationId xmlns:p14="http://schemas.microsoft.com/office/powerpoint/2010/main" val="1109309233"/>
-      </p:ext>
-    </p:extLst>
-  </p:cSld>
-  <p:clrMapOvr>
-    <a:masterClrMapping/>
-  </p:clrMapOvr>
-</p:sld>
-</file>
-
 <file path=ppt/slides/slide2.xml><?xml version="1.0" encoding="utf-8"?>
 <p:sld xmlns:a="http://schemas.openxmlformats.org/drawingml/2006/main" xmlns:r="http://schemas.openxmlformats.org/officeDocument/2006/relationships" xmlns:p="http://schemas.openxmlformats.org/presentationml/2006/main">
   <p:cSld>
@@ -18953,21 +20108,20 @@
         </p:nvSpPr>
         <p:spPr/>
         <p:txBody>
-          <a:bodyPr>
-            <a:normAutofit/>
-          </a:bodyPr>
+          <a:bodyPr/>
           <a:lstStyle/>
           <a:p>
             <a:r>
-              <a:rPr lang="en-GB" dirty="0"/>
-              <a:t>Let’s Look at arrays of different types</a:t>
-            </a:r>
+              <a:rPr lang="en-IE"/>
+              <a:t>Topics list</a:t>
+            </a:r>
+            <a:endParaRPr lang="en-IE" dirty="0"/>
           </a:p>
         </p:txBody>
       </p:sp>
       <p:sp>
         <p:nvSpPr>
-          <p:cNvPr id="3" name="Content Placeholder 2"/>
+          <p:cNvPr id="5" name="Content Placeholder 4"/>
           <p:cNvSpPr>
             <a:spLocks noGrp="1"/>
           </p:cNvSpPr>
@@ -18977,105 +20131,583 @@
         </p:nvSpPr>
         <p:spPr/>
         <p:txBody>
-          <a:bodyPr/>
+          <a:bodyPr>
+            <a:normAutofit/>
+          </a:bodyPr>
           <a:lstStyle/>
           <a:p>
             <a:pPr marL="0" indent="0">
               <a:buNone/>
             </a:pPr>
             <a:r>
-              <a:rPr lang="en-GB" b="1" dirty="0"/>
-              <a:t>Arrays can store any type of data</a:t>
+              <a:rPr lang="en-IE" dirty="0"/>
+              <a:t>1.  </a:t>
+            </a:r>
+            <a:r>
+              <a:rPr lang="en-IE" sz="4000" dirty="0"/>
+              <a:t>Arrays of different types</a:t>
+            </a:r>
+          </a:p>
+          <a:p>
+            <a:pPr marL="514350" indent="-514350">
+              <a:buFont typeface="+mj-lt"/>
+              <a:buAutoNum type="arabicPeriod" startAt="2"/>
+            </a:pPr>
+            <a:r>
+              <a:rPr lang="en-IE" sz="4000" dirty="0"/>
+              <a:t>Arrays of primitive types</a:t>
+            </a:r>
+          </a:p>
+          <a:p>
+            <a:pPr marL="514350" indent="-514350">
+              <a:buFont typeface="+mj-lt"/>
+              <a:buAutoNum type="arabicPeriod" startAt="2"/>
+            </a:pPr>
+            <a:r>
+              <a:rPr lang="en-IE" sz="4000" dirty="0"/>
+              <a:t>Arrays of objects</a:t>
+            </a:r>
+          </a:p>
+          <a:p>
+            <a:pPr marL="914400" lvl="1" indent="-514350"/>
+            <a:r>
+              <a:rPr lang="en-IE" sz="4000" dirty="0"/>
+              <a:t>String</a:t>
+            </a:r>
+          </a:p>
+          <a:p>
+            <a:pPr marL="914400" lvl="1" indent="-514350"/>
+            <a:r>
+              <a:rPr lang="en-IE" sz="4000" dirty="0"/>
+              <a:t>Person</a:t>
             </a:r>
           </a:p>
           <a:p>
             <a:pPr marL="0" indent="0">
               <a:buNone/>
             </a:pPr>
-            <a:endParaRPr lang="en-GB" dirty="0"/>
-          </a:p>
-          <a:p>
-            <a:pPr marL="0" indent="0">
-              <a:buNone/>
-            </a:pPr>
-            <a:r>
-              <a:rPr lang="en-GB" dirty="0"/>
-              <a:t>Let’s look at some examples:</a:t>
-            </a:r>
-          </a:p>
-          <a:p>
-            <a:pPr marL="0" indent="0">
-              <a:buNone/>
-            </a:pPr>
-            <a:endParaRPr lang="en-GB" dirty="0"/>
-          </a:p>
-          <a:p>
-            <a:pPr marL="514350" indent="-514350">
-              <a:buFont typeface="+mj-lt"/>
-              <a:buAutoNum type="arabicPeriod"/>
-            </a:pPr>
-            <a:r>
-              <a:rPr lang="en-GB" dirty="0"/>
-              <a:t>Array of primitives - </a:t>
-            </a:r>
-            <a:r>
-              <a:rPr lang="en-GB" b="1" dirty="0" err="1"/>
-              <a:t>int</a:t>
-            </a:r>
-            <a:endParaRPr lang="en-GB" b="1" dirty="0"/>
-          </a:p>
-          <a:p>
-            <a:pPr marL="514350" indent="-514350">
-              <a:buFont typeface="+mj-lt"/>
-              <a:buAutoNum type="arabicPeriod"/>
-            </a:pPr>
-            <a:r>
-              <a:rPr lang="en-GB" dirty="0"/>
-              <a:t>Array of objects </a:t>
-            </a:r>
-            <a:r>
-              <a:rPr lang="mr-IN" dirty="0"/>
-              <a:t>–</a:t>
-            </a:r>
-            <a:r>
-              <a:rPr lang="en-GB" dirty="0"/>
-              <a:t> </a:t>
-            </a:r>
-            <a:r>
-              <a:rPr lang="en-GB" b="1" dirty="0"/>
-              <a:t>String</a:t>
-            </a:r>
-          </a:p>
-          <a:p>
-            <a:pPr marL="514350" indent="-514350">
-              <a:buFont typeface="+mj-lt"/>
-              <a:buAutoNum type="arabicPeriod"/>
-            </a:pPr>
-            <a:r>
-              <a:rPr lang="en-GB" dirty="0"/>
-              <a:t>Array of objects - </a:t>
-            </a:r>
-            <a:r>
-              <a:rPr lang="en-GB" b="1" dirty="0"/>
-              <a:t>Product</a:t>
-            </a:r>
+            <a:endParaRPr lang="en-IE" dirty="0"/>
+          </a:p>
+        </p:txBody>
+      </p:sp>
+      <p:sp>
+        <p:nvSpPr>
+          <p:cNvPr id="6" name="Rectangle 5"/>
+          <p:cNvSpPr/>
+          <p:nvPr/>
+        </p:nvSpPr>
+        <p:spPr>
+          <a:xfrm>
+            <a:off x="609600" y="1752600"/>
+            <a:ext cx="6172200" cy="533400"/>
+          </a:xfrm>
+          <a:prstGeom prst="rect">
+            <a:avLst/>
+          </a:prstGeom>
+          <a:noFill/>
+          <a:ln w="44450">
+            <a:solidFill>
+              <a:srgbClr val="FF0000"/>
+            </a:solidFill>
+          </a:ln>
+        </p:spPr>
+        <p:style>
+          <a:lnRef idx="2">
+            <a:schemeClr val="accent1">
+              <a:shade val="50000"/>
+            </a:schemeClr>
+          </a:lnRef>
+          <a:fillRef idx="1">
+            <a:schemeClr val="accent1"/>
+          </a:fillRef>
+          <a:effectRef idx="0">
+            <a:schemeClr val="accent1"/>
+          </a:effectRef>
+          <a:fontRef idx="minor">
+            <a:schemeClr val="lt1"/>
+          </a:fontRef>
+        </p:style>
+        <p:txBody>
+          <a:bodyPr rtlCol="0" anchor="ctr"/>
+          <a:lstStyle/>
+          <a:p>
+            <a:pPr algn="ctr"/>
+            <a:endParaRPr lang="en-IE"/>
           </a:p>
         </p:txBody>
       </p:sp>
     </p:spTree>
     <p:extLst>
       <p:ext uri="{BB962C8B-B14F-4D97-AF65-F5344CB8AC3E}">
-        <p14:creationId xmlns:p14="http://schemas.microsoft.com/office/powerpoint/2010/main" val="1139030198"/>
+        <p14:creationId xmlns:p14="http://schemas.microsoft.com/office/powerpoint/2010/main" val="2635913481"/>
       </p:ext>
     </p:extLst>
   </p:cSld>
   <p:clrMapOvr>
     <a:masterClrMapping/>
   </p:clrMapOvr>
+  <p:timing>
+    <p:tnLst>
+      <p:par>
+        <p:cTn id="1" dur="indefinite" restart="never" nodeType="tmRoot">
+          <p:childTnLst>
+            <p:seq concurrent="1" nextAc="seek">
+              <p:cTn id="2" dur="indefinite" nodeType="mainSeq">
+                <p:childTnLst>
+                  <p:par>
+                    <p:cTn id="3" fill="hold">
+                      <p:stCondLst>
+                        <p:cond delay="indefinite"/>
+                      </p:stCondLst>
+                      <p:childTnLst>
+                        <p:par>
+                          <p:cTn id="4" fill="hold">
+                            <p:stCondLst>
+                              <p:cond delay="0"/>
+                            </p:stCondLst>
+                            <p:childTnLst>
+                              <p:par>
+                                <p:cTn id="5" presetID="21" presetClass="entr" presetSubtype="1" fill="hold" grpId="0" nodeType="clickEffect">
+                                  <p:stCondLst>
+                                    <p:cond delay="0"/>
+                                  </p:stCondLst>
+                                  <p:childTnLst>
+                                    <p:set>
+                                      <p:cBhvr>
+                                        <p:cTn id="6" dur="1" fill="hold">
+                                          <p:stCondLst>
+                                            <p:cond delay="0"/>
+                                          </p:stCondLst>
+                                        </p:cTn>
+                                        <p:tgtEl>
+                                          <p:spTgt spid="6"/>
+                                        </p:tgtEl>
+                                        <p:attrNameLst>
+                                          <p:attrName>style.visibility</p:attrName>
+                                        </p:attrNameLst>
+                                      </p:cBhvr>
+                                      <p:to>
+                                        <p:strVal val="visible"/>
+                                      </p:to>
+                                    </p:set>
+                                    <p:animEffect transition="in" filter="wheel(1)">
+                                      <p:cBhvr>
+                                        <p:cTn id="7" dur="2000"/>
+                                        <p:tgtEl>
+                                          <p:spTgt spid="6"/>
+                                        </p:tgtEl>
+                                      </p:cBhvr>
+                                    </p:animEffect>
+                                  </p:childTnLst>
+                                </p:cTn>
+                              </p:par>
+                            </p:childTnLst>
+                          </p:cTn>
+                        </p:par>
+                      </p:childTnLst>
+                    </p:cTn>
+                  </p:par>
+                </p:childTnLst>
+              </p:cTn>
+              <p:prevCondLst>
+                <p:cond evt="onPrev" delay="0">
+                  <p:tgtEl>
+                    <p:sldTgt/>
+                  </p:tgtEl>
+                </p:cond>
+              </p:prevCondLst>
+              <p:nextCondLst>
+                <p:cond evt="onNext" delay="0">
+                  <p:tgtEl>
+                    <p:sldTgt/>
+                  </p:tgtEl>
+                </p:cond>
+              </p:nextCondLst>
+            </p:seq>
+          </p:childTnLst>
+        </p:cTn>
+      </p:par>
+    </p:tnLst>
+    <p:bldLst>
+      <p:bldP spid="6" grpId="0" animBg="1"/>
+    </p:bldLst>
+  </p:timing>
 </p:sld>
 </file>
 
 <file path=ppt/slides/slide20.xml><?xml version="1.0" encoding="utf-8"?>
+<p:sld xmlns:a="http://schemas.openxmlformats.org/drawingml/2006/main" xmlns:r="http://schemas.openxmlformats.org/officeDocument/2006/relationships" xmlns:p="http://schemas.openxmlformats.org/presentationml/2006/main">
+  <p:cSld>
+    <p:spTree>
+      <p:nvGrpSpPr>
+        <p:cNvPr id="1" name="">
+          <a:extLst>
+            <a:ext uri="{FF2B5EF4-FFF2-40B4-BE49-F238E27FC236}">
+              <a16:creationId xmlns:a16="http://schemas.microsoft.com/office/drawing/2014/main" id="{B158D121-02B7-10E5-CBFB-465B44BF47EE}"/>
+            </a:ext>
+          </a:extLst>
+        </p:cNvPr>
+        <p:cNvGrpSpPr/>
+        <p:nvPr/>
+      </p:nvGrpSpPr>
+      <p:grpSpPr>
+        <a:xfrm>
+          <a:off x="0" y="0"/>
+          <a:ext cx="0" cy="0"/>
+          <a:chOff x="0" y="0"/>
+          <a:chExt cx="0" cy="0"/>
+        </a:xfrm>
+      </p:grpSpPr>
+      <p:sp>
+        <p:nvSpPr>
+          <p:cNvPr id="2" name="Title 1">
+            <a:extLst>
+              <a:ext uri="{FF2B5EF4-FFF2-40B4-BE49-F238E27FC236}">
+                <a16:creationId xmlns:a16="http://schemas.microsoft.com/office/drawing/2014/main" id="{2CDE9E5F-C1C3-C1BC-5F2B-787BC9F3FFA5}"/>
+              </a:ext>
+            </a:extLst>
+          </p:cNvPr>
+          <p:cNvSpPr>
+            <a:spLocks noGrp="1"/>
+          </p:cNvSpPr>
+          <p:nvPr>
+            <p:ph type="title"/>
+          </p:nvPr>
+        </p:nvSpPr>
+        <p:spPr/>
+        <p:txBody>
+          <a:bodyPr/>
+          <a:lstStyle/>
+          <a:p>
+            <a:r>
+              <a:rPr lang="en-IE"/>
+              <a:t>Topics list</a:t>
+            </a:r>
+            <a:endParaRPr lang="en-IE" dirty="0"/>
+          </a:p>
+        </p:txBody>
+      </p:sp>
+      <p:sp>
+        <p:nvSpPr>
+          <p:cNvPr id="5" name="Content Placeholder 4">
+            <a:extLst>
+              <a:ext uri="{FF2B5EF4-FFF2-40B4-BE49-F238E27FC236}">
+                <a16:creationId xmlns:a16="http://schemas.microsoft.com/office/drawing/2014/main" id="{8B9A9016-6981-8879-A958-E9CCE1880458}"/>
+              </a:ext>
+            </a:extLst>
+          </p:cNvPr>
+          <p:cNvSpPr>
+            <a:spLocks noGrp="1"/>
+          </p:cNvSpPr>
+          <p:nvPr>
+            <p:ph idx="1"/>
+          </p:nvPr>
+        </p:nvSpPr>
+        <p:spPr/>
+        <p:txBody>
+          <a:bodyPr>
+            <a:normAutofit/>
+          </a:bodyPr>
+          <a:lstStyle/>
+          <a:p>
+            <a:pPr marL="0" indent="0">
+              <a:buNone/>
+            </a:pPr>
+            <a:r>
+              <a:rPr lang="en-IE" dirty="0"/>
+              <a:t>1.  </a:t>
+            </a:r>
+            <a:r>
+              <a:rPr lang="en-IE" sz="4000" dirty="0"/>
+              <a:t>Arrays of different types</a:t>
+            </a:r>
+          </a:p>
+          <a:p>
+            <a:pPr marL="514350" indent="-514350">
+              <a:buFont typeface="+mj-lt"/>
+              <a:buAutoNum type="arabicPeriod" startAt="2"/>
+            </a:pPr>
+            <a:r>
+              <a:rPr lang="en-IE" sz="4000" dirty="0"/>
+              <a:t>Arrays of primitive types</a:t>
+            </a:r>
+          </a:p>
+          <a:p>
+            <a:pPr marL="514350" indent="-514350">
+              <a:buFont typeface="+mj-lt"/>
+              <a:buAutoNum type="arabicPeriod" startAt="2"/>
+            </a:pPr>
+            <a:r>
+              <a:rPr lang="en-IE" sz="4000" dirty="0"/>
+              <a:t>Arrays of objects</a:t>
+            </a:r>
+          </a:p>
+          <a:p>
+            <a:pPr marL="914400" lvl="1" indent="-514350"/>
+            <a:r>
+              <a:rPr lang="en-IE" sz="4000" dirty="0"/>
+              <a:t>String</a:t>
+            </a:r>
+          </a:p>
+          <a:p>
+            <a:pPr marL="914400" lvl="1" indent="-514350"/>
+            <a:r>
+              <a:rPr lang="en-IE" sz="4000" dirty="0"/>
+              <a:t>Person</a:t>
+            </a:r>
+          </a:p>
+          <a:p>
+            <a:pPr marL="0" indent="0">
+              <a:buNone/>
+            </a:pPr>
+            <a:endParaRPr lang="en-IE" dirty="0"/>
+          </a:p>
+        </p:txBody>
+      </p:sp>
+      <p:sp>
+        <p:nvSpPr>
+          <p:cNvPr id="6" name="Rectangle 5">
+            <a:extLst>
+              <a:ext uri="{FF2B5EF4-FFF2-40B4-BE49-F238E27FC236}">
+                <a16:creationId xmlns:a16="http://schemas.microsoft.com/office/drawing/2014/main" id="{FF5FC9B4-14B7-B074-BF31-B6C6F26B45EA}"/>
+              </a:ext>
+            </a:extLst>
+          </p:cNvPr>
+          <p:cNvSpPr/>
+          <p:nvPr/>
+        </p:nvSpPr>
+        <p:spPr>
+          <a:xfrm>
+            <a:off x="599661" y="3162300"/>
+            <a:ext cx="6172200" cy="533400"/>
+          </a:xfrm>
+          <a:prstGeom prst="rect">
+            <a:avLst/>
+          </a:prstGeom>
+          <a:noFill/>
+          <a:ln w="44450">
+            <a:solidFill>
+              <a:srgbClr val="FF0000"/>
+            </a:solidFill>
+          </a:ln>
+        </p:spPr>
+        <p:style>
+          <a:lnRef idx="2">
+            <a:schemeClr val="accent1">
+              <a:shade val="50000"/>
+            </a:schemeClr>
+          </a:lnRef>
+          <a:fillRef idx="1">
+            <a:schemeClr val="accent1"/>
+          </a:fillRef>
+          <a:effectRef idx="0">
+            <a:schemeClr val="accent1"/>
+          </a:effectRef>
+          <a:fontRef idx="minor">
+            <a:schemeClr val="lt1"/>
+          </a:fontRef>
+        </p:style>
+        <p:txBody>
+          <a:bodyPr rtlCol="0" anchor="ctr"/>
+          <a:lstStyle/>
+          <a:p>
+            <a:pPr algn="ctr"/>
+            <a:endParaRPr lang="en-IE"/>
+          </a:p>
+        </p:txBody>
+      </p:sp>
+      <p:sp>
+        <p:nvSpPr>
+          <p:cNvPr id="3" name="Arrow: Right 1">
+            <a:extLst>
+              <a:ext uri="{FF2B5EF4-FFF2-40B4-BE49-F238E27FC236}">
+                <a16:creationId xmlns:a16="http://schemas.microsoft.com/office/drawing/2014/main" id="{5CEE071B-133E-B104-99E0-0E8578E754EC}"/>
+              </a:ext>
+            </a:extLst>
+          </p:cNvPr>
+          <p:cNvSpPr/>
+          <p:nvPr/>
+        </p:nvSpPr>
+        <p:spPr>
+          <a:xfrm flipH="1">
+            <a:off x="3124200" y="4697240"/>
+            <a:ext cx="3984878" cy="381001"/>
+          </a:xfrm>
+          <a:prstGeom prst="rightArrow">
+            <a:avLst/>
+          </a:prstGeom>
+        </p:spPr>
+        <p:style>
+          <a:lnRef idx="2">
+            <a:schemeClr val="accent2">
+              <a:shade val="50000"/>
+            </a:schemeClr>
+          </a:lnRef>
+          <a:fillRef idx="1">
+            <a:schemeClr val="accent2"/>
+          </a:fillRef>
+          <a:effectRef idx="0">
+            <a:schemeClr val="accent2"/>
+          </a:effectRef>
+          <a:fontRef idx="minor">
+            <a:schemeClr val="lt1"/>
+          </a:fontRef>
+        </p:style>
+        <p:txBody>
+          <a:bodyPr rtlCol="0" anchor="ctr"/>
+          <a:lstStyle/>
+          <a:p>
+            <a:pPr algn="ctr"/>
+            <a:endParaRPr lang="en-IE"/>
+          </a:p>
+        </p:txBody>
+      </p:sp>
+    </p:spTree>
+    <p:extLst>
+      <p:ext uri="{BB962C8B-B14F-4D97-AF65-F5344CB8AC3E}">
+        <p14:creationId xmlns:p14="http://schemas.microsoft.com/office/powerpoint/2010/main" val="1512825232"/>
+      </p:ext>
+    </p:extLst>
+  </p:cSld>
+  <p:clrMapOvr>
+    <a:masterClrMapping/>
+  </p:clrMapOvr>
+  <p:timing>
+    <p:tnLst>
+      <p:par>
+        <p:cTn id="1" dur="indefinite" restart="never" nodeType="tmRoot">
+          <p:childTnLst>
+            <p:seq concurrent="1" nextAc="seek">
+              <p:cTn id="2" dur="indefinite" nodeType="mainSeq">
+                <p:childTnLst>
+                  <p:par>
+                    <p:cTn id="3" fill="hold">
+                      <p:stCondLst>
+                        <p:cond delay="indefinite"/>
+                      </p:stCondLst>
+                      <p:childTnLst>
+                        <p:par>
+                          <p:cTn id="4" fill="hold">
+                            <p:stCondLst>
+                              <p:cond delay="0"/>
+                            </p:stCondLst>
+                            <p:childTnLst>
+                              <p:par>
+                                <p:cTn id="5" presetID="21" presetClass="entr" presetSubtype="1" fill="hold" grpId="0" nodeType="clickEffect">
+                                  <p:stCondLst>
+                                    <p:cond delay="0"/>
+                                  </p:stCondLst>
+                                  <p:childTnLst>
+                                    <p:set>
+                                      <p:cBhvr>
+                                        <p:cTn id="6" dur="1" fill="hold">
+                                          <p:stCondLst>
+                                            <p:cond delay="0"/>
+                                          </p:stCondLst>
+                                        </p:cTn>
+                                        <p:tgtEl>
+                                          <p:spTgt spid="6"/>
+                                        </p:tgtEl>
+                                        <p:attrNameLst>
+                                          <p:attrName>style.visibility</p:attrName>
+                                        </p:attrNameLst>
+                                      </p:cBhvr>
+                                      <p:to>
+                                        <p:strVal val="visible"/>
+                                      </p:to>
+                                    </p:set>
+                                    <p:animEffect transition="in" filter="wheel(1)">
+                                      <p:cBhvr>
+                                        <p:cTn id="7" dur="2000"/>
+                                        <p:tgtEl>
+                                          <p:spTgt spid="6"/>
+                                        </p:tgtEl>
+                                      </p:cBhvr>
+                                    </p:animEffect>
+                                  </p:childTnLst>
+                                </p:cTn>
+                              </p:par>
+                            </p:childTnLst>
+                          </p:cTn>
+                        </p:par>
+                      </p:childTnLst>
+                    </p:cTn>
+                  </p:par>
+                  <p:par>
+                    <p:cTn id="8" fill="hold">
+                      <p:stCondLst>
+                        <p:cond delay="indefinite"/>
+                      </p:stCondLst>
+                      <p:childTnLst>
+                        <p:par>
+                          <p:cTn id="9" fill="hold">
+                            <p:stCondLst>
+                              <p:cond delay="0"/>
+                            </p:stCondLst>
+                            <p:childTnLst>
+                              <p:par>
+                                <p:cTn id="10" presetID="1" presetClass="entr" presetSubtype="0" fill="hold" grpId="0" nodeType="clickEffect">
+                                  <p:stCondLst>
+                                    <p:cond delay="0"/>
+                                  </p:stCondLst>
+                                  <p:childTnLst>
+                                    <p:set>
+                                      <p:cBhvr>
+                                        <p:cTn id="11" dur="1" fill="hold">
+                                          <p:stCondLst>
+                                            <p:cond delay="0"/>
+                                          </p:stCondLst>
+                                        </p:cTn>
+                                        <p:tgtEl>
+                                          <p:spTgt spid="3"/>
+                                        </p:tgtEl>
+                                        <p:attrNameLst>
+                                          <p:attrName>style.visibility</p:attrName>
+                                        </p:attrNameLst>
+                                      </p:cBhvr>
+                                      <p:to>
+                                        <p:strVal val="visible"/>
+                                      </p:to>
+                                    </p:set>
+                                  </p:childTnLst>
+                                </p:cTn>
+                              </p:par>
+                            </p:childTnLst>
+                          </p:cTn>
+                        </p:par>
+                      </p:childTnLst>
+                    </p:cTn>
+                  </p:par>
+                </p:childTnLst>
+              </p:cTn>
+              <p:prevCondLst>
+                <p:cond evt="onPrev" delay="0">
+                  <p:tgtEl>
+                    <p:sldTgt/>
+                  </p:tgtEl>
+                </p:cond>
+              </p:prevCondLst>
+              <p:nextCondLst>
+                <p:cond evt="onNext" delay="0">
+                  <p:tgtEl>
+                    <p:sldTgt/>
+                  </p:tgtEl>
+                </p:cond>
+              </p:nextCondLst>
+            </p:seq>
+          </p:childTnLst>
+        </p:cTn>
+      </p:par>
+    </p:tnLst>
+    <p:bldLst>
+      <p:bldP spid="6" grpId="0" animBg="1"/>
+      <p:bldP spid="3" grpId="0" animBg="1"/>
+    </p:bldLst>
+  </p:timing>
+</p:sld>
+</file>
+
+<file path=ppt/slides/slide21.xml><?xml version="1.0" encoding="utf-8"?>
 <p:sld xmlns:a="http://schemas.openxmlformats.org/drawingml/2006/main" xmlns:r="http://schemas.openxmlformats.org/officeDocument/2006/relationships" xmlns:p="http://schemas.openxmlformats.org/presentationml/2006/main">
   <p:cSld>
     <p:spTree>
@@ -19092,6 +20724,65 @@
           <a:chExt cx="0" cy="0"/>
         </a:xfrm>
       </p:grpSpPr>
+      <p:sp>
+        <p:nvSpPr>
+          <p:cNvPr id="2" name="TextBox 1">
+            <a:extLst>
+              <a:ext uri="{FF2B5EF4-FFF2-40B4-BE49-F238E27FC236}">
+                <a16:creationId xmlns:a16="http://schemas.microsoft.com/office/drawing/2014/main" id="{38846073-99CF-890A-3447-4B451D0EFD04}"/>
+              </a:ext>
+            </a:extLst>
+          </p:cNvPr>
+          <p:cNvSpPr txBox="1"/>
+          <p:nvPr/>
+        </p:nvSpPr>
+        <p:spPr>
+          <a:xfrm>
+            <a:off x="2079722" y="5361522"/>
+            <a:ext cx="5220147" cy="1384995"/>
+          </a:xfrm>
+          <a:prstGeom prst="rect">
+            <a:avLst/>
+          </a:prstGeom>
+          <a:ln/>
+        </p:spPr>
+        <p:style>
+          <a:lnRef idx="1">
+            <a:schemeClr val="accent1"/>
+          </a:lnRef>
+          <a:fillRef idx="2">
+            <a:schemeClr val="accent1"/>
+          </a:fillRef>
+          <a:effectRef idx="1">
+            <a:schemeClr val="accent1"/>
+          </a:effectRef>
+          <a:fontRef idx="minor">
+            <a:schemeClr val="dk1"/>
+          </a:fontRef>
+        </p:style>
+        <p:txBody>
+          <a:bodyPr wrap="none" rtlCol="0">
+            <a:spAutoFit/>
+          </a:bodyPr>
+          <a:lstStyle/>
+          <a:p>
+            <a:r>
+              <a:rPr lang="en-US" sz="2800" dirty="0"/>
+              <a:t>String[] words = new String[4];</a:t>
+            </a:r>
+          </a:p>
+          <a:p>
+            <a:endParaRPr lang="en-US" sz="2800" dirty="0"/>
+          </a:p>
+          <a:p>
+            <a:pPr algn="r"/>
+            <a:r>
+              <a:rPr lang="en-US" sz="2800" dirty="0"/>
+              <a:t>Person[] friends = new Person[4];</a:t>
+            </a:r>
+          </a:p>
+        </p:txBody>
+      </p:sp>
       <p:sp>
         <p:nvSpPr>
           <p:cNvPr id="13" name="TextBox 12"/>
@@ -19137,58 +20828,6 @@
       </p:sp>
       <p:sp>
         <p:nvSpPr>
-          <p:cNvPr id="5" name="TextBox 4"/>
-          <p:cNvSpPr txBox="1"/>
-          <p:nvPr/>
-        </p:nvSpPr>
-        <p:spPr>
-          <a:xfrm>
-            <a:off x="2049534" y="5249288"/>
-            <a:ext cx="5796972" cy="1384995"/>
-          </a:xfrm>
-          <a:prstGeom prst="rect">
-            <a:avLst/>
-          </a:prstGeom>
-          <a:ln/>
-        </p:spPr>
-        <p:style>
-          <a:lnRef idx="1">
-            <a:schemeClr val="accent1"/>
-          </a:lnRef>
-          <a:fillRef idx="2">
-            <a:schemeClr val="accent1"/>
-          </a:fillRef>
-          <a:effectRef idx="1">
-            <a:schemeClr val="accent1"/>
-          </a:effectRef>
-          <a:fontRef idx="minor">
-            <a:schemeClr val="dk1"/>
-          </a:fontRef>
-        </p:style>
-        <p:txBody>
-          <a:bodyPr wrap="none" rtlCol="0">
-            <a:spAutoFit/>
-          </a:bodyPr>
-          <a:lstStyle/>
-          <a:p>
-            <a:r>
-              <a:rPr lang="en-US" sz="2800" dirty="0"/>
-              <a:t>String[] words = new String[4];</a:t>
-            </a:r>
-          </a:p>
-          <a:p>
-            <a:endParaRPr lang="en-US" sz="2800" dirty="0"/>
-          </a:p>
-          <a:p>
-            <a:r>
-              <a:rPr lang="en-US" sz="2800" dirty="0"/>
-              <a:t>Product products[] = new Product[10];</a:t>
-            </a:r>
-          </a:p>
-        </p:txBody>
-      </p:sp>
-      <p:sp>
-        <p:nvSpPr>
           <p:cNvPr id="12" name="Rectangle 11">
             <a:extLst>
               <a:ext uri="{FF2B5EF4-FFF2-40B4-BE49-F238E27FC236}">
@@ -19435,7 +21074,7 @@
         </p:nvSpPr>
         <p:spPr>
           <a:xfrm flipH="1">
-            <a:off x="7842496" y="6184233"/>
+            <a:off x="7293243" y="6329073"/>
             <a:ext cx="1849671" cy="381001"/>
           </a:xfrm>
           <a:prstGeom prst="rightArrow">
@@ -19596,33 +21235,6 @@
                                   </p:childTnLst>
                                 </p:cTn>
                               </p:par>
-                              <p:par>
-                                <p:cTn id="13" presetID="1" presetClass="entr" presetSubtype="0" fill="hold" grpId="0" nodeType="withEffect">
-                                  <p:stCondLst>
-                                    <p:cond delay="0"/>
-                                  </p:stCondLst>
-                                  <p:childTnLst>
-                                    <p:set>
-                                      <p:cBhvr>
-                                        <p:cTn id="14" dur="1" fill="hold">
-                                          <p:stCondLst>
-                                            <p:cond delay="0"/>
-                                          </p:stCondLst>
-                                        </p:cTn>
-                                        <p:tgtEl>
-                                          <p:spTgt spid="5"/>
-                                        </p:tgtEl>
-                                        <p:attrNameLst>
-                                          <p:attrName>style.visibility</p:attrName>
-                                        </p:attrNameLst>
-                                      </p:cBhvr>
-                                      <p:to>
-                                        <p:strVal val="visible"/>
-                                      </p:to>
-                                    </p:set>
-                                  </p:childTnLst>
-                                </p:cTn>
-                              </p:par>
                             </p:childTnLst>
                           </p:cTn>
                         </p:par>
@@ -19630,26 +21242,26 @@
                     </p:cTn>
                   </p:par>
                   <p:par>
-                    <p:cTn id="15" fill="hold">
+                    <p:cTn id="13" fill="hold">
                       <p:stCondLst>
                         <p:cond delay="indefinite"/>
                       </p:stCondLst>
                       <p:childTnLst>
                         <p:par>
-                          <p:cTn id="16" fill="hold">
+                          <p:cTn id="14" fill="hold">
                             <p:stCondLst>
                               <p:cond delay="0"/>
                             </p:stCondLst>
                             <p:childTnLst>
                               <p:par>
-                                <p:cTn id="17" presetID="1" presetClass="entr" presetSubtype="0" fill="hold" grpId="0" nodeType="clickEffect">
+                                <p:cTn id="15" presetID="1" presetClass="entr" presetSubtype="0" fill="hold" grpId="0" nodeType="clickEffect">
                                   <p:stCondLst>
                                     <p:cond delay="0"/>
                                   </p:stCondLst>
                                   <p:childTnLst>
                                     <p:set>
                                       <p:cBhvr>
-                                        <p:cTn id="18" dur="1" fill="hold">
+                                        <p:cTn id="16" dur="1" fill="hold">
                                           <p:stCondLst>
                                             <p:cond delay="0"/>
                                           </p:stCondLst>
@@ -19672,20 +21284,20 @@
                           </p:cTn>
                         </p:par>
                         <p:par>
-                          <p:cTn id="19" fill="hold">
+                          <p:cTn id="17" fill="hold">
                             <p:stCondLst>
                               <p:cond delay="0"/>
                             </p:stCondLst>
                             <p:childTnLst>
                               <p:par>
-                                <p:cTn id="20" presetID="21" presetClass="entr" presetSubtype="1" fill="hold" grpId="0" nodeType="afterEffect">
+                                <p:cTn id="18" presetID="21" presetClass="entr" presetSubtype="1" fill="hold" grpId="0" nodeType="afterEffect">
                                   <p:stCondLst>
                                     <p:cond delay="0"/>
                                   </p:stCondLst>
                                   <p:childTnLst>
                                     <p:set>
                                       <p:cBhvr>
-                                        <p:cTn id="21" dur="1" fill="hold">
+                                        <p:cTn id="19" dur="1" fill="hold">
                                           <p:stCondLst>
                                             <p:cond delay="0"/>
                                           </p:stCondLst>
@@ -19703,12 +21315,39 @@
                                     </p:set>
                                     <p:animEffect transition="in" filter="wheel(1)">
                                       <p:cBhvr>
-                                        <p:cTn id="22" dur="2000"/>
+                                        <p:cTn id="20" dur="2000"/>
                                         <p:tgtEl>
                                           <p:spTgt spid="7"/>
                                         </p:tgtEl>
                                       </p:cBhvr>
                                     </p:animEffect>
+                                  </p:childTnLst>
+                                </p:cTn>
+                              </p:par>
+                              <p:par>
+                                <p:cTn id="21" presetID="1" presetClass="entr" presetSubtype="0" fill="hold" grpId="0" nodeType="withEffect">
+                                  <p:stCondLst>
+                                    <p:cond delay="0"/>
+                                  </p:stCondLst>
+                                  <p:childTnLst>
+                                    <p:set>
+                                      <p:cBhvr>
+                                        <p:cTn id="22" dur="1" fill="hold">
+                                          <p:stCondLst>
+                                            <p:cond delay="0"/>
+                                          </p:stCondLst>
+                                        </p:cTn>
+                                        <p:tgtEl>
+                                          <p:spTgt spid="2"/>
+                                        </p:tgtEl>
+                                        <p:attrNameLst>
+                                          <p:attrName>style.visibility</p:attrName>
+                                        </p:attrNameLst>
+                                      </p:cBhvr>
+                                      <p:to>
+                                        <p:strVal val="visible"/>
+                                      </p:to>
+                                    </p:set>
                                   </p:childTnLst>
                                 </p:cTn>
                               </p:par>
@@ -19740,7 +21379,7 @@
       </p:par>
     </p:tnLst>
     <p:bldLst>
-      <p:bldP spid="5" grpId="0" animBg="1"/>
+      <p:bldP spid="2" grpId="0" animBg="1"/>
       <p:bldP spid="12" grpId="0" animBg="1"/>
       <p:bldP spid="14" grpId="0" animBg="1"/>
       <p:bldP spid="15" grpId="0" animBg="1"/>
@@ -19748,480 +21387,6 @@
       <p:bldP spid="8" grpId="0" animBg="1"/>
     </p:bldLst>
   </p:timing>
-</p:sld>
-</file>
-
-<file path=ppt/slides/slide21.xml><?xml version="1.0" encoding="utf-8"?>
-<p:sld xmlns:a="http://schemas.openxmlformats.org/drawingml/2006/main" xmlns:r="http://schemas.openxmlformats.org/officeDocument/2006/relationships" xmlns:p="http://schemas.openxmlformats.org/presentationml/2006/main">
-  <p:cSld>
-    <p:spTree>
-      <p:nvGrpSpPr>
-        <p:cNvPr id="1" name=""/>
-        <p:cNvGrpSpPr/>
-        <p:nvPr/>
-      </p:nvGrpSpPr>
-      <p:grpSpPr>
-        <a:xfrm>
-          <a:off x="0" y="0"/>
-          <a:ext cx="0" cy="0"/>
-          <a:chOff x="0" y="0"/>
-          <a:chExt cx="0" cy="0"/>
-        </a:xfrm>
-      </p:grpSpPr>
-      <p:sp>
-        <p:nvSpPr>
-          <p:cNvPr id="4" name="TextBox 3">
-            <a:extLst>
-              <a:ext uri="{FF2B5EF4-FFF2-40B4-BE49-F238E27FC236}">
-                <a16:creationId xmlns:a16="http://schemas.microsoft.com/office/drawing/2014/main" id="{AF55B6CE-98BC-4863-A435-E8D7EA6BEC92}"/>
-              </a:ext>
-            </a:extLst>
-          </p:cNvPr>
-          <p:cNvSpPr txBox="1"/>
-          <p:nvPr/>
-        </p:nvSpPr>
-        <p:spPr>
-          <a:xfrm>
-            <a:off x="1981200" y="1568270"/>
-            <a:ext cx="2209800" cy="830997"/>
-          </a:xfrm>
-          <a:prstGeom prst="rect">
-            <a:avLst/>
-          </a:prstGeom>
-        </p:spPr>
-        <p:style>
-          <a:lnRef idx="1">
-            <a:schemeClr val="accent1"/>
-          </a:lnRef>
-          <a:fillRef idx="2">
-            <a:schemeClr val="accent1"/>
-          </a:fillRef>
-          <a:effectRef idx="1">
-            <a:schemeClr val="accent1"/>
-          </a:effectRef>
-          <a:fontRef idx="minor">
-            <a:schemeClr val="dk1"/>
-          </a:fontRef>
-        </p:style>
-        <p:txBody>
-          <a:bodyPr wrap="square" rtlCol="0">
-            <a:spAutoFit/>
-          </a:bodyPr>
-          <a:lstStyle/>
-          <a:p>
-            <a:pPr algn="ctr"/>
-            <a:r>
-              <a:rPr lang="en-IE" sz="2400" b="1" dirty="0"/>
-              <a:t>Object</a:t>
-            </a:r>
-            <a:r>
-              <a:rPr lang="en-IE" sz="2400" dirty="0"/>
-              <a:t> Type/ </a:t>
-            </a:r>
-            <a:r>
-              <a:rPr lang="en-IE" sz="2400" b="1" dirty="0"/>
-              <a:t>Class</a:t>
-            </a:r>
-            <a:r>
-              <a:rPr lang="en-IE" sz="2400" dirty="0"/>
-              <a:t> Name</a:t>
-            </a:r>
-          </a:p>
-        </p:txBody>
-      </p:sp>
-      <p:sp>
-        <p:nvSpPr>
-          <p:cNvPr id="6" name="TextBox 5">
-            <a:extLst>
-              <a:ext uri="{FF2B5EF4-FFF2-40B4-BE49-F238E27FC236}">
-                <a16:creationId xmlns:a16="http://schemas.microsoft.com/office/drawing/2014/main" id="{DB058B3F-4693-4F5F-8CA0-902626A3E2B9}"/>
-              </a:ext>
-            </a:extLst>
-          </p:cNvPr>
-          <p:cNvSpPr txBox="1"/>
-          <p:nvPr/>
-        </p:nvSpPr>
-        <p:spPr>
-          <a:xfrm>
-            <a:off x="2018270" y="5010170"/>
-            <a:ext cx="2895600" cy="1200329"/>
-          </a:xfrm>
-          <a:prstGeom prst="rect">
-            <a:avLst/>
-          </a:prstGeom>
-        </p:spPr>
-        <p:style>
-          <a:lnRef idx="1">
-            <a:schemeClr val="accent1"/>
-          </a:lnRef>
-          <a:fillRef idx="2">
-            <a:schemeClr val="accent1"/>
-          </a:fillRef>
-          <a:effectRef idx="1">
-            <a:schemeClr val="accent1"/>
-          </a:effectRef>
-          <a:fontRef idx="minor">
-            <a:schemeClr val="dk1"/>
-          </a:fontRef>
-        </p:style>
-        <p:txBody>
-          <a:bodyPr wrap="square" rtlCol="0">
-            <a:spAutoFit/>
-          </a:bodyPr>
-          <a:lstStyle/>
-          <a:p>
-            <a:r>
-              <a:rPr lang="en-IE" sz="2400" b="1" dirty="0"/>
-              <a:t>Fields</a:t>
-            </a:r>
-            <a:r>
-              <a:rPr lang="en-IE" sz="2400" dirty="0"/>
-              <a:t> </a:t>
-            </a:r>
-            <a:br>
-              <a:rPr lang="en-IE" sz="2400" dirty="0"/>
-            </a:br>
-            <a:r>
-              <a:rPr lang="en-IE" sz="2400" dirty="0"/>
-              <a:t>i.e. the attributes of the class</a:t>
-            </a:r>
-          </a:p>
-        </p:txBody>
-      </p:sp>
-      <p:sp>
-        <p:nvSpPr>
-          <p:cNvPr id="9" name="TextBox 8">
-            <a:extLst>
-              <a:ext uri="{FF2B5EF4-FFF2-40B4-BE49-F238E27FC236}">
-                <a16:creationId xmlns:a16="http://schemas.microsoft.com/office/drawing/2014/main" id="{1A28F948-94CE-4F6C-A8F5-087C6D29DD24}"/>
-              </a:ext>
-            </a:extLst>
-          </p:cNvPr>
-          <p:cNvSpPr txBox="1"/>
-          <p:nvPr/>
-        </p:nvSpPr>
-        <p:spPr>
-          <a:xfrm>
-            <a:off x="1981200" y="2933004"/>
-            <a:ext cx="2895600" cy="1200329"/>
-          </a:xfrm>
-          <a:prstGeom prst="rect">
-            <a:avLst/>
-          </a:prstGeom>
-        </p:spPr>
-        <p:style>
-          <a:lnRef idx="1">
-            <a:schemeClr val="accent1"/>
-          </a:lnRef>
-          <a:fillRef idx="2">
-            <a:schemeClr val="accent1"/>
-          </a:fillRef>
-          <a:effectRef idx="1">
-            <a:schemeClr val="accent1"/>
-          </a:effectRef>
-          <a:fontRef idx="minor">
-            <a:schemeClr val="dk1"/>
-          </a:fontRef>
-        </p:style>
-        <p:txBody>
-          <a:bodyPr wrap="square" rtlCol="0">
-            <a:spAutoFit/>
-          </a:bodyPr>
-          <a:lstStyle/>
-          <a:p>
-            <a:r>
-              <a:rPr lang="en-IE" sz="2400" b="1" dirty="0"/>
-              <a:t>Methods</a:t>
-            </a:r>
-            <a:r>
-              <a:rPr lang="en-IE" sz="2400" dirty="0"/>
-              <a:t> </a:t>
-            </a:r>
-            <a:br>
-              <a:rPr lang="en-IE" sz="2400" dirty="0"/>
-            </a:br>
-            <a:r>
-              <a:rPr lang="en-IE" sz="2400" dirty="0"/>
-              <a:t>i.e. the behaviours of the class</a:t>
-            </a:r>
-          </a:p>
-        </p:txBody>
-      </p:sp>
-      <p:sp>
-        <p:nvSpPr>
-          <p:cNvPr id="3" name="Rectangle 2">
-            <a:extLst>
-              <a:ext uri="{FF2B5EF4-FFF2-40B4-BE49-F238E27FC236}">
-                <a16:creationId xmlns:a16="http://schemas.microsoft.com/office/drawing/2014/main" id="{476E7FE7-3161-8A42-9637-FA0E4CA1606D}"/>
-              </a:ext>
-            </a:extLst>
-          </p:cNvPr>
-          <p:cNvSpPr>
-            <a:spLocks noChangeArrowheads="1"/>
-          </p:cNvSpPr>
-          <p:nvPr/>
-        </p:nvSpPr>
-        <p:spPr bwMode="auto">
-          <a:xfrm>
-            <a:off x="5562600" y="1033027"/>
-            <a:ext cx="12503888" cy="369332"/>
-          </a:xfrm>
-          <a:prstGeom prst="rect">
-            <a:avLst/>
-          </a:prstGeom>
-          <a:noFill/>
-          <a:ln>
-            <a:noFill/>
-          </a:ln>
-          <a:effectLst/>
-          <a:extLst>
-            <a:ext uri="{909E8E84-426E-40DD-AFC4-6F175D3DCCD1}">
-              <a14:hiddenFill xmlns:a14="http://schemas.microsoft.com/office/drawing/2010/main">
-                <a:solidFill>
-                  <a:schemeClr val="accent1"/>
-                </a:solidFill>
-              </a14:hiddenFill>
-            </a:ext>
-            <a:ext uri="{91240B29-F687-4F45-9708-019B960494DF}">
-              <a14:hiddenLine xmlns:a14="http://schemas.microsoft.com/office/drawing/2010/main" w="9525">
-                <a:solidFill>
-                  <a:schemeClr val="tx1"/>
-                </a:solidFill>
-                <a:miter lim="800000"/>
-                <a:headEnd/>
-                <a:tailEnd/>
-              </a14:hiddenLine>
-            </a:ext>
-            <a:ext uri="{AF507438-7753-43E0-B8FC-AC1667EBCBE1}">
-              <a14:hiddenEffects xmlns:a14="http://schemas.microsoft.com/office/drawing/2010/main">
-                <a:effectLst>
-                  <a:outerShdw dist="35921" dir="2700000" algn="ctr" rotWithShape="0">
-                    <a:schemeClr val="bg2"/>
-                  </a:outerShdw>
-                </a:effectLst>
-              </a14:hiddenEffects>
-            </a:ext>
-          </a:extLst>
-        </p:spPr>
-        <p:txBody>
-          <a:bodyPr vert="horz" wrap="square" lIns="91440" tIns="45720" rIns="91440" bIns="45720" numCol="1" anchor="ctr" anchorCtr="0" compatLnSpc="1">
-            <a:prstTxWarp prst="textNoShape">
-              <a:avLst/>
-            </a:prstTxWarp>
-            <a:spAutoFit/>
-          </a:bodyPr>
-          <a:lstStyle/>
-          <a:p>
-            <a:endParaRPr lang="en-US"/>
-          </a:p>
-        </p:txBody>
-      </p:sp>
-      <p:sp>
-        <p:nvSpPr>
-          <p:cNvPr id="2" name="Title 1"/>
-          <p:cNvSpPr>
-            <a:spLocks noGrp="1"/>
-          </p:cNvSpPr>
-          <p:nvPr>
-            <p:ph type="title"/>
-          </p:nvPr>
-        </p:nvSpPr>
-        <p:spPr/>
-        <p:txBody>
-          <a:bodyPr>
-            <a:normAutofit/>
-          </a:bodyPr>
-          <a:lstStyle/>
-          <a:p>
-            <a:r>
-              <a:rPr lang="en-IE" sz="3600" dirty="0"/>
-              <a:t>Product Class </a:t>
-            </a:r>
-          </a:p>
-        </p:txBody>
-      </p:sp>
-      <p:pic>
-        <p:nvPicPr>
-          <p:cNvPr id="12" name="Picture 11">
-            <a:extLst>
-              <a:ext uri="{FF2B5EF4-FFF2-40B4-BE49-F238E27FC236}">
-                <a16:creationId xmlns:a16="http://schemas.microsoft.com/office/drawing/2014/main" id="{8A649CED-7842-4BA2-B14B-FC72F80AEBF0}"/>
-              </a:ext>
-            </a:extLst>
-          </p:cNvPr>
-          <p:cNvPicPr>
-            <a:picLocks noChangeAspect="1"/>
-          </p:cNvPicPr>
-          <p:nvPr/>
-        </p:nvPicPr>
-        <p:blipFill>
-          <a:blip r:embed="rId2"/>
-          <a:stretch>
-            <a:fillRect/>
-          </a:stretch>
-        </p:blipFill>
-        <p:spPr>
-          <a:xfrm>
-            <a:off x="5363863" y="1558449"/>
-            <a:ext cx="4434081" cy="4632167"/>
-          </a:xfrm>
-          <a:prstGeom prst="rect">
-            <a:avLst/>
-          </a:prstGeom>
-          <a:ln>
-            <a:noFill/>
-          </a:ln>
-          <a:effectLst>
-            <a:outerShdw blurRad="292100" dist="139700" dir="2700000" algn="tl" rotWithShape="0">
-              <a:srgbClr val="333333">
-                <a:alpha val="65000"/>
-              </a:srgbClr>
-            </a:outerShdw>
-          </a:effectLst>
-        </p:spPr>
-      </p:pic>
-      <p:cxnSp>
-        <p:nvCxnSpPr>
-          <p:cNvPr id="5" name="Straight Arrow Connector 4">
-            <a:extLst>
-              <a:ext uri="{FF2B5EF4-FFF2-40B4-BE49-F238E27FC236}">
-                <a16:creationId xmlns:a16="http://schemas.microsoft.com/office/drawing/2014/main" id="{4B579DCA-FE64-4FC1-AAA9-ADDA0D7F2487}"/>
-              </a:ext>
-            </a:extLst>
-          </p:cNvPr>
-          <p:cNvCxnSpPr>
-            <a:cxnSpLocks/>
-            <a:stCxn id="4" idx="3"/>
-          </p:cNvCxnSpPr>
-          <p:nvPr/>
-        </p:nvCxnSpPr>
-        <p:spPr>
-          <a:xfrm flipV="1">
-            <a:off x="4191000" y="1676400"/>
-            <a:ext cx="1676400" cy="307368"/>
-          </a:xfrm>
-          <a:prstGeom prst="straightConnector1">
-            <a:avLst/>
-          </a:prstGeom>
-          <a:ln w="28575">
-            <a:tailEnd type="arrow"/>
-          </a:ln>
-        </p:spPr>
-        <p:style>
-          <a:lnRef idx="1">
-            <a:schemeClr val="accent1"/>
-          </a:lnRef>
-          <a:fillRef idx="0">
-            <a:schemeClr val="accent1"/>
-          </a:fillRef>
-          <a:effectRef idx="0">
-            <a:schemeClr val="accent1"/>
-          </a:effectRef>
-          <a:fontRef idx="minor">
-            <a:schemeClr val="tx1"/>
-          </a:fontRef>
-        </p:style>
-      </p:cxnSp>
-      <p:sp>
-        <p:nvSpPr>
-          <p:cNvPr id="16" name="Left Brace 15">
-            <a:extLst>
-              <a:ext uri="{FF2B5EF4-FFF2-40B4-BE49-F238E27FC236}">
-                <a16:creationId xmlns:a16="http://schemas.microsoft.com/office/drawing/2014/main" id="{3AA25F20-2097-4621-9CA3-6717EA579AC4}"/>
-              </a:ext>
-            </a:extLst>
-          </p:cNvPr>
-          <p:cNvSpPr/>
-          <p:nvPr/>
-        </p:nvSpPr>
-        <p:spPr>
-          <a:xfrm>
-            <a:off x="4876800" y="1828800"/>
-            <a:ext cx="990600" cy="3132654"/>
-          </a:xfrm>
-          <a:prstGeom prst="leftBrace">
-            <a:avLst/>
-          </a:prstGeom>
-          <a:ln w="28575"/>
-        </p:spPr>
-        <p:style>
-          <a:lnRef idx="1">
-            <a:schemeClr val="accent1"/>
-          </a:lnRef>
-          <a:fillRef idx="0">
-            <a:schemeClr val="accent1"/>
-          </a:fillRef>
-          <a:effectRef idx="0">
-            <a:schemeClr val="accent1"/>
-          </a:effectRef>
-          <a:fontRef idx="minor">
-            <a:schemeClr val="tx1"/>
-          </a:fontRef>
-        </p:style>
-        <p:txBody>
-          <a:bodyPr rtlCol="0" anchor="ctr"/>
-          <a:lstStyle/>
-          <a:p>
-            <a:pPr algn="ctr"/>
-            <a:endParaRPr lang="en-VI"/>
-          </a:p>
-        </p:txBody>
-      </p:sp>
-      <p:sp>
-        <p:nvSpPr>
-          <p:cNvPr id="17" name="Left Brace 16">
-            <a:extLst>
-              <a:ext uri="{FF2B5EF4-FFF2-40B4-BE49-F238E27FC236}">
-                <a16:creationId xmlns:a16="http://schemas.microsoft.com/office/drawing/2014/main" id="{636477FE-7B3F-4ADE-9E51-FD56C296A799}"/>
-              </a:ext>
-            </a:extLst>
-          </p:cNvPr>
-          <p:cNvSpPr/>
-          <p:nvPr/>
-        </p:nvSpPr>
-        <p:spPr>
-          <a:xfrm>
-            <a:off x="4913870" y="5010170"/>
-            <a:ext cx="830992" cy="1127613"/>
-          </a:xfrm>
-          <a:prstGeom prst="leftBrace">
-            <a:avLst/>
-          </a:prstGeom>
-          <a:ln w="28575"/>
-        </p:spPr>
-        <p:style>
-          <a:lnRef idx="1">
-            <a:schemeClr val="accent1"/>
-          </a:lnRef>
-          <a:fillRef idx="0">
-            <a:schemeClr val="accent1"/>
-          </a:fillRef>
-          <a:effectRef idx="0">
-            <a:schemeClr val="accent1"/>
-          </a:effectRef>
-          <a:fontRef idx="minor">
-            <a:schemeClr val="tx1"/>
-          </a:fontRef>
-        </p:style>
-        <p:txBody>
-          <a:bodyPr rtlCol="0" anchor="ctr"/>
-          <a:lstStyle/>
-          <a:p>
-            <a:pPr algn="ctr"/>
-            <a:endParaRPr lang="en-VI"/>
-          </a:p>
-        </p:txBody>
-      </p:sp>
-    </p:spTree>
-    <p:extLst>
-      <p:ext uri="{BB962C8B-B14F-4D97-AF65-F5344CB8AC3E}">
-        <p14:creationId xmlns:p14="http://schemas.microsoft.com/office/powerpoint/2010/main" val="1309116538"/>
-      </p:ext>
-    </p:extLst>
-  </p:cSld>
-  <p:clrMapOvr>
-    <a:masterClrMapping/>
-  </p:clrMapOvr>
 </p:sld>
 </file>
 
@@ -20244,6 +21409,998 @@
       </p:grpSpPr>
       <p:sp>
         <p:nvSpPr>
+          <p:cNvPr id="4" name="TextBox 3">
+            <a:extLst>
+              <a:ext uri="{FF2B5EF4-FFF2-40B4-BE49-F238E27FC236}">
+                <a16:creationId xmlns:a16="http://schemas.microsoft.com/office/drawing/2014/main" id="{AF55B6CE-98BC-4863-A435-E8D7EA6BEC92}"/>
+              </a:ext>
+            </a:extLst>
+          </p:cNvPr>
+          <p:cNvSpPr txBox="1"/>
+          <p:nvPr/>
+        </p:nvSpPr>
+        <p:spPr>
+          <a:xfrm>
+            <a:off x="4457700" y="43705"/>
+            <a:ext cx="2209800" cy="830997"/>
+          </a:xfrm>
+          <a:prstGeom prst="rect">
+            <a:avLst/>
+          </a:prstGeom>
+        </p:spPr>
+        <p:style>
+          <a:lnRef idx="1">
+            <a:schemeClr val="accent1"/>
+          </a:lnRef>
+          <a:fillRef idx="2">
+            <a:schemeClr val="accent1"/>
+          </a:fillRef>
+          <a:effectRef idx="1">
+            <a:schemeClr val="accent1"/>
+          </a:effectRef>
+          <a:fontRef idx="minor">
+            <a:schemeClr val="dk1"/>
+          </a:fontRef>
+        </p:style>
+        <p:txBody>
+          <a:bodyPr wrap="square" rtlCol="0">
+            <a:spAutoFit/>
+          </a:bodyPr>
+          <a:lstStyle/>
+          <a:p>
+            <a:pPr algn="ctr"/>
+            <a:r>
+              <a:rPr lang="en-IE" sz="2400" b="1" dirty="0"/>
+              <a:t>Object</a:t>
+            </a:r>
+            <a:r>
+              <a:rPr lang="en-IE" sz="2400" dirty="0"/>
+              <a:t> Type/ </a:t>
+            </a:r>
+            <a:r>
+              <a:rPr lang="en-IE" sz="2400" b="1" dirty="0"/>
+              <a:t>Class</a:t>
+            </a:r>
+            <a:r>
+              <a:rPr lang="en-IE" sz="2400" dirty="0"/>
+              <a:t> Name</a:t>
+            </a:r>
+          </a:p>
+        </p:txBody>
+      </p:sp>
+      <p:sp>
+        <p:nvSpPr>
+          <p:cNvPr id="6" name="TextBox 5">
+            <a:extLst>
+              <a:ext uri="{FF2B5EF4-FFF2-40B4-BE49-F238E27FC236}">
+                <a16:creationId xmlns:a16="http://schemas.microsoft.com/office/drawing/2014/main" id="{DB058B3F-4693-4F5F-8CA0-902626A3E2B9}"/>
+              </a:ext>
+            </a:extLst>
+          </p:cNvPr>
+          <p:cNvSpPr txBox="1"/>
+          <p:nvPr/>
+        </p:nvSpPr>
+        <p:spPr>
+          <a:xfrm>
+            <a:off x="2340919" y="2228671"/>
+            <a:ext cx="2895600" cy="1200329"/>
+          </a:xfrm>
+          <a:prstGeom prst="rect">
+            <a:avLst/>
+          </a:prstGeom>
+        </p:spPr>
+        <p:style>
+          <a:lnRef idx="1">
+            <a:schemeClr val="accent1"/>
+          </a:lnRef>
+          <a:fillRef idx="2">
+            <a:schemeClr val="accent1"/>
+          </a:fillRef>
+          <a:effectRef idx="1">
+            <a:schemeClr val="accent1"/>
+          </a:effectRef>
+          <a:fontRef idx="minor">
+            <a:schemeClr val="dk1"/>
+          </a:fontRef>
+        </p:style>
+        <p:txBody>
+          <a:bodyPr wrap="square" rtlCol="0">
+            <a:spAutoFit/>
+          </a:bodyPr>
+          <a:lstStyle/>
+          <a:p>
+            <a:r>
+              <a:rPr lang="en-IE" sz="2400" b="1" dirty="0"/>
+              <a:t>Fields</a:t>
+            </a:r>
+            <a:r>
+              <a:rPr lang="en-IE" sz="2400" dirty="0"/>
+              <a:t> </a:t>
+            </a:r>
+            <a:br>
+              <a:rPr lang="en-IE" sz="2400" dirty="0"/>
+            </a:br>
+            <a:r>
+              <a:rPr lang="en-IE" sz="2400" dirty="0"/>
+              <a:t>i.e. the attributes of the class</a:t>
+            </a:r>
+          </a:p>
+        </p:txBody>
+      </p:sp>
+      <p:sp>
+        <p:nvSpPr>
+          <p:cNvPr id="9" name="TextBox 8">
+            <a:extLst>
+              <a:ext uri="{FF2B5EF4-FFF2-40B4-BE49-F238E27FC236}">
+                <a16:creationId xmlns:a16="http://schemas.microsoft.com/office/drawing/2014/main" id="{1A28F948-94CE-4F6C-A8F5-087C6D29DD24}"/>
+              </a:ext>
+            </a:extLst>
+          </p:cNvPr>
+          <p:cNvSpPr txBox="1"/>
+          <p:nvPr/>
+        </p:nvSpPr>
+        <p:spPr>
+          <a:xfrm>
+            <a:off x="2205037" y="4444447"/>
+            <a:ext cx="2895600" cy="1200329"/>
+          </a:xfrm>
+          <a:prstGeom prst="rect">
+            <a:avLst/>
+          </a:prstGeom>
+        </p:spPr>
+        <p:style>
+          <a:lnRef idx="1">
+            <a:schemeClr val="accent1"/>
+          </a:lnRef>
+          <a:fillRef idx="2">
+            <a:schemeClr val="accent1"/>
+          </a:fillRef>
+          <a:effectRef idx="1">
+            <a:schemeClr val="accent1"/>
+          </a:effectRef>
+          <a:fontRef idx="minor">
+            <a:schemeClr val="dk1"/>
+          </a:fontRef>
+        </p:style>
+        <p:txBody>
+          <a:bodyPr wrap="square" rtlCol="0">
+            <a:spAutoFit/>
+          </a:bodyPr>
+          <a:lstStyle/>
+          <a:p>
+            <a:r>
+              <a:rPr lang="en-IE" sz="2400" b="1" dirty="0"/>
+              <a:t>Methods</a:t>
+            </a:r>
+            <a:r>
+              <a:rPr lang="en-IE" sz="2400" dirty="0"/>
+              <a:t> </a:t>
+            </a:r>
+            <a:br>
+              <a:rPr lang="en-IE" sz="2400" dirty="0"/>
+            </a:br>
+            <a:r>
+              <a:rPr lang="en-IE" sz="2400" dirty="0"/>
+              <a:t>i.e. the behaviours of the class</a:t>
+            </a:r>
+          </a:p>
+        </p:txBody>
+      </p:sp>
+      <p:sp>
+        <p:nvSpPr>
+          <p:cNvPr id="3" name="Rectangle 2">
+            <a:extLst>
+              <a:ext uri="{FF2B5EF4-FFF2-40B4-BE49-F238E27FC236}">
+                <a16:creationId xmlns:a16="http://schemas.microsoft.com/office/drawing/2014/main" id="{476E7FE7-3161-8A42-9637-FA0E4CA1606D}"/>
+              </a:ext>
+            </a:extLst>
+          </p:cNvPr>
+          <p:cNvSpPr>
+            <a:spLocks noChangeArrowheads="1"/>
+          </p:cNvSpPr>
+          <p:nvPr/>
+        </p:nvSpPr>
+        <p:spPr bwMode="auto">
+          <a:xfrm>
+            <a:off x="5562600" y="1033027"/>
+            <a:ext cx="12503888" cy="369332"/>
+          </a:xfrm>
+          <a:prstGeom prst="rect">
+            <a:avLst/>
+          </a:prstGeom>
+          <a:noFill/>
+          <a:ln>
+            <a:noFill/>
+          </a:ln>
+          <a:effectLst/>
+          <a:extLst>
+            <a:ext uri="{909E8E84-426E-40DD-AFC4-6F175D3DCCD1}">
+              <a14:hiddenFill xmlns:a14="http://schemas.microsoft.com/office/drawing/2010/main">
+                <a:solidFill>
+                  <a:schemeClr val="accent1"/>
+                </a:solidFill>
+              </a14:hiddenFill>
+            </a:ext>
+            <a:ext uri="{91240B29-F687-4F45-9708-019B960494DF}">
+              <a14:hiddenLine xmlns:a14="http://schemas.microsoft.com/office/drawing/2010/main" w="9525">
+                <a:solidFill>
+                  <a:schemeClr val="tx1"/>
+                </a:solidFill>
+                <a:miter lim="800000"/>
+                <a:headEnd/>
+                <a:tailEnd/>
+              </a14:hiddenLine>
+            </a:ext>
+            <a:ext uri="{AF507438-7753-43E0-B8FC-AC1667EBCBE1}">
+              <a14:hiddenEffects xmlns:a14="http://schemas.microsoft.com/office/drawing/2010/main">
+                <a:effectLst>
+                  <a:outerShdw dist="35921" dir="2700000" algn="ctr" rotWithShape="0">
+                    <a:schemeClr val="bg2"/>
+                  </a:outerShdw>
+                </a:effectLst>
+              </a14:hiddenEffects>
+            </a:ext>
+          </a:extLst>
+        </p:spPr>
+        <p:txBody>
+          <a:bodyPr vert="horz" wrap="square" lIns="91440" tIns="45720" rIns="91440" bIns="45720" numCol="1" anchor="ctr" anchorCtr="0" compatLnSpc="1">
+            <a:prstTxWarp prst="textNoShape">
+              <a:avLst/>
+            </a:prstTxWarp>
+            <a:spAutoFit/>
+          </a:bodyPr>
+          <a:lstStyle/>
+          <a:p>
+            <a:endParaRPr lang="en-US"/>
+          </a:p>
+        </p:txBody>
+      </p:sp>
+      <p:sp>
+        <p:nvSpPr>
+          <p:cNvPr id="2" name="Title 1"/>
+          <p:cNvSpPr>
+            <a:spLocks noGrp="1"/>
+          </p:cNvSpPr>
+          <p:nvPr>
+            <p:ph type="title"/>
+          </p:nvPr>
+        </p:nvSpPr>
+        <p:spPr/>
+        <p:txBody>
+          <a:bodyPr>
+            <a:normAutofit/>
+          </a:bodyPr>
+          <a:lstStyle/>
+          <a:p>
+            <a:r>
+              <a:rPr lang="en-IE" sz="3600" dirty="0"/>
+              <a:t>Person Class </a:t>
+            </a:r>
+          </a:p>
+        </p:txBody>
+      </p:sp>
+      <p:sp>
+        <p:nvSpPr>
+          <p:cNvPr id="16" name="Left Brace 15">
+            <a:extLst>
+              <a:ext uri="{FF2B5EF4-FFF2-40B4-BE49-F238E27FC236}">
+                <a16:creationId xmlns:a16="http://schemas.microsoft.com/office/drawing/2014/main" id="{3AA25F20-2097-4621-9CA3-6717EA579AC4}"/>
+              </a:ext>
+            </a:extLst>
+          </p:cNvPr>
+          <p:cNvSpPr/>
+          <p:nvPr/>
+        </p:nvSpPr>
+        <p:spPr>
+          <a:xfrm>
+            <a:off x="5100637" y="3294580"/>
+            <a:ext cx="990600" cy="2971799"/>
+          </a:xfrm>
+          <a:prstGeom prst="leftBrace">
+            <a:avLst/>
+          </a:prstGeom>
+          <a:ln w="28575"/>
+        </p:spPr>
+        <p:style>
+          <a:lnRef idx="1">
+            <a:schemeClr val="accent1"/>
+          </a:lnRef>
+          <a:fillRef idx="0">
+            <a:schemeClr val="accent1"/>
+          </a:fillRef>
+          <a:effectRef idx="0">
+            <a:schemeClr val="accent1"/>
+          </a:effectRef>
+          <a:fontRef idx="minor">
+            <a:schemeClr val="tx1"/>
+          </a:fontRef>
+        </p:style>
+        <p:txBody>
+          <a:bodyPr rtlCol="0" anchor="ctr"/>
+          <a:lstStyle/>
+          <a:p>
+            <a:pPr algn="ctr"/>
+            <a:endParaRPr lang="en-VI"/>
+          </a:p>
+        </p:txBody>
+      </p:sp>
+      <p:sp>
+        <p:nvSpPr>
+          <p:cNvPr id="17" name="Left Brace 16">
+            <a:extLst>
+              <a:ext uri="{FF2B5EF4-FFF2-40B4-BE49-F238E27FC236}">
+                <a16:creationId xmlns:a16="http://schemas.microsoft.com/office/drawing/2014/main" id="{636477FE-7B3F-4ADE-9E51-FD56C296A799}"/>
+              </a:ext>
+            </a:extLst>
+          </p:cNvPr>
+          <p:cNvSpPr/>
+          <p:nvPr/>
+        </p:nvSpPr>
+        <p:spPr>
+          <a:xfrm>
+            <a:off x="5273589" y="2265031"/>
+            <a:ext cx="830992" cy="859170"/>
+          </a:xfrm>
+          <a:prstGeom prst="leftBrace">
+            <a:avLst/>
+          </a:prstGeom>
+          <a:ln w="28575"/>
+        </p:spPr>
+        <p:style>
+          <a:lnRef idx="1">
+            <a:schemeClr val="accent1"/>
+          </a:lnRef>
+          <a:fillRef idx="0">
+            <a:schemeClr val="accent1"/>
+          </a:fillRef>
+          <a:effectRef idx="0">
+            <a:schemeClr val="accent1"/>
+          </a:effectRef>
+          <a:fontRef idx="minor">
+            <a:schemeClr val="tx1"/>
+          </a:fontRef>
+        </p:style>
+        <p:txBody>
+          <a:bodyPr rtlCol="0" anchor="ctr"/>
+          <a:lstStyle/>
+          <a:p>
+            <a:pPr algn="ctr"/>
+            <a:endParaRPr lang="en-VI"/>
+          </a:p>
+        </p:txBody>
+      </p:sp>
+      <p:pic>
+        <p:nvPicPr>
+          <p:cNvPr id="7" name="Picture 6">
+            <a:extLst>
+              <a:ext uri="{FF2B5EF4-FFF2-40B4-BE49-F238E27FC236}">
+                <a16:creationId xmlns:a16="http://schemas.microsoft.com/office/drawing/2014/main" id="{BA288E3A-0485-A15B-D8F7-8972FDDA99A7}"/>
+              </a:ext>
+            </a:extLst>
+          </p:cNvPr>
+          <p:cNvPicPr>
+            <a:picLocks noChangeAspect="1"/>
+          </p:cNvPicPr>
+          <p:nvPr/>
+        </p:nvPicPr>
+        <p:blipFill>
+          <a:blip r:embed="rId2"/>
+          <a:stretch>
+            <a:fillRect/>
+          </a:stretch>
+        </p:blipFill>
+        <p:spPr>
+          <a:xfrm>
+            <a:off x="6128307" y="1391473"/>
+            <a:ext cx="5422900" cy="5080000"/>
+          </a:xfrm>
+          <a:prstGeom prst="rect">
+            <a:avLst/>
+          </a:prstGeom>
+        </p:spPr>
+      </p:pic>
+      <p:cxnSp>
+        <p:nvCxnSpPr>
+          <p:cNvPr id="5" name="Straight Arrow Connector 4">
+            <a:extLst>
+              <a:ext uri="{FF2B5EF4-FFF2-40B4-BE49-F238E27FC236}">
+                <a16:creationId xmlns:a16="http://schemas.microsoft.com/office/drawing/2014/main" id="{4B579DCA-FE64-4FC1-AAA9-ADDA0D7F2487}"/>
+              </a:ext>
+            </a:extLst>
+          </p:cNvPr>
+          <p:cNvCxnSpPr>
+            <a:cxnSpLocks/>
+          </p:cNvCxnSpPr>
+          <p:nvPr/>
+        </p:nvCxnSpPr>
+        <p:spPr>
+          <a:xfrm>
+            <a:off x="6672262" y="488239"/>
+            <a:ext cx="1557338" cy="1696323"/>
+          </a:xfrm>
+          <a:prstGeom prst="straightConnector1">
+            <a:avLst/>
+          </a:prstGeom>
+          <a:ln w="28575">
+            <a:tailEnd type="arrow"/>
+          </a:ln>
+        </p:spPr>
+        <p:style>
+          <a:lnRef idx="1">
+            <a:schemeClr val="accent1"/>
+          </a:lnRef>
+          <a:fillRef idx="0">
+            <a:schemeClr val="accent1"/>
+          </a:fillRef>
+          <a:effectRef idx="0">
+            <a:schemeClr val="accent1"/>
+          </a:effectRef>
+          <a:fontRef idx="minor">
+            <a:schemeClr val="tx1"/>
+          </a:fontRef>
+        </p:style>
+      </p:cxnSp>
+    </p:spTree>
+    <p:extLst>
+      <p:ext uri="{BB962C8B-B14F-4D97-AF65-F5344CB8AC3E}">
+        <p14:creationId xmlns:p14="http://schemas.microsoft.com/office/powerpoint/2010/main" val="1309116538"/>
+      </p:ext>
+    </p:extLst>
+  </p:cSld>
+  <p:clrMapOvr>
+    <a:masterClrMapping/>
+  </p:clrMapOvr>
+  <p:timing>
+    <p:tnLst>
+      <p:par>
+        <p:cTn id="1" dur="indefinite" restart="never" nodeType="tmRoot">
+          <p:childTnLst>
+            <p:seq concurrent="1" nextAc="seek">
+              <p:cTn id="2" dur="indefinite" nodeType="mainSeq">
+                <p:childTnLst>
+                  <p:par>
+                    <p:cTn id="3" fill="hold">
+                      <p:stCondLst>
+                        <p:cond delay="indefinite"/>
+                      </p:stCondLst>
+                      <p:childTnLst>
+                        <p:par>
+                          <p:cTn id="4" fill="hold">
+                            <p:stCondLst>
+                              <p:cond delay="0"/>
+                            </p:stCondLst>
+                            <p:childTnLst>
+                              <p:par>
+                                <p:cTn id="5" presetID="2" presetClass="entr" presetSubtype="4" fill="hold" grpId="0" nodeType="clickEffect">
+                                  <p:stCondLst>
+                                    <p:cond delay="0"/>
+                                  </p:stCondLst>
+                                  <p:childTnLst>
+                                    <p:set>
+                                      <p:cBhvr>
+                                        <p:cTn id="6" dur="1" fill="hold">
+                                          <p:stCondLst>
+                                            <p:cond delay="0"/>
+                                          </p:stCondLst>
+                                        </p:cTn>
+                                        <p:tgtEl>
+                                          <p:spTgt spid="4"/>
+                                        </p:tgtEl>
+                                        <p:attrNameLst>
+                                          <p:attrName>style.visibility</p:attrName>
+                                        </p:attrNameLst>
+                                      </p:cBhvr>
+                                      <p:to>
+                                        <p:strVal val="visible"/>
+                                      </p:to>
+                                    </p:set>
+                                    <p:anim calcmode="lin" valueType="num">
+                                      <p:cBhvr additive="base">
+                                        <p:cTn id="7" dur="500" fill="hold"/>
+                                        <p:tgtEl>
+                                          <p:spTgt spid="4"/>
+                                        </p:tgtEl>
+                                        <p:attrNameLst>
+                                          <p:attrName>ppt_x</p:attrName>
+                                        </p:attrNameLst>
+                                      </p:cBhvr>
+                                      <p:tavLst>
+                                        <p:tav tm="0">
+                                          <p:val>
+                                            <p:strVal val="#ppt_x"/>
+                                          </p:val>
+                                        </p:tav>
+                                        <p:tav tm="100000">
+                                          <p:val>
+                                            <p:strVal val="#ppt_x"/>
+                                          </p:val>
+                                        </p:tav>
+                                      </p:tavLst>
+                                    </p:anim>
+                                    <p:anim calcmode="lin" valueType="num">
+                                      <p:cBhvr additive="base">
+                                        <p:cTn id="8" dur="500" fill="hold"/>
+                                        <p:tgtEl>
+                                          <p:spTgt spid="4"/>
+                                        </p:tgtEl>
+                                        <p:attrNameLst>
+                                          <p:attrName>ppt_y</p:attrName>
+                                        </p:attrNameLst>
+                                      </p:cBhvr>
+                                      <p:tavLst>
+                                        <p:tav tm="0">
+                                          <p:val>
+                                            <p:strVal val="1+#ppt_h/2"/>
+                                          </p:val>
+                                        </p:tav>
+                                        <p:tav tm="100000">
+                                          <p:val>
+                                            <p:strVal val="#ppt_y"/>
+                                          </p:val>
+                                        </p:tav>
+                                      </p:tavLst>
+                                    </p:anim>
+                                  </p:childTnLst>
+                                </p:cTn>
+                              </p:par>
+                              <p:par>
+                                <p:cTn id="9" presetID="2" presetClass="entr" presetSubtype="4" fill="hold" nodeType="withEffect">
+                                  <p:stCondLst>
+                                    <p:cond delay="0"/>
+                                  </p:stCondLst>
+                                  <p:childTnLst>
+                                    <p:set>
+                                      <p:cBhvr>
+                                        <p:cTn id="10" dur="1" fill="hold">
+                                          <p:stCondLst>
+                                            <p:cond delay="0"/>
+                                          </p:stCondLst>
+                                        </p:cTn>
+                                        <p:tgtEl>
+                                          <p:spTgt spid="5"/>
+                                        </p:tgtEl>
+                                        <p:attrNameLst>
+                                          <p:attrName>style.visibility</p:attrName>
+                                        </p:attrNameLst>
+                                      </p:cBhvr>
+                                      <p:to>
+                                        <p:strVal val="visible"/>
+                                      </p:to>
+                                    </p:set>
+                                    <p:anim calcmode="lin" valueType="num">
+                                      <p:cBhvr additive="base">
+                                        <p:cTn id="11" dur="500" fill="hold"/>
+                                        <p:tgtEl>
+                                          <p:spTgt spid="5"/>
+                                        </p:tgtEl>
+                                        <p:attrNameLst>
+                                          <p:attrName>ppt_x</p:attrName>
+                                        </p:attrNameLst>
+                                      </p:cBhvr>
+                                      <p:tavLst>
+                                        <p:tav tm="0">
+                                          <p:val>
+                                            <p:strVal val="#ppt_x"/>
+                                          </p:val>
+                                        </p:tav>
+                                        <p:tav tm="100000">
+                                          <p:val>
+                                            <p:strVal val="#ppt_x"/>
+                                          </p:val>
+                                        </p:tav>
+                                      </p:tavLst>
+                                    </p:anim>
+                                    <p:anim calcmode="lin" valueType="num">
+                                      <p:cBhvr additive="base">
+                                        <p:cTn id="12" dur="500" fill="hold"/>
+                                        <p:tgtEl>
+                                          <p:spTgt spid="5"/>
+                                        </p:tgtEl>
+                                        <p:attrNameLst>
+                                          <p:attrName>ppt_y</p:attrName>
+                                        </p:attrNameLst>
+                                      </p:cBhvr>
+                                      <p:tavLst>
+                                        <p:tav tm="0">
+                                          <p:val>
+                                            <p:strVal val="1+#ppt_h/2"/>
+                                          </p:val>
+                                        </p:tav>
+                                        <p:tav tm="100000">
+                                          <p:val>
+                                            <p:strVal val="#ppt_y"/>
+                                          </p:val>
+                                        </p:tav>
+                                      </p:tavLst>
+                                    </p:anim>
+                                  </p:childTnLst>
+                                </p:cTn>
+                              </p:par>
+                            </p:childTnLst>
+                          </p:cTn>
+                        </p:par>
+                      </p:childTnLst>
+                    </p:cTn>
+                  </p:par>
+                  <p:par>
+                    <p:cTn id="13" fill="hold">
+                      <p:stCondLst>
+                        <p:cond delay="indefinite"/>
+                      </p:stCondLst>
+                      <p:childTnLst>
+                        <p:par>
+                          <p:cTn id="14" fill="hold">
+                            <p:stCondLst>
+                              <p:cond delay="0"/>
+                            </p:stCondLst>
+                            <p:childTnLst>
+                              <p:par>
+                                <p:cTn id="15" presetID="2" presetClass="entr" presetSubtype="4" fill="hold" grpId="0" nodeType="clickEffect">
+                                  <p:stCondLst>
+                                    <p:cond delay="0"/>
+                                  </p:stCondLst>
+                                  <p:childTnLst>
+                                    <p:set>
+                                      <p:cBhvr>
+                                        <p:cTn id="16" dur="1" fill="hold">
+                                          <p:stCondLst>
+                                            <p:cond delay="0"/>
+                                          </p:stCondLst>
+                                        </p:cTn>
+                                        <p:tgtEl>
+                                          <p:spTgt spid="6"/>
+                                        </p:tgtEl>
+                                        <p:attrNameLst>
+                                          <p:attrName>style.visibility</p:attrName>
+                                        </p:attrNameLst>
+                                      </p:cBhvr>
+                                      <p:to>
+                                        <p:strVal val="visible"/>
+                                      </p:to>
+                                    </p:set>
+                                    <p:anim calcmode="lin" valueType="num">
+                                      <p:cBhvr additive="base">
+                                        <p:cTn id="17" dur="500" fill="hold"/>
+                                        <p:tgtEl>
+                                          <p:spTgt spid="6"/>
+                                        </p:tgtEl>
+                                        <p:attrNameLst>
+                                          <p:attrName>ppt_x</p:attrName>
+                                        </p:attrNameLst>
+                                      </p:cBhvr>
+                                      <p:tavLst>
+                                        <p:tav tm="0">
+                                          <p:val>
+                                            <p:strVal val="#ppt_x"/>
+                                          </p:val>
+                                        </p:tav>
+                                        <p:tav tm="100000">
+                                          <p:val>
+                                            <p:strVal val="#ppt_x"/>
+                                          </p:val>
+                                        </p:tav>
+                                      </p:tavLst>
+                                    </p:anim>
+                                    <p:anim calcmode="lin" valueType="num">
+                                      <p:cBhvr additive="base">
+                                        <p:cTn id="18" dur="500" fill="hold"/>
+                                        <p:tgtEl>
+                                          <p:spTgt spid="6"/>
+                                        </p:tgtEl>
+                                        <p:attrNameLst>
+                                          <p:attrName>ppt_y</p:attrName>
+                                        </p:attrNameLst>
+                                      </p:cBhvr>
+                                      <p:tavLst>
+                                        <p:tav tm="0">
+                                          <p:val>
+                                            <p:strVal val="1+#ppt_h/2"/>
+                                          </p:val>
+                                        </p:tav>
+                                        <p:tav tm="100000">
+                                          <p:val>
+                                            <p:strVal val="#ppt_y"/>
+                                          </p:val>
+                                        </p:tav>
+                                      </p:tavLst>
+                                    </p:anim>
+                                  </p:childTnLst>
+                                </p:cTn>
+                              </p:par>
+                              <p:par>
+                                <p:cTn id="19" presetID="2" presetClass="entr" presetSubtype="4" fill="hold" grpId="0" nodeType="withEffect">
+                                  <p:stCondLst>
+                                    <p:cond delay="0"/>
+                                  </p:stCondLst>
+                                  <p:childTnLst>
+                                    <p:set>
+                                      <p:cBhvr>
+                                        <p:cTn id="20" dur="1" fill="hold">
+                                          <p:stCondLst>
+                                            <p:cond delay="0"/>
+                                          </p:stCondLst>
+                                        </p:cTn>
+                                        <p:tgtEl>
+                                          <p:spTgt spid="17"/>
+                                        </p:tgtEl>
+                                        <p:attrNameLst>
+                                          <p:attrName>style.visibility</p:attrName>
+                                        </p:attrNameLst>
+                                      </p:cBhvr>
+                                      <p:to>
+                                        <p:strVal val="visible"/>
+                                      </p:to>
+                                    </p:set>
+                                    <p:anim calcmode="lin" valueType="num">
+                                      <p:cBhvr additive="base">
+                                        <p:cTn id="21" dur="500" fill="hold"/>
+                                        <p:tgtEl>
+                                          <p:spTgt spid="17"/>
+                                        </p:tgtEl>
+                                        <p:attrNameLst>
+                                          <p:attrName>ppt_x</p:attrName>
+                                        </p:attrNameLst>
+                                      </p:cBhvr>
+                                      <p:tavLst>
+                                        <p:tav tm="0">
+                                          <p:val>
+                                            <p:strVal val="#ppt_x"/>
+                                          </p:val>
+                                        </p:tav>
+                                        <p:tav tm="100000">
+                                          <p:val>
+                                            <p:strVal val="#ppt_x"/>
+                                          </p:val>
+                                        </p:tav>
+                                      </p:tavLst>
+                                    </p:anim>
+                                    <p:anim calcmode="lin" valueType="num">
+                                      <p:cBhvr additive="base">
+                                        <p:cTn id="22" dur="500" fill="hold"/>
+                                        <p:tgtEl>
+                                          <p:spTgt spid="17"/>
+                                        </p:tgtEl>
+                                        <p:attrNameLst>
+                                          <p:attrName>ppt_y</p:attrName>
+                                        </p:attrNameLst>
+                                      </p:cBhvr>
+                                      <p:tavLst>
+                                        <p:tav tm="0">
+                                          <p:val>
+                                            <p:strVal val="1+#ppt_h/2"/>
+                                          </p:val>
+                                        </p:tav>
+                                        <p:tav tm="100000">
+                                          <p:val>
+                                            <p:strVal val="#ppt_y"/>
+                                          </p:val>
+                                        </p:tav>
+                                      </p:tavLst>
+                                    </p:anim>
+                                  </p:childTnLst>
+                                </p:cTn>
+                              </p:par>
+                            </p:childTnLst>
+                          </p:cTn>
+                        </p:par>
+                      </p:childTnLst>
+                    </p:cTn>
+                  </p:par>
+                  <p:par>
+                    <p:cTn id="23" fill="hold">
+                      <p:stCondLst>
+                        <p:cond delay="indefinite"/>
+                      </p:stCondLst>
+                      <p:childTnLst>
+                        <p:par>
+                          <p:cTn id="24" fill="hold">
+                            <p:stCondLst>
+                              <p:cond delay="0"/>
+                            </p:stCondLst>
+                            <p:childTnLst>
+                              <p:par>
+                                <p:cTn id="25" presetID="2" presetClass="entr" presetSubtype="4" fill="hold" grpId="0" nodeType="clickEffect">
+                                  <p:stCondLst>
+                                    <p:cond delay="0"/>
+                                  </p:stCondLst>
+                                  <p:childTnLst>
+                                    <p:set>
+                                      <p:cBhvr>
+                                        <p:cTn id="26" dur="1" fill="hold">
+                                          <p:stCondLst>
+                                            <p:cond delay="0"/>
+                                          </p:stCondLst>
+                                        </p:cTn>
+                                        <p:tgtEl>
+                                          <p:spTgt spid="9"/>
+                                        </p:tgtEl>
+                                        <p:attrNameLst>
+                                          <p:attrName>style.visibility</p:attrName>
+                                        </p:attrNameLst>
+                                      </p:cBhvr>
+                                      <p:to>
+                                        <p:strVal val="visible"/>
+                                      </p:to>
+                                    </p:set>
+                                    <p:anim calcmode="lin" valueType="num">
+                                      <p:cBhvr additive="base">
+                                        <p:cTn id="27" dur="500" fill="hold"/>
+                                        <p:tgtEl>
+                                          <p:spTgt spid="9"/>
+                                        </p:tgtEl>
+                                        <p:attrNameLst>
+                                          <p:attrName>ppt_x</p:attrName>
+                                        </p:attrNameLst>
+                                      </p:cBhvr>
+                                      <p:tavLst>
+                                        <p:tav tm="0">
+                                          <p:val>
+                                            <p:strVal val="#ppt_x"/>
+                                          </p:val>
+                                        </p:tav>
+                                        <p:tav tm="100000">
+                                          <p:val>
+                                            <p:strVal val="#ppt_x"/>
+                                          </p:val>
+                                        </p:tav>
+                                      </p:tavLst>
+                                    </p:anim>
+                                    <p:anim calcmode="lin" valueType="num">
+                                      <p:cBhvr additive="base">
+                                        <p:cTn id="28" dur="500" fill="hold"/>
+                                        <p:tgtEl>
+                                          <p:spTgt spid="9"/>
+                                        </p:tgtEl>
+                                        <p:attrNameLst>
+                                          <p:attrName>ppt_y</p:attrName>
+                                        </p:attrNameLst>
+                                      </p:cBhvr>
+                                      <p:tavLst>
+                                        <p:tav tm="0">
+                                          <p:val>
+                                            <p:strVal val="1+#ppt_h/2"/>
+                                          </p:val>
+                                        </p:tav>
+                                        <p:tav tm="100000">
+                                          <p:val>
+                                            <p:strVal val="#ppt_y"/>
+                                          </p:val>
+                                        </p:tav>
+                                      </p:tavLst>
+                                    </p:anim>
+                                  </p:childTnLst>
+                                </p:cTn>
+                              </p:par>
+                              <p:par>
+                                <p:cTn id="29" presetID="2" presetClass="entr" presetSubtype="4" fill="hold" grpId="0" nodeType="withEffect">
+                                  <p:stCondLst>
+                                    <p:cond delay="0"/>
+                                  </p:stCondLst>
+                                  <p:childTnLst>
+                                    <p:set>
+                                      <p:cBhvr>
+                                        <p:cTn id="30" dur="1" fill="hold">
+                                          <p:stCondLst>
+                                            <p:cond delay="0"/>
+                                          </p:stCondLst>
+                                        </p:cTn>
+                                        <p:tgtEl>
+                                          <p:spTgt spid="16"/>
+                                        </p:tgtEl>
+                                        <p:attrNameLst>
+                                          <p:attrName>style.visibility</p:attrName>
+                                        </p:attrNameLst>
+                                      </p:cBhvr>
+                                      <p:to>
+                                        <p:strVal val="visible"/>
+                                      </p:to>
+                                    </p:set>
+                                    <p:anim calcmode="lin" valueType="num">
+                                      <p:cBhvr additive="base">
+                                        <p:cTn id="31" dur="500" fill="hold"/>
+                                        <p:tgtEl>
+                                          <p:spTgt spid="16"/>
+                                        </p:tgtEl>
+                                        <p:attrNameLst>
+                                          <p:attrName>ppt_x</p:attrName>
+                                        </p:attrNameLst>
+                                      </p:cBhvr>
+                                      <p:tavLst>
+                                        <p:tav tm="0">
+                                          <p:val>
+                                            <p:strVal val="#ppt_x"/>
+                                          </p:val>
+                                        </p:tav>
+                                        <p:tav tm="100000">
+                                          <p:val>
+                                            <p:strVal val="#ppt_x"/>
+                                          </p:val>
+                                        </p:tav>
+                                      </p:tavLst>
+                                    </p:anim>
+                                    <p:anim calcmode="lin" valueType="num">
+                                      <p:cBhvr additive="base">
+                                        <p:cTn id="32" dur="500" fill="hold"/>
+                                        <p:tgtEl>
+                                          <p:spTgt spid="16"/>
+                                        </p:tgtEl>
+                                        <p:attrNameLst>
+                                          <p:attrName>ppt_y</p:attrName>
+                                        </p:attrNameLst>
+                                      </p:cBhvr>
+                                      <p:tavLst>
+                                        <p:tav tm="0">
+                                          <p:val>
+                                            <p:strVal val="1+#ppt_h/2"/>
+                                          </p:val>
+                                        </p:tav>
+                                        <p:tav tm="100000">
+                                          <p:val>
+                                            <p:strVal val="#ppt_y"/>
+                                          </p:val>
+                                        </p:tav>
+                                      </p:tavLst>
+                                    </p:anim>
+                                  </p:childTnLst>
+                                </p:cTn>
+                              </p:par>
+                            </p:childTnLst>
+                          </p:cTn>
+                        </p:par>
+                      </p:childTnLst>
+                    </p:cTn>
+                  </p:par>
+                </p:childTnLst>
+              </p:cTn>
+              <p:prevCondLst>
+                <p:cond evt="onPrev" delay="0">
+                  <p:tgtEl>
+                    <p:sldTgt/>
+                  </p:tgtEl>
+                </p:cond>
+              </p:prevCondLst>
+              <p:nextCondLst>
+                <p:cond evt="onNext" delay="0">
+                  <p:tgtEl>
+                    <p:sldTgt/>
+                  </p:tgtEl>
+                </p:cond>
+              </p:nextCondLst>
+            </p:seq>
+          </p:childTnLst>
+        </p:cTn>
+      </p:par>
+    </p:tnLst>
+    <p:bldLst>
+      <p:bldP spid="4" grpId="0" animBg="1"/>
+      <p:bldP spid="6" grpId="0" animBg="1"/>
+      <p:bldP spid="9" grpId="0" animBg="1"/>
+      <p:bldP spid="16" grpId="0" animBg="1"/>
+      <p:bldP spid="17" grpId="0" animBg="1"/>
+    </p:bldLst>
+  </p:timing>
+</p:sld>
+</file>
+
+<file path=ppt/slides/slide23.xml><?xml version="1.0" encoding="utf-8"?>
+<p:sld xmlns:a="http://schemas.openxmlformats.org/drawingml/2006/main" xmlns:r="http://schemas.openxmlformats.org/officeDocument/2006/relationships" xmlns:p="http://schemas.openxmlformats.org/presentationml/2006/main">
+  <p:cSld>
+    <p:spTree>
+      <p:nvGrpSpPr>
+        <p:cNvPr id="1" name=""/>
+        <p:cNvGrpSpPr/>
+        <p:nvPr/>
+      </p:nvGrpSpPr>
+      <p:grpSpPr>
+        <a:xfrm>
+          <a:off x="0" y="0"/>
+          <a:ext cx="0" cy="0"/>
+          <a:chOff x="0" y="0"/>
+          <a:chExt cx="0" cy="0"/>
+        </a:xfrm>
+      </p:grpSpPr>
+      <p:sp>
+        <p:nvSpPr>
           <p:cNvPr id="3075" name="Rectangle 2"/>
           <p:cNvSpPr>
             <a:spLocks noGrp="1" noChangeArrowheads="1"/>
@@ -20270,13 +22427,25 @@
                   <a:srgbClr val="FF0000"/>
                 </a:solidFill>
               </a:rPr>
-              <a:t>Product </a:t>
+              <a:t> </a:t>
             </a:r>
             <a:r>
               <a:rPr lang="en-IE" dirty="0"/>
-              <a:t>primitive array</a:t>
-            </a:r>
-            <a:endParaRPr lang="en-GB" dirty="0"/>
+              <a:t>primitive array of </a:t>
+            </a:r>
+            <a:r>
+              <a:rPr lang="en-IE" b="1" dirty="0">
+                <a:solidFill>
+                  <a:srgbClr val="FF0000"/>
+                </a:solidFill>
+              </a:rPr>
+              <a:t>Person</a:t>
+            </a:r>
+            <a:endParaRPr lang="en-GB" b="1" dirty="0">
+              <a:solidFill>
+                <a:srgbClr val="FF0000"/>
+              </a:solidFill>
+            </a:endParaRPr>
           </a:p>
         </p:txBody>
       </p:sp>
@@ -20295,7 +22464,7 @@
         <p:spPr>
           <a:xfrm>
             <a:off x="2057401" y="1713934"/>
-            <a:ext cx="3160737" cy="523220"/>
+            <a:ext cx="2737737" cy="523220"/>
           </a:xfrm>
           <a:prstGeom prst="rect">
             <a:avLst/>
@@ -20323,7 +22492,7 @@
           <a:p>
             <a:r>
               <a:rPr lang="en-GB" sz="2800" b="1" dirty="0"/>
-              <a:t>Product[]  products;</a:t>
+              <a:t>Person[]  friends;</a:t>
             </a:r>
           </a:p>
         </p:txBody>
@@ -20531,7 +22700,7 @@
               <a:rPr lang="en-GB" sz="2800" dirty="0">
                 <a:latin typeface="Courier New" pitchFamily="-32" charset="0"/>
               </a:rPr>
-              <a:t>products</a:t>
+              <a:t>friends</a:t>
             </a:r>
           </a:p>
         </p:txBody>
@@ -20764,7 +22933,7 @@
 </p:sld>
 </file>
 
-<file path=ppt/slides/slide23.xml><?xml version="1.0" encoding="utf-8"?>
+<file path=ppt/slides/slide24.xml><?xml version="1.0" encoding="utf-8"?>
 <p:sld xmlns:a="http://schemas.openxmlformats.org/drawingml/2006/main" xmlns:r="http://schemas.openxmlformats.org/officeDocument/2006/relationships" xmlns:p="http://schemas.openxmlformats.org/presentationml/2006/main">
   <p:cSld>
     <p:spTree>
@@ -20816,60 +22985,6 @@
               <a:t>primitive array</a:t>
             </a:r>
             <a:endParaRPr lang="en-GB" dirty="0"/>
-          </a:p>
-        </p:txBody>
-      </p:sp>
-      <p:sp>
-        <p:nvSpPr>
-          <p:cNvPr id="2" name="Rectangle 1">
-            <a:extLst>
-              <a:ext uri="{FF2B5EF4-FFF2-40B4-BE49-F238E27FC236}">
-                <a16:creationId xmlns:a16="http://schemas.microsoft.com/office/drawing/2014/main" id="{35F7EA93-B44B-4A4E-9E6B-B94903E49E4C}"/>
-              </a:ext>
-            </a:extLst>
-          </p:cNvPr>
-          <p:cNvSpPr/>
-          <p:nvPr/>
-        </p:nvSpPr>
-        <p:spPr>
-          <a:xfrm>
-            <a:off x="2057400" y="1713934"/>
-            <a:ext cx="3078984" cy="523220"/>
-          </a:xfrm>
-          <a:prstGeom prst="rect">
-            <a:avLst/>
-          </a:prstGeom>
-        </p:spPr>
-        <p:style>
-          <a:lnRef idx="1">
-            <a:schemeClr val="accent6"/>
-          </a:lnRef>
-          <a:fillRef idx="2">
-            <a:schemeClr val="accent6"/>
-          </a:fillRef>
-          <a:effectRef idx="1">
-            <a:schemeClr val="accent6"/>
-          </a:effectRef>
-          <a:fontRef idx="minor">
-            <a:schemeClr val="dk1"/>
-          </a:fontRef>
-        </p:style>
-        <p:txBody>
-          <a:bodyPr wrap="none">
-            <a:spAutoFit/>
-          </a:bodyPr>
-          <a:lstStyle/>
-          <a:p>
-            <a:r>
-              <a:rPr lang="en-GB" sz="2800" b="1" dirty="0">
-                <a:solidFill>
-                  <a:schemeClr val="bg1">
-                    <a:lumMod val="65000"/>
-                  </a:schemeClr>
-                </a:solidFill>
-              </a:rPr>
-              <a:t>Product[] products;</a:t>
-            </a:r>
           </a:p>
         </p:txBody>
       </p:sp>
@@ -21076,7 +23191,7 @@
               <a:rPr lang="en-GB" sz="2800" dirty="0">
                 <a:latin typeface="Courier New" pitchFamily="-32" charset="0"/>
               </a:rPr>
-              <a:t>products</a:t>
+              <a:t>friends</a:t>
             </a:r>
           </a:p>
         </p:txBody>
@@ -21473,7 +23588,7 @@
         <p:spPr>
           <a:xfrm>
             <a:off x="1862692" y="2667001"/>
-            <a:ext cx="3657348" cy="461665"/>
+            <a:ext cx="3297121" cy="461665"/>
           </a:xfrm>
           <a:prstGeom prst="rect">
             <a:avLst/>
@@ -21501,7 +23616,7 @@
           <a:p>
             <a:r>
               <a:rPr lang="en-GB" sz="2400" b="1" dirty="0"/>
-              <a:t>products = new Product[4];</a:t>
+              <a:t>friends = new Person[4];</a:t>
             </a:r>
             <a:endParaRPr lang="en-IE" sz="2400" b="1" dirty="0"/>
           </a:p>
@@ -21558,6 +23673,60 @@
                 <a:schemeClr val="tx1"/>
               </a:solidFill>
             </a:endParaRPr>
+          </a:p>
+        </p:txBody>
+      </p:sp>
+      <p:sp>
+        <p:nvSpPr>
+          <p:cNvPr id="4" name="Rectangle 3">
+            <a:extLst>
+              <a:ext uri="{FF2B5EF4-FFF2-40B4-BE49-F238E27FC236}">
+                <a16:creationId xmlns:a16="http://schemas.microsoft.com/office/drawing/2014/main" id="{7C93BE65-F045-FAA3-84B2-6B53E3585656}"/>
+              </a:ext>
+            </a:extLst>
+          </p:cNvPr>
+          <p:cNvSpPr/>
+          <p:nvPr/>
+        </p:nvSpPr>
+        <p:spPr>
+          <a:xfrm>
+            <a:off x="2057400" y="1713934"/>
+            <a:ext cx="2655983" cy="523220"/>
+          </a:xfrm>
+          <a:prstGeom prst="rect">
+            <a:avLst/>
+          </a:prstGeom>
+        </p:spPr>
+        <p:style>
+          <a:lnRef idx="1">
+            <a:schemeClr val="accent6"/>
+          </a:lnRef>
+          <a:fillRef idx="2">
+            <a:schemeClr val="accent6"/>
+          </a:fillRef>
+          <a:effectRef idx="1">
+            <a:schemeClr val="accent6"/>
+          </a:effectRef>
+          <a:fontRef idx="minor">
+            <a:schemeClr val="dk1"/>
+          </a:fontRef>
+        </p:style>
+        <p:txBody>
+          <a:bodyPr wrap="none">
+            <a:spAutoFit/>
+          </a:bodyPr>
+          <a:lstStyle/>
+          <a:p>
+            <a:r>
+              <a:rPr lang="en-GB" sz="2800" b="1" dirty="0">
+                <a:solidFill>
+                  <a:schemeClr val="bg1">
+                    <a:lumMod val="65000"/>
+                  </a:schemeClr>
+                </a:solidFill>
+              </a:rPr>
+              <a:t>Person[] friends;</a:t>
+            </a:r>
           </a:p>
         </p:txBody>
       </p:sp>
@@ -21663,7 +23832,7 @@
 </p:sld>
 </file>
 
-<file path=ppt/slides/slide24.xml><?xml version="1.0" encoding="utf-8"?>
+<file path=ppt/slides/slide25.xml><?xml version="1.0" encoding="utf-8"?>
 <p:sld xmlns:a="http://schemas.openxmlformats.org/drawingml/2006/main" xmlns:r="http://schemas.openxmlformats.org/officeDocument/2006/relationships" xmlns:p="http://schemas.openxmlformats.org/presentationml/2006/main">
   <p:cSld>
     <p:spTree>
@@ -22149,50 +24318,6 @@
           </a:fontRef>
         </p:style>
       </p:cxnSp>
-      <p:sp>
-        <p:nvSpPr>
-          <p:cNvPr id="16" name="Rectangle: Rounded Corners 15">
-            <a:extLst>
-              <a:ext uri="{FF2B5EF4-FFF2-40B4-BE49-F238E27FC236}">
-                <a16:creationId xmlns:a16="http://schemas.microsoft.com/office/drawing/2014/main" id="{5E4BB50E-498C-408C-8BB5-F3FD1F203054}"/>
-              </a:ext>
-            </a:extLst>
-          </p:cNvPr>
-          <p:cNvSpPr/>
-          <p:nvPr/>
-        </p:nvSpPr>
-        <p:spPr>
-          <a:xfrm>
-            <a:off x="8115301" y="1665002"/>
-            <a:ext cx="2400302" cy="2362200"/>
-          </a:xfrm>
-          <a:prstGeom prst="roundRect">
-            <a:avLst/>
-          </a:prstGeom>
-        </p:spPr>
-        <p:style>
-          <a:lnRef idx="1">
-            <a:schemeClr val="accent2"/>
-          </a:lnRef>
-          <a:fillRef idx="2">
-            <a:schemeClr val="accent2"/>
-          </a:fillRef>
-          <a:effectRef idx="1">
-            <a:schemeClr val="accent2"/>
-          </a:effectRef>
-          <a:fontRef idx="minor">
-            <a:schemeClr val="dk1"/>
-          </a:fontRef>
-        </p:style>
-        <p:txBody>
-          <a:bodyPr rtlCol="0" anchor="ctr"/>
-          <a:lstStyle/>
-          <a:p>
-            <a:pPr algn="ctr"/>
-            <a:endParaRPr lang="en-IE" sz="2400" dirty="0"/>
-          </a:p>
-        </p:txBody>
-      </p:sp>
       <p:cxnSp>
         <p:nvCxnSpPr>
           <p:cNvPr id="19" name="Straight Arrow Connector 18">
@@ -22204,7 +24329,6 @@
           </p:cNvPr>
           <p:cNvCxnSpPr>
             <a:cxnSpLocks/>
-            <a:endCxn id="16" idx="1"/>
           </p:cNvCxnSpPr>
           <p:nvPr/>
         </p:nvCxnSpPr>
@@ -22237,104 +24361,6 @@
       </p:cxnSp>
       <p:sp>
         <p:nvSpPr>
-          <p:cNvPr id="6" name="Rectangle 5">
-            <a:extLst>
-              <a:ext uri="{FF2B5EF4-FFF2-40B4-BE49-F238E27FC236}">
-                <a16:creationId xmlns:a16="http://schemas.microsoft.com/office/drawing/2014/main" id="{A4421415-A837-43D5-A794-3FBB984DD20A}"/>
-              </a:ext>
-            </a:extLst>
-          </p:cNvPr>
-          <p:cNvSpPr/>
-          <p:nvPr/>
-        </p:nvSpPr>
-        <p:spPr>
-          <a:xfrm>
-            <a:off x="8261963" y="1948140"/>
-            <a:ext cx="1219200" cy="289014"/>
-          </a:xfrm>
-          <a:prstGeom prst="rect">
-            <a:avLst/>
-          </a:prstGeom>
-        </p:spPr>
-        <p:style>
-          <a:lnRef idx="2">
-            <a:schemeClr val="accent1">
-              <a:shade val="50000"/>
-            </a:schemeClr>
-          </a:lnRef>
-          <a:fillRef idx="1">
-            <a:schemeClr val="accent1"/>
-          </a:fillRef>
-          <a:effectRef idx="0">
-            <a:schemeClr val="accent1"/>
-          </a:effectRef>
-          <a:fontRef idx="minor">
-            <a:schemeClr val="lt1"/>
-          </a:fontRef>
-        </p:style>
-        <p:txBody>
-          <a:bodyPr rtlCol="0" anchor="ctr"/>
-          <a:lstStyle/>
-          <a:p>
-            <a:pPr algn="ctr"/>
-            <a:r>
-              <a:rPr lang="en-IE" sz="1400" b="1" dirty="0" err="1"/>
-              <a:t>productName</a:t>
-            </a:r>
-            <a:endParaRPr lang="en-IE" sz="1400" b="1" dirty="0"/>
-          </a:p>
-        </p:txBody>
-      </p:sp>
-      <p:sp>
-        <p:nvSpPr>
-          <p:cNvPr id="7" name="TextBox 6">
-            <a:extLst>
-              <a:ext uri="{FF2B5EF4-FFF2-40B4-BE49-F238E27FC236}">
-                <a16:creationId xmlns:a16="http://schemas.microsoft.com/office/drawing/2014/main" id="{38402807-3480-4C80-98A9-9CA8876A967C}"/>
-              </a:ext>
-            </a:extLst>
-          </p:cNvPr>
-          <p:cNvSpPr txBox="1"/>
-          <p:nvPr/>
-        </p:nvSpPr>
-        <p:spPr>
-          <a:xfrm>
-            <a:off x="9693441" y="1911682"/>
-            <a:ext cx="588551" cy="338554"/>
-          </a:xfrm>
-          <a:prstGeom prst="rect">
-            <a:avLst/>
-          </a:prstGeom>
-        </p:spPr>
-        <p:style>
-          <a:lnRef idx="2">
-            <a:schemeClr val="accent1"/>
-          </a:lnRef>
-          <a:fillRef idx="1">
-            <a:schemeClr val="lt1"/>
-          </a:fillRef>
-          <a:effectRef idx="0">
-            <a:schemeClr val="accent1"/>
-          </a:effectRef>
-          <a:fontRef idx="minor">
-            <a:schemeClr val="dk1"/>
-          </a:fontRef>
-        </p:style>
-        <p:txBody>
-          <a:bodyPr wrap="square" rtlCol="0">
-            <a:spAutoFit/>
-          </a:bodyPr>
-          <a:lstStyle/>
-          <a:p>
-            <a:r>
-              <a:rPr lang="en-IE" sz="1600" dirty="0"/>
-              <a:t>“TV”</a:t>
-            </a:r>
-          </a:p>
-        </p:txBody>
-      </p:sp>
-      <p:sp>
-        <p:nvSpPr>
           <p:cNvPr id="25" name="Rectangle 24">
             <a:extLst>
               <a:ext uri="{FF2B5EF4-FFF2-40B4-BE49-F238E27FC236}">
@@ -22348,7 +24374,7 @@
         <p:spPr>
           <a:xfrm>
             <a:off x="1752601" y="5562600"/>
-            <a:ext cx="7850675" cy="523220"/>
+            <a:ext cx="7468776" cy="523220"/>
           </a:xfrm>
           <a:prstGeom prst="rect">
             <a:avLst/>
@@ -22399,7 +24425,15 @@
           <a:p>
             <a:r>
               <a:rPr lang="en-GB" sz="2800" b="1" dirty="0"/>
-              <a:t>products[1] =  new Product(“TV”, 123, 12.99, true);</a:t>
+              <a:t>friends[1] =  new Person(“Joey”, “</a:t>
+            </a:r>
+            <a:r>
+              <a:rPr lang="en-GB" sz="2800" b="1" dirty="0" err="1"/>
+              <a:t>Tribbiani</a:t>
+            </a:r>
+            <a:r>
+              <a:rPr lang="en-GB" sz="2800" b="1" dirty="0"/>
+              <a:t>”, 25,);</a:t>
             </a:r>
             <a:endParaRPr lang="en-IE" sz="2800" b="1" dirty="0"/>
           </a:p>
@@ -22414,7 +24448,7 @@
         <p:spPr>
           <a:xfrm>
             <a:off x="1523999" y="5467350"/>
-            <a:ext cx="8229600" cy="823586"/>
+            <a:ext cx="7697363" cy="823586"/>
           </a:xfrm>
           <a:prstGeom prst="donut">
             <a:avLst>
@@ -22474,7 +24508,7 @@
         <p:spPr>
           <a:xfrm>
             <a:off x="2057400" y="1713934"/>
-            <a:ext cx="3078984" cy="523220"/>
+            <a:ext cx="2655983" cy="523220"/>
           </a:xfrm>
           <a:prstGeom prst="rect">
             <a:avLst/>
@@ -22508,7 +24542,7 @@
                   </a:schemeClr>
                 </a:solidFill>
               </a:rPr>
-              <a:t>Product[] products;</a:t>
+              <a:t>Person[] friends;</a:t>
             </a:r>
           </a:p>
         </p:txBody>
@@ -22528,7 +24562,7 @@
         <p:spPr>
           <a:xfrm>
             <a:off x="1862692" y="2667001"/>
-            <a:ext cx="3657348" cy="461665"/>
+            <a:ext cx="3297121" cy="461665"/>
           </a:xfrm>
           <a:prstGeom prst="rect">
             <a:avLst/>
@@ -22562,7 +24596,7 @@
                   </a:schemeClr>
                 </a:solidFill>
               </a:rPr>
-              <a:t>products = new Product[4];</a:t>
+              <a:t>friends = new Person[4];</a:t>
             </a:r>
             <a:endParaRPr lang="en-IE" sz="2400" b="1" dirty="0">
               <a:solidFill>
@@ -22733,300 +24767,36 @@
           </a:p>
         </p:txBody>
       </p:sp>
-      <p:sp>
-        <p:nvSpPr>
-          <p:cNvPr id="30" name="Rectangle 29">
+      <p:pic>
+        <p:nvPicPr>
+          <p:cNvPr id="2" name="Picture 1">
             <a:extLst>
               <a:ext uri="{FF2B5EF4-FFF2-40B4-BE49-F238E27FC236}">
-                <a16:creationId xmlns:a16="http://schemas.microsoft.com/office/drawing/2014/main" id="{6DD2CC5A-9E2D-440F-A8BD-3BFC4BEBD72A}"/>
+                <a16:creationId xmlns:a16="http://schemas.microsoft.com/office/drawing/2014/main" id="{494130A1-57F5-2F06-2E5B-8C57BA32C4FC}"/>
               </a:ext>
             </a:extLst>
           </p:cNvPr>
-          <p:cNvSpPr/>
+          <p:cNvPicPr>
+            <a:picLocks noChangeAspect="1"/>
+          </p:cNvPicPr>
           <p:nvPr/>
-        </p:nvSpPr>
+        </p:nvPicPr>
+        <p:blipFill>
+          <a:blip r:embed="rId3"/>
+          <a:stretch>
+            <a:fillRect/>
+          </a:stretch>
+        </p:blipFill>
         <p:spPr>
           <a:xfrm>
-            <a:off x="8229600" y="2398658"/>
-            <a:ext cx="1219200" cy="289014"/>
+            <a:off x="8295984" y="1581434"/>
+            <a:ext cx="3554766" cy="2247900"/>
           </a:xfrm>
           <a:prstGeom prst="rect">
             <a:avLst/>
           </a:prstGeom>
         </p:spPr>
-        <p:style>
-          <a:lnRef idx="2">
-            <a:schemeClr val="accent1">
-              <a:shade val="50000"/>
-            </a:schemeClr>
-          </a:lnRef>
-          <a:fillRef idx="1">
-            <a:schemeClr val="accent1"/>
-          </a:fillRef>
-          <a:effectRef idx="0">
-            <a:schemeClr val="accent1"/>
-          </a:effectRef>
-          <a:fontRef idx="minor">
-            <a:schemeClr val="lt1"/>
-          </a:fontRef>
-        </p:style>
-        <p:txBody>
-          <a:bodyPr rtlCol="0" anchor="ctr"/>
-          <a:lstStyle/>
-          <a:p>
-            <a:pPr algn="ctr"/>
-            <a:r>
-              <a:rPr lang="en-IE" sz="1400" b="1" dirty="0" err="1"/>
-              <a:t>productCode</a:t>
-            </a:r>
-            <a:endParaRPr lang="en-IE" sz="1400" b="1" dirty="0"/>
-          </a:p>
-        </p:txBody>
-      </p:sp>
-      <p:sp>
-        <p:nvSpPr>
-          <p:cNvPr id="31" name="TextBox 30">
-            <a:extLst>
-              <a:ext uri="{FF2B5EF4-FFF2-40B4-BE49-F238E27FC236}">
-                <a16:creationId xmlns:a16="http://schemas.microsoft.com/office/drawing/2014/main" id="{20E34246-716F-420B-8073-C35F36698815}"/>
-              </a:ext>
-            </a:extLst>
-          </p:cNvPr>
-          <p:cNvSpPr txBox="1"/>
-          <p:nvPr/>
-        </p:nvSpPr>
-        <p:spPr>
-          <a:xfrm>
-            <a:off x="9661077" y="2362200"/>
-            <a:ext cx="666750" cy="338554"/>
-          </a:xfrm>
-          <a:prstGeom prst="rect">
-            <a:avLst/>
-          </a:prstGeom>
-        </p:spPr>
-        <p:style>
-          <a:lnRef idx="2">
-            <a:schemeClr val="accent1"/>
-          </a:lnRef>
-          <a:fillRef idx="1">
-            <a:schemeClr val="lt1"/>
-          </a:fillRef>
-          <a:effectRef idx="0">
-            <a:schemeClr val="accent1"/>
-          </a:effectRef>
-          <a:fontRef idx="minor">
-            <a:schemeClr val="dk1"/>
-          </a:fontRef>
-        </p:style>
-        <p:txBody>
-          <a:bodyPr wrap="square" rtlCol="0">
-            <a:spAutoFit/>
-          </a:bodyPr>
-          <a:lstStyle/>
-          <a:p>
-            <a:r>
-              <a:rPr lang="en-IE" sz="1600" dirty="0"/>
-              <a:t>123</a:t>
-            </a:r>
-          </a:p>
-        </p:txBody>
-      </p:sp>
-      <p:sp>
-        <p:nvSpPr>
-          <p:cNvPr id="32" name="Rectangle 31">
-            <a:extLst>
-              <a:ext uri="{FF2B5EF4-FFF2-40B4-BE49-F238E27FC236}">
-                <a16:creationId xmlns:a16="http://schemas.microsoft.com/office/drawing/2014/main" id="{8EBA3F1A-7FE7-4A91-B6BF-32970F8CDC86}"/>
-              </a:ext>
-            </a:extLst>
-          </p:cNvPr>
-          <p:cNvSpPr/>
-          <p:nvPr/>
-        </p:nvSpPr>
-        <p:spPr>
-          <a:xfrm>
-            <a:off x="8229600" y="2822104"/>
-            <a:ext cx="1219200" cy="289014"/>
-          </a:xfrm>
-          <a:prstGeom prst="rect">
-            <a:avLst/>
-          </a:prstGeom>
-        </p:spPr>
-        <p:style>
-          <a:lnRef idx="2">
-            <a:schemeClr val="accent1">
-              <a:shade val="50000"/>
-            </a:schemeClr>
-          </a:lnRef>
-          <a:fillRef idx="1">
-            <a:schemeClr val="accent1"/>
-          </a:fillRef>
-          <a:effectRef idx="0">
-            <a:schemeClr val="accent1"/>
-          </a:effectRef>
-          <a:fontRef idx="minor">
-            <a:schemeClr val="lt1"/>
-          </a:fontRef>
-        </p:style>
-        <p:txBody>
-          <a:bodyPr rtlCol="0" anchor="ctr"/>
-          <a:lstStyle/>
-          <a:p>
-            <a:pPr algn="ctr"/>
-            <a:r>
-              <a:rPr lang="en-IE" sz="1400" b="1" dirty="0" err="1"/>
-              <a:t>unitCost</a:t>
-            </a:r>
-            <a:endParaRPr lang="en-IE" sz="1400" b="1" dirty="0"/>
-          </a:p>
-        </p:txBody>
-      </p:sp>
-      <p:sp>
-        <p:nvSpPr>
-          <p:cNvPr id="33" name="TextBox 32">
-            <a:extLst>
-              <a:ext uri="{FF2B5EF4-FFF2-40B4-BE49-F238E27FC236}">
-                <a16:creationId xmlns:a16="http://schemas.microsoft.com/office/drawing/2014/main" id="{192B87EE-CDD6-4067-AF4C-6ECC77027AAE}"/>
-              </a:ext>
-            </a:extLst>
-          </p:cNvPr>
-          <p:cNvSpPr txBox="1"/>
-          <p:nvPr/>
-        </p:nvSpPr>
-        <p:spPr>
-          <a:xfrm>
-            <a:off x="9661077" y="2785646"/>
-            <a:ext cx="666750" cy="338554"/>
-          </a:xfrm>
-          <a:prstGeom prst="rect">
-            <a:avLst/>
-          </a:prstGeom>
-        </p:spPr>
-        <p:style>
-          <a:lnRef idx="2">
-            <a:schemeClr val="accent1"/>
-          </a:lnRef>
-          <a:fillRef idx="1">
-            <a:schemeClr val="lt1"/>
-          </a:fillRef>
-          <a:effectRef idx="0">
-            <a:schemeClr val="accent1"/>
-          </a:effectRef>
-          <a:fontRef idx="minor">
-            <a:schemeClr val="dk1"/>
-          </a:fontRef>
-        </p:style>
-        <p:txBody>
-          <a:bodyPr wrap="square" rtlCol="0">
-            <a:spAutoFit/>
-          </a:bodyPr>
-          <a:lstStyle/>
-          <a:p>
-            <a:r>
-              <a:rPr lang="en-IE" sz="1600" dirty="0"/>
-              <a:t>12.99</a:t>
-            </a:r>
-          </a:p>
-        </p:txBody>
-      </p:sp>
-      <p:sp>
-        <p:nvSpPr>
-          <p:cNvPr id="34" name="Rectangle 33">
-            <a:extLst>
-              <a:ext uri="{FF2B5EF4-FFF2-40B4-BE49-F238E27FC236}">
-                <a16:creationId xmlns:a16="http://schemas.microsoft.com/office/drawing/2014/main" id="{333C7491-A235-4F39-9B44-03668014CD0C}"/>
-              </a:ext>
-            </a:extLst>
-          </p:cNvPr>
-          <p:cNvSpPr/>
-          <p:nvPr/>
-        </p:nvSpPr>
-        <p:spPr>
-          <a:xfrm>
-            <a:off x="8233936" y="3242847"/>
-            <a:ext cx="1219200" cy="467579"/>
-          </a:xfrm>
-          <a:prstGeom prst="rect">
-            <a:avLst/>
-          </a:prstGeom>
-        </p:spPr>
-        <p:style>
-          <a:lnRef idx="2">
-            <a:schemeClr val="accent1">
-              <a:shade val="50000"/>
-            </a:schemeClr>
-          </a:lnRef>
-          <a:fillRef idx="1">
-            <a:schemeClr val="accent1"/>
-          </a:fillRef>
-          <a:effectRef idx="0">
-            <a:schemeClr val="accent1"/>
-          </a:effectRef>
-          <a:fontRef idx="minor">
-            <a:schemeClr val="lt1"/>
-          </a:fontRef>
-        </p:style>
-        <p:txBody>
-          <a:bodyPr rtlCol="0" anchor="ctr"/>
-          <a:lstStyle/>
-          <a:p>
-            <a:pPr algn="ctr"/>
-            <a:r>
-              <a:rPr lang="en-IE" sz="1400" b="1" dirty="0" err="1"/>
-              <a:t>inCurrentProductLine</a:t>
-            </a:r>
-            <a:endParaRPr lang="en-IE" sz="1400" b="1" dirty="0"/>
-          </a:p>
-        </p:txBody>
-      </p:sp>
-      <p:sp>
-        <p:nvSpPr>
-          <p:cNvPr id="35" name="TextBox 34">
-            <a:extLst>
-              <a:ext uri="{FF2B5EF4-FFF2-40B4-BE49-F238E27FC236}">
-                <a16:creationId xmlns:a16="http://schemas.microsoft.com/office/drawing/2014/main" id="{972BC190-CD28-4CA7-BDD3-0AD482A389E9}"/>
-              </a:ext>
-            </a:extLst>
-          </p:cNvPr>
-          <p:cNvSpPr txBox="1"/>
-          <p:nvPr/>
-        </p:nvSpPr>
-        <p:spPr>
-          <a:xfrm>
-            <a:off x="9615241" y="3270586"/>
-            <a:ext cx="666750" cy="338554"/>
-          </a:xfrm>
-          <a:prstGeom prst="rect">
-            <a:avLst/>
-          </a:prstGeom>
-        </p:spPr>
-        <p:style>
-          <a:lnRef idx="2">
-            <a:schemeClr val="accent1"/>
-          </a:lnRef>
-          <a:fillRef idx="1">
-            <a:schemeClr val="lt1"/>
-          </a:fillRef>
-          <a:effectRef idx="0">
-            <a:schemeClr val="accent1"/>
-          </a:effectRef>
-          <a:fontRef idx="minor">
-            <a:schemeClr val="dk1"/>
-          </a:fontRef>
-        </p:style>
-        <p:txBody>
-          <a:bodyPr wrap="square" rtlCol="0">
-            <a:spAutoFit/>
-          </a:bodyPr>
-          <a:lstStyle/>
-          <a:p>
-            <a:r>
-              <a:rPr lang="en-IE" sz="1600" dirty="0"/>
-              <a:t>true</a:t>
-            </a:r>
-          </a:p>
-        </p:txBody>
-      </p:sp>
+      </p:pic>
     </p:spTree>
     <p:extLst>
       <p:ext uri="{BB962C8B-B14F-4D97-AF65-F5344CB8AC3E}">
@@ -23101,6 +24871,170 @@
                       </p:childTnLst>
                     </p:cTn>
                   </p:par>
+                  <p:par>
+                    <p:cTn id="8" fill="hold">
+                      <p:stCondLst>
+                        <p:cond delay="indefinite"/>
+                      </p:stCondLst>
+                      <p:childTnLst>
+                        <p:par>
+                          <p:cTn id="9" fill="hold">
+                            <p:stCondLst>
+                              <p:cond delay="0"/>
+                            </p:stCondLst>
+                            <p:childTnLst>
+                              <p:par>
+                                <p:cTn id="10" presetID="2" presetClass="entr" presetSubtype="4" fill="hold" nodeType="clickEffect">
+                                  <p:stCondLst>
+                                    <p:cond delay="0"/>
+                                  </p:stCondLst>
+                                  <p:childTnLst>
+                                    <p:set>
+                                      <p:cBhvr>
+                                        <p:cTn id="11" dur="1" fill="hold">
+                                          <p:stCondLst>
+                                            <p:cond delay="0"/>
+                                          </p:stCondLst>
+                                        </p:cTn>
+                                        <p:tgtEl>
+                                          <p:spTgt spid="19"/>
+                                        </p:tgtEl>
+                                        <p:attrNameLst>
+                                          <p:attrName>style.visibility</p:attrName>
+                                        </p:attrNameLst>
+                                      </p:cBhvr>
+                                      <p:to>
+                                        <p:strVal val="visible"/>
+                                      </p:to>
+                                    </p:set>
+                                    <p:anim calcmode="lin" valueType="num">
+                                      <p:cBhvr additive="base">
+                                        <p:cTn id="12" dur="500" fill="hold"/>
+                                        <p:tgtEl>
+                                          <p:spTgt spid="19"/>
+                                        </p:tgtEl>
+                                        <p:attrNameLst>
+                                          <p:attrName>ppt_x</p:attrName>
+                                        </p:attrNameLst>
+                                      </p:cBhvr>
+                                      <p:tavLst>
+                                        <p:tav tm="0">
+                                          <p:val>
+                                            <p:strVal val="#ppt_x"/>
+                                          </p:val>
+                                        </p:tav>
+                                        <p:tav tm="100000">
+                                          <p:val>
+                                            <p:strVal val="#ppt_x"/>
+                                          </p:val>
+                                        </p:tav>
+                                      </p:tavLst>
+                                    </p:anim>
+                                    <p:anim calcmode="lin" valueType="num">
+                                      <p:cBhvr additive="base">
+                                        <p:cTn id="13" dur="500" fill="hold"/>
+                                        <p:tgtEl>
+                                          <p:spTgt spid="19"/>
+                                        </p:tgtEl>
+                                        <p:attrNameLst>
+                                          <p:attrName>ppt_y</p:attrName>
+                                        </p:attrNameLst>
+                                      </p:cBhvr>
+                                      <p:tavLst>
+                                        <p:tav tm="0">
+                                          <p:val>
+                                            <p:strVal val="1+#ppt_h/2"/>
+                                          </p:val>
+                                        </p:tav>
+                                        <p:tav tm="100000">
+                                          <p:val>
+                                            <p:strVal val="#ppt_y"/>
+                                          </p:val>
+                                        </p:tav>
+                                      </p:tavLst>
+                                    </p:anim>
+                                  </p:childTnLst>
+                                </p:cTn>
+                              </p:par>
+                              <p:par>
+                                <p:cTn id="14" presetID="2" presetClass="entr" presetSubtype="4" fill="hold" nodeType="withEffect">
+                                  <p:stCondLst>
+                                    <p:cond delay="0"/>
+                                  </p:stCondLst>
+                                  <p:childTnLst>
+                                    <p:set>
+                                      <p:cBhvr>
+                                        <p:cTn id="15" dur="1" fill="hold">
+                                          <p:stCondLst>
+                                            <p:cond delay="0"/>
+                                          </p:stCondLst>
+                                        </p:cTn>
+                                        <p:tgtEl>
+                                          <p:spTgt spid="2"/>
+                                        </p:tgtEl>
+                                        <p:attrNameLst>
+                                          <p:attrName>style.visibility</p:attrName>
+                                        </p:attrNameLst>
+                                      </p:cBhvr>
+                                      <p:to>
+                                        <p:strVal val="visible"/>
+                                      </p:to>
+                                    </p:set>
+                                    <p:anim calcmode="lin" valueType="num">
+                                      <p:cBhvr additive="base">
+                                        <p:cTn id="16" dur="500" fill="hold"/>
+                                        <p:tgtEl>
+                                          <p:spTgt spid="2"/>
+                                        </p:tgtEl>
+                                        <p:attrNameLst>
+                                          <p:attrName>ppt_x</p:attrName>
+                                        </p:attrNameLst>
+                                      </p:cBhvr>
+                                      <p:tavLst>
+                                        <p:tav tm="0">
+                                          <p:val>
+                                            <p:strVal val="#ppt_x"/>
+                                          </p:val>
+                                        </p:tav>
+                                        <p:tav tm="100000">
+                                          <p:val>
+                                            <p:strVal val="#ppt_x"/>
+                                          </p:val>
+                                        </p:tav>
+                                      </p:tavLst>
+                                    </p:anim>
+                                    <p:anim calcmode="lin" valueType="num">
+                                      <p:cBhvr additive="base">
+                                        <p:cTn id="17" dur="500" fill="hold"/>
+                                        <p:tgtEl>
+                                          <p:spTgt spid="2"/>
+                                        </p:tgtEl>
+                                        <p:attrNameLst>
+                                          <p:attrName>ppt_y</p:attrName>
+                                        </p:attrNameLst>
+                                      </p:cBhvr>
+                                      <p:tavLst>
+                                        <p:tav tm="0">
+                                          <p:val>
+                                            <p:strVal val="1+#ppt_h/2"/>
+                                          </p:val>
+                                        </p:tav>
+                                        <p:tav tm="100000">
+                                          <p:val>
+                                            <p:strVal val="#ppt_y"/>
+                                          </p:val>
+                                        </p:tav>
+                                      </p:tavLst>
+                                    </p:anim>
+                                  </p:childTnLst>
+                                </p:cTn>
+                              </p:par>
+                            </p:childTnLst>
+                          </p:cTn>
+                        </p:par>
+                      </p:childTnLst>
+                    </p:cTn>
+                  </p:par>
                 </p:childTnLst>
               </p:cTn>
               <p:prevCondLst>
@@ -23129,7 +25063,7 @@
 </p:sld>
 </file>
 
-<file path=ppt/slides/slide25.xml><?xml version="1.0" encoding="utf-8"?>
+<file path=ppt/slides/slide26.xml><?xml version="1.0" encoding="utf-8"?>
 <p:sld xmlns:a="http://schemas.openxmlformats.org/drawingml/2006/main" xmlns:r="http://schemas.openxmlformats.org/officeDocument/2006/relationships" xmlns:p="http://schemas.openxmlformats.org/presentationml/2006/main">
   <p:cSld>
     <p:spTree>
@@ -23180,7 +25114,7 @@
                   <a:srgbClr val="FF0000"/>
                 </a:solidFill>
               </a:rPr>
-              <a:t>Product </a:t>
+              <a:t>Person </a:t>
             </a:r>
             <a:r>
               <a:rPr lang="en-IE" dirty="0"/>
@@ -23206,8 +25140,8 @@
         </p:nvSpPr>
         <p:spPr bwMode="auto">
           <a:xfrm>
-            <a:off x="2157473" y="1672860"/>
-            <a:ext cx="8001000" cy="4154984"/>
+            <a:off x="2157473" y="1488195"/>
+            <a:ext cx="8001000" cy="4524315"/>
           </a:xfrm>
           <a:prstGeom prst="rect">
             <a:avLst/>
@@ -23270,7 +25204,16 @@
                 </a:solidFill>
                 <a:latin typeface="JetBrains Mono"/>
               </a:rPr>
-              <a:t>listProducts</a:t>
+              <a:t>list</a:t>
+            </a:r>
+            <a:r>
+              <a:rPr lang="en-029" altLang="en-VI" sz="2400" dirty="0" err="1">
+                <a:solidFill>
+                  <a:srgbClr val="00627A"/>
+                </a:solidFill>
+                <a:latin typeface="JetBrains Mono"/>
+              </a:rPr>
+              <a:t>Friends</a:t>
             </a:r>
             <a:r>
               <a:rPr lang="en-VI" altLang="en-VI" sz="2400" dirty="0">
@@ -23330,7 +25273,16 @@
                 </a:solidFill>
                 <a:latin typeface="JetBrains Mono"/>
               </a:rPr>
-              <a:t>listOfProducts</a:t>
+              <a:t>listOf</a:t>
+            </a:r>
+            <a:r>
+              <a:rPr lang="en-029" altLang="en-VI" sz="2400" dirty="0" err="1">
+                <a:solidFill>
+                  <a:srgbClr val="080808"/>
+                </a:solidFill>
+                <a:latin typeface="JetBrains Mono"/>
+              </a:rPr>
+              <a:t>Friends</a:t>
             </a:r>
             <a:r>
               <a:rPr lang="en-VI" altLang="en-VI" sz="2400" dirty="0">
@@ -23474,13 +25426,13 @@
               <a:t> &lt; </a:t>
             </a:r>
             <a:r>
-              <a:rPr lang="en-GB" altLang="en-VI" sz="2400" dirty="0">
+              <a:rPr lang="en-GB" altLang="en-VI" sz="2400" dirty="0" err="1">
                 <a:solidFill>
                   <a:srgbClr val="871094"/>
                 </a:solidFill>
                 <a:latin typeface="JetBrains Mono"/>
               </a:rPr>
-              <a:t>total</a:t>
+              <a:t>friends.length</a:t>
             </a:r>
             <a:r>
               <a:rPr lang="en-VI" altLang="en-VI" sz="2400" dirty="0">
@@ -23518,34 +25470,16 @@
               </a:rPr>
             </a:br>
             <a:r>
-              <a:rPr lang="en-VI" altLang="en-VI" sz="2400" dirty="0">
+              <a:rPr lang="en-029" altLang="en-VI" sz="2400" dirty="0">
                 <a:solidFill>
                   <a:srgbClr val="080808"/>
                 </a:solidFill>
                 <a:latin typeface="JetBrains Mono"/>
               </a:rPr>
-              <a:t>            </a:t>
-            </a:r>
-            <a:r>
-              <a:rPr lang="en-VI" altLang="en-VI" sz="2400" dirty="0" err="1">
-                <a:solidFill>
-                  <a:srgbClr val="080808"/>
-                </a:solidFill>
-                <a:latin typeface="JetBrains Mono"/>
-              </a:rPr>
-              <a:t>listOfProducts</a:t>
-            </a:r>
-            <a:r>
-              <a:rPr lang="en-VI" altLang="en-VI" sz="2400" dirty="0">
-                <a:solidFill>
-                  <a:srgbClr val="080808"/>
-                </a:solidFill>
-                <a:latin typeface="JetBrains Mono"/>
-              </a:rPr>
-              <a:t> += </a:t>
-            </a:r>
-            <a:r>
-              <a:rPr lang="en-VI" altLang="en-VI" sz="2400" dirty="0" err="1">
+              <a:t>	friends[</a:t>
+            </a:r>
+            <a:r>
+              <a:rPr lang="en-029" altLang="en-VI" sz="2400" dirty="0" err="1">
                 <a:solidFill>
                   <a:srgbClr val="080808"/>
                 </a:solidFill>
@@ -23554,52 +25488,62 @@
               <a:t>i</a:t>
             </a:r>
             <a:r>
-              <a:rPr lang="en-VI" altLang="en-VI" sz="2400" dirty="0">
+              <a:rPr lang="en-029" altLang="en-VI" sz="2400" dirty="0">
                 <a:solidFill>
                   <a:srgbClr val="080808"/>
                 </a:solidFill>
                 <a:latin typeface="JetBrains Mono"/>
               </a:rPr>
-              <a:t> + </a:t>
-            </a:r>
-            <a:r>
-              <a:rPr lang="en-VI" altLang="en-VI" sz="2400" dirty="0">
-                <a:solidFill>
-                  <a:srgbClr val="067D17"/>
+              <a:t>]. </a:t>
+            </a:r>
+            <a:r>
+              <a:rPr lang="en-029" altLang="en-VI" sz="2400" dirty="0" err="1">
+                <a:solidFill>
+                  <a:srgbClr val="080808"/>
                 </a:solidFill>
                 <a:latin typeface="JetBrains Mono"/>
               </a:rPr>
-              <a:t>": " </a:t>
-            </a:r>
-            <a:r>
-              <a:rPr lang="en-VI" altLang="en-VI" sz="2400" dirty="0">
+              <a:t>printFirstName</a:t>
+            </a:r>
+            <a:r>
+              <a:rPr lang="en-029" altLang="en-VI" sz="2400" dirty="0">
                 <a:solidFill>
                   <a:srgbClr val="080808"/>
                 </a:solidFill>
                 <a:latin typeface="JetBrains Mono"/>
               </a:rPr>
-              <a:t>+ </a:t>
-            </a:r>
-            <a:r>
-              <a:rPr lang="en-VI" altLang="en-VI" sz="2400" dirty="0">
-                <a:solidFill>
-                  <a:srgbClr val="871094"/>
+              <a:t>();</a:t>
+            </a:r>
+          </a:p>
+          <a:p>
+            <a:pPr eaLnBrk="0" fontAlgn="base" hangingPunct="0">
+              <a:spcBef>
+                <a:spcPct val="0"/>
+              </a:spcBef>
+              <a:spcAft>
+                <a:spcPct val="0"/>
+              </a:spcAft>
+            </a:pPr>
+            <a:r>
+              <a:rPr lang="en-IE" altLang="en-VI" sz="2400" dirty="0">
+                <a:solidFill>
+                  <a:srgbClr val="080808"/>
                 </a:solidFill>
                 <a:latin typeface="JetBrains Mono"/>
               </a:rPr>
-              <a:t>products</a:t>
-            </a:r>
-            <a:r>
-              <a:rPr lang="en-VI" altLang="en-VI" sz="2400" dirty="0">
+              <a:t> 	</a:t>
+            </a:r>
+            <a:r>
+              <a:rPr lang="en-029" altLang="en-VI" sz="2400" dirty="0">
                 <a:solidFill>
                   <a:srgbClr val="080808"/>
                 </a:solidFill>
                 <a:latin typeface="JetBrains Mono"/>
               </a:rPr>
-              <a:t>[</a:t>
-            </a:r>
-            <a:r>
-              <a:rPr lang="en-VI" altLang="en-VI" sz="2400" dirty="0" err="1">
+              <a:t>friends[</a:t>
+            </a:r>
+            <a:r>
+              <a:rPr lang="en-029" altLang="en-VI" sz="2400" dirty="0" err="1">
                 <a:solidFill>
                   <a:srgbClr val="080808"/>
                 </a:solidFill>
@@ -23608,85 +25552,31 @@
               <a:t>i</a:t>
             </a:r>
             <a:r>
-              <a:rPr lang="en-VI" altLang="en-VI" sz="2400" dirty="0">
+              <a:rPr lang="en-029" altLang="en-VI" sz="2400" dirty="0">
                 <a:solidFill>
                   <a:srgbClr val="080808"/>
                 </a:solidFill>
                 <a:latin typeface="JetBrains Mono"/>
               </a:rPr>
-              <a:t>]</a:t>
-            </a:r>
-            <a:r>
-              <a:rPr lang="en-GB" altLang="en-VI" sz="2400" dirty="0">
+              <a:t>]. </a:t>
+            </a:r>
+            <a:r>
+              <a:rPr lang="en-029" altLang="en-VI" sz="2400" dirty="0" err="1">
                 <a:solidFill>
                   <a:srgbClr val="080808"/>
                 </a:solidFill>
                 <a:latin typeface="JetBrains Mono"/>
               </a:rPr>
-              <a:t>.</a:t>
-            </a:r>
-            <a:r>
-              <a:rPr lang="en-GB" altLang="en-VI" sz="2400" dirty="0" err="1">
+              <a:t>printSecondName</a:t>
+            </a:r>
+            <a:r>
+              <a:rPr lang="en-029" altLang="en-VI" sz="2400" dirty="0">
                 <a:solidFill>
                   <a:srgbClr val="080808"/>
                 </a:solidFill>
                 <a:latin typeface="JetBrains Mono"/>
               </a:rPr>
-              <a:t>toString</a:t>
-            </a:r>
-            <a:r>
-              <a:rPr lang="en-GB" altLang="en-VI" sz="2400" dirty="0">
-                <a:solidFill>
-                  <a:srgbClr val="080808"/>
-                </a:solidFill>
-                <a:latin typeface="JetBrains Mono"/>
-              </a:rPr>
-              <a:t>()</a:t>
-            </a:r>
-            <a:r>
-              <a:rPr lang="en-VI" altLang="en-VI" sz="2400" dirty="0">
-                <a:solidFill>
-                  <a:srgbClr val="080808"/>
-                </a:solidFill>
-                <a:latin typeface="JetBrains Mono"/>
-              </a:rPr>
-              <a:t> + </a:t>
-            </a:r>
-            <a:r>
-              <a:rPr lang="en-VI" altLang="en-VI" sz="2400" dirty="0">
-                <a:solidFill>
-                  <a:srgbClr val="067D17"/>
-                </a:solidFill>
-                <a:latin typeface="JetBrains Mono"/>
-              </a:rPr>
-              <a:t>"</a:t>
-            </a:r>
-            <a:r>
-              <a:rPr lang="en-VI" altLang="en-VI" sz="2400" dirty="0">
-                <a:solidFill>
-                  <a:srgbClr val="0037A6"/>
-                </a:solidFill>
-                <a:latin typeface="JetBrains Mono"/>
-              </a:rPr>
-              <a:t>\n</a:t>
-            </a:r>
-            <a:r>
-              <a:rPr lang="en-VI" altLang="en-VI" sz="2400" dirty="0">
-                <a:solidFill>
-                  <a:srgbClr val="067D17"/>
-                </a:solidFill>
-                <a:latin typeface="JetBrains Mono"/>
-              </a:rPr>
-              <a:t>"</a:t>
-            </a:r>
-            <a:r>
-              <a:rPr lang="en-VI" altLang="en-VI" sz="2400" dirty="0">
-                <a:solidFill>
-                  <a:srgbClr val="080808"/>
-                </a:solidFill>
-                <a:latin typeface="JetBrains Mono"/>
-              </a:rPr>
-              <a:t>;</a:t>
+              <a:t>();</a:t>
             </a:r>
             <a:br>
               <a:rPr lang="en-VI" altLang="en-VI" sz="2400" dirty="0">
@@ -23822,8 +25712,8 @@
         </p:nvSpPr>
         <p:spPr>
           <a:xfrm>
-            <a:off x="2257547" y="6098128"/>
-            <a:ext cx="7800853" cy="400110"/>
+            <a:off x="1984651" y="6178754"/>
+            <a:ext cx="8346644" cy="400110"/>
           </a:xfrm>
           <a:prstGeom prst="rect">
             <a:avLst/>
@@ -23851,7 +25741,7 @@
           <a:p>
             <a:r>
               <a:rPr lang="en-GB" sz="2000" dirty="0"/>
-              <a:t>Returns a String containing all the products stored in the primitive array.  </a:t>
+              <a:t>Returns the first and second names of all friends  stored in the primitive array.  </a:t>
             </a:r>
             <a:endParaRPr lang="en-VI" sz="2000" dirty="0"/>
           </a:p>
@@ -23870,7 +25760,7 @@
 </p:sld>
 </file>
 
-<file path=ppt/slides/slide26.xml><?xml version="1.0" encoding="utf-8"?>
+<file path=ppt/slides/slide27.xml><?xml version="1.0" encoding="utf-8"?>
 <p:sld xmlns:a="http://schemas.openxmlformats.org/drawingml/2006/main" xmlns:r="http://schemas.openxmlformats.org/officeDocument/2006/relationships" xmlns:p="http://schemas.openxmlformats.org/presentationml/2006/main">
   <p:cSld>
     <p:spTree>
@@ -23912,9 +25802,15 @@
       </p:sp>
       <p:pic>
         <p:nvPicPr>
-          <p:cNvPr id="3074" name="Picture 2" descr="Image result for questions"/>
+          <p:cNvPr id="3" name="Picture 2" descr="A green question mark in a circle&#10;&#10;AI-generated content may be incorrect.">
+            <a:extLst>
+              <a:ext uri="{FF2B5EF4-FFF2-40B4-BE49-F238E27FC236}">
+                <a16:creationId xmlns:a16="http://schemas.microsoft.com/office/drawing/2014/main" id="{96FBC672-E48E-496B-848D-976EC1B6DE7F}"/>
+              </a:ext>
+            </a:extLst>
+          </p:cNvPr>
           <p:cNvPicPr>
-            <a:picLocks noChangeAspect="1" noChangeArrowheads="1"/>
+            <a:picLocks noChangeAspect="1"/>
           </p:cNvPicPr>
           <p:nvPr/>
         </p:nvPicPr>
@@ -23926,29 +25822,18 @@
               </a:ext>
             </a:extLst>
           </a:blip>
-          <a:srcRect/>
           <a:stretch>
             <a:fillRect/>
           </a:stretch>
         </p:blipFill>
-        <p:spPr bwMode="auto">
+        <p:spPr>
           <a:xfrm>
-            <a:off x="3810000" y="2057401"/>
-            <a:ext cx="4343400" cy="3509469"/>
+            <a:off x="3467100" y="1626704"/>
+            <a:ext cx="5257800" cy="5257800"/>
           </a:xfrm>
           <a:prstGeom prst="rect">
             <a:avLst/>
           </a:prstGeom>
-          <a:noFill/>
-          <a:extLst>
-            <a:ext uri="{909E8E84-426E-40DD-AFC4-6F175D3DCCD1}">
-              <a14:hiddenFill xmlns:a14="http://schemas.microsoft.com/office/drawing/2010/main">
-                <a:solidFill>
-                  <a:srgbClr val="FFFFFF"/>
-                </a:solidFill>
-              </a14:hiddenFill>
-            </a:ext>
-          </a:extLst>
         </p:spPr>
       </p:pic>
     </p:spTree>
@@ -23983,6 +25868,157 @@
       </p:grpSpPr>
       <p:sp>
         <p:nvSpPr>
+          <p:cNvPr id="2" name="Title 1"/>
+          <p:cNvSpPr>
+            <a:spLocks noGrp="1"/>
+          </p:cNvSpPr>
+          <p:nvPr>
+            <p:ph type="title"/>
+          </p:nvPr>
+        </p:nvSpPr>
+        <p:spPr/>
+        <p:txBody>
+          <a:bodyPr>
+            <a:normAutofit/>
+          </a:bodyPr>
+          <a:lstStyle/>
+          <a:p>
+            <a:r>
+              <a:rPr lang="en-GB" dirty="0"/>
+              <a:t>Let’s Look at arrays of different types</a:t>
+            </a:r>
+          </a:p>
+        </p:txBody>
+      </p:sp>
+      <p:sp>
+        <p:nvSpPr>
+          <p:cNvPr id="3" name="Content Placeholder 2"/>
+          <p:cNvSpPr>
+            <a:spLocks noGrp="1"/>
+          </p:cNvSpPr>
+          <p:nvPr>
+            <p:ph idx="1"/>
+          </p:nvPr>
+        </p:nvSpPr>
+        <p:spPr/>
+        <p:txBody>
+          <a:bodyPr/>
+          <a:lstStyle/>
+          <a:p>
+            <a:pPr marL="0" indent="0">
+              <a:buNone/>
+            </a:pPr>
+            <a:r>
+              <a:rPr lang="en-GB" b="1" dirty="0"/>
+              <a:t>Arrays can store any type of data</a:t>
+            </a:r>
+          </a:p>
+          <a:p>
+            <a:pPr marL="0" indent="0">
+              <a:buNone/>
+            </a:pPr>
+            <a:endParaRPr lang="en-GB" dirty="0"/>
+          </a:p>
+          <a:p>
+            <a:pPr marL="0" indent="0">
+              <a:buNone/>
+            </a:pPr>
+            <a:r>
+              <a:rPr lang="en-GB" dirty="0"/>
+              <a:t>Let’s look at some examples:</a:t>
+            </a:r>
+          </a:p>
+          <a:p>
+            <a:pPr marL="0" indent="0">
+              <a:buNone/>
+            </a:pPr>
+            <a:endParaRPr lang="en-GB" dirty="0"/>
+          </a:p>
+          <a:p>
+            <a:pPr marL="514350" indent="-514350">
+              <a:buFont typeface="+mj-lt"/>
+              <a:buAutoNum type="arabicPeriod"/>
+            </a:pPr>
+            <a:r>
+              <a:rPr lang="en-GB" dirty="0"/>
+              <a:t>Array of primitives - </a:t>
+            </a:r>
+            <a:r>
+              <a:rPr lang="en-GB" b="1" dirty="0" err="1"/>
+              <a:t>int</a:t>
+            </a:r>
+            <a:endParaRPr lang="en-GB" b="1" dirty="0"/>
+          </a:p>
+          <a:p>
+            <a:pPr marL="514350" indent="-514350">
+              <a:buFont typeface="+mj-lt"/>
+              <a:buAutoNum type="arabicPeriod"/>
+            </a:pPr>
+            <a:r>
+              <a:rPr lang="en-GB" dirty="0"/>
+              <a:t>Array of objects </a:t>
+            </a:r>
+            <a:r>
+              <a:rPr lang="mr-IN" dirty="0"/>
+              <a:t>–</a:t>
+            </a:r>
+            <a:r>
+              <a:rPr lang="en-GB" dirty="0"/>
+              <a:t> </a:t>
+            </a:r>
+            <a:r>
+              <a:rPr lang="en-GB" b="1" dirty="0"/>
+              <a:t>String</a:t>
+            </a:r>
+          </a:p>
+          <a:p>
+            <a:pPr marL="514350" indent="-514350">
+              <a:buFont typeface="+mj-lt"/>
+              <a:buAutoNum type="arabicPeriod"/>
+            </a:pPr>
+            <a:r>
+              <a:rPr lang="en-GB" dirty="0"/>
+              <a:t>Array of objects - </a:t>
+            </a:r>
+            <a:r>
+              <a:rPr lang="en-GB" b="1" dirty="0"/>
+              <a:t>Product</a:t>
+            </a:r>
+          </a:p>
+        </p:txBody>
+      </p:sp>
+    </p:spTree>
+    <p:extLst>
+      <p:ext uri="{BB962C8B-B14F-4D97-AF65-F5344CB8AC3E}">
+        <p14:creationId xmlns:p14="http://schemas.microsoft.com/office/powerpoint/2010/main" val="1139030198"/>
+      </p:ext>
+    </p:extLst>
+  </p:cSld>
+  <p:clrMapOvr>
+    <a:masterClrMapping/>
+  </p:clrMapOvr>
+</p:sld>
+</file>
+
+<file path=ppt/slides/slide4.xml><?xml version="1.0" encoding="utf-8"?>
+<p:sld xmlns:a="http://schemas.openxmlformats.org/drawingml/2006/main" xmlns:r="http://schemas.openxmlformats.org/officeDocument/2006/relationships" xmlns:p="http://schemas.openxmlformats.org/presentationml/2006/main">
+  <p:cSld>
+    <p:spTree>
+      <p:nvGrpSpPr>
+        <p:cNvPr id="1" name=""/>
+        <p:cNvGrpSpPr/>
+        <p:nvPr/>
+      </p:nvGrpSpPr>
+      <p:grpSpPr>
+        <a:xfrm>
+          <a:off x="0" y="0"/>
+          <a:ext cx="0" cy="0"/>
+          <a:chOff x="0" y="0"/>
+          <a:chExt cx="0" cy="0"/>
+        </a:xfrm>
+      </p:grpSpPr>
+      <p:sp>
+        <p:nvSpPr>
           <p:cNvPr id="13" name="TextBox 12"/>
           <p:cNvSpPr txBox="1"/>
           <p:nvPr/>
@@ -24033,7 +26069,7 @@
         <p:spPr>
           <a:xfrm>
             <a:off x="2049534" y="5249288"/>
-            <a:ext cx="5796972" cy="1384995"/>
+            <a:ext cx="5301901" cy="1384995"/>
           </a:xfrm>
           <a:prstGeom prst="rect">
             <a:avLst/>
@@ -24071,7 +26107,7 @@
           <a:p>
             <a:r>
               <a:rPr lang="en-US" sz="2800" dirty="0"/>
-              <a:t>Product products[] = new Product[10];</a:t>
+              <a:t>Person[]  friends = new Person[4];</a:t>
             </a:r>
           </a:p>
         </p:txBody>
@@ -24640,12 +26676,18 @@
 </p:sld>
 </file>
 
-<file path=ppt/slides/slide4.xml><?xml version="1.0" encoding="utf-8"?>
+<file path=ppt/slides/slide5.xml><?xml version="1.0" encoding="utf-8"?>
 <p:sld xmlns:a="http://schemas.openxmlformats.org/drawingml/2006/main" xmlns:r="http://schemas.openxmlformats.org/officeDocument/2006/relationships" xmlns:p="http://schemas.openxmlformats.org/presentationml/2006/main">
   <p:cSld>
     <p:spTree>
       <p:nvGrpSpPr>
-        <p:cNvPr id="1" name=""/>
+        <p:cNvPr id="1" name="">
+          <a:extLst>
+            <a:ext uri="{FF2B5EF4-FFF2-40B4-BE49-F238E27FC236}">
+              <a16:creationId xmlns:a16="http://schemas.microsoft.com/office/drawing/2014/main" id="{976CFBF0-9159-185D-8A3F-0536331422A7}"/>
+            </a:ext>
+          </a:extLst>
+        </p:cNvPr>
         <p:cNvGrpSpPr/>
         <p:nvPr/>
       </p:nvGrpSpPr>
@@ -24659,96 +26701,262 @@
       </p:grpSpPr>
       <p:sp>
         <p:nvSpPr>
-          <p:cNvPr id="4" name="TextBox 3"/>
-          <p:cNvSpPr txBox="1"/>
+          <p:cNvPr id="2" name="Title 1">
+            <a:extLst>
+              <a:ext uri="{FF2B5EF4-FFF2-40B4-BE49-F238E27FC236}">
+                <a16:creationId xmlns:a16="http://schemas.microsoft.com/office/drawing/2014/main" id="{514CD7B3-6E38-BE81-5F27-1F41C691CA9E}"/>
+              </a:ext>
+            </a:extLst>
+          </p:cNvPr>
+          <p:cNvSpPr>
+            <a:spLocks noGrp="1"/>
+          </p:cNvSpPr>
+          <p:nvPr>
+            <p:ph type="title"/>
+          </p:nvPr>
+        </p:nvSpPr>
+        <p:spPr/>
+        <p:txBody>
+          <a:bodyPr/>
+          <a:lstStyle/>
+          <a:p>
+            <a:r>
+              <a:rPr lang="en-IE"/>
+              <a:t>Topics list</a:t>
+            </a:r>
+            <a:endParaRPr lang="en-IE" dirty="0"/>
+          </a:p>
+        </p:txBody>
+      </p:sp>
+      <p:sp>
+        <p:nvSpPr>
+          <p:cNvPr id="5" name="Content Placeholder 4">
+            <a:extLst>
+              <a:ext uri="{FF2B5EF4-FFF2-40B4-BE49-F238E27FC236}">
+                <a16:creationId xmlns:a16="http://schemas.microsoft.com/office/drawing/2014/main" id="{0CCFB6C7-3653-2B17-9FC1-FFB0924D0482}"/>
+              </a:ext>
+            </a:extLst>
+          </p:cNvPr>
+          <p:cNvSpPr>
+            <a:spLocks noGrp="1"/>
+          </p:cNvSpPr>
+          <p:nvPr>
+            <p:ph idx="1"/>
+          </p:nvPr>
+        </p:nvSpPr>
+        <p:spPr/>
+        <p:txBody>
+          <a:bodyPr>
+            <a:normAutofit/>
+          </a:bodyPr>
+          <a:lstStyle/>
+          <a:p>
+            <a:pPr marL="0" indent="0">
+              <a:buNone/>
+            </a:pPr>
+            <a:r>
+              <a:rPr lang="en-IE" dirty="0"/>
+              <a:t>1.  </a:t>
+            </a:r>
+            <a:r>
+              <a:rPr lang="en-IE" sz="4000" dirty="0"/>
+              <a:t>Arrays of different types</a:t>
+            </a:r>
+          </a:p>
+          <a:p>
+            <a:pPr marL="514350" indent="-514350">
+              <a:buFont typeface="+mj-lt"/>
+              <a:buAutoNum type="arabicPeriod" startAt="2"/>
+            </a:pPr>
+            <a:r>
+              <a:rPr lang="en-IE" sz="4000" dirty="0"/>
+              <a:t>Arrays of primitive types</a:t>
+            </a:r>
+          </a:p>
+          <a:p>
+            <a:pPr marL="514350" indent="-514350">
+              <a:buFont typeface="+mj-lt"/>
+              <a:buAutoNum type="arabicPeriod" startAt="2"/>
+            </a:pPr>
+            <a:r>
+              <a:rPr lang="en-IE" sz="4000" dirty="0"/>
+              <a:t>Arrays of objects</a:t>
+            </a:r>
+          </a:p>
+          <a:p>
+            <a:pPr marL="914400" lvl="1" indent="-514350"/>
+            <a:r>
+              <a:rPr lang="en-IE" sz="4000" dirty="0"/>
+              <a:t>String</a:t>
+            </a:r>
+          </a:p>
+          <a:p>
+            <a:pPr marL="914400" lvl="1" indent="-514350"/>
+            <a:r>
+              <a:rPr lang="en-IE" sz="4000" dirty="0"/>
+              <a:t>Person</a:t>
+            </a:r>
+          </a:p>
+          <a:p>
+            <a:pPr marL="0" indent="0">
+              <a:buNone/>
+            </a:pPr>
+            <a:endParaRPr lang="en-IE" dirty="0"/>
+          </a:p>
+        </p:txBody>
+      </p:sp>
+      <p:sp>
+        <p:nvSpPr>
+          <p:cNvPr id="6" name="Rectangle 5">
+            <a:extLst>
+              <a:ext uri="{FF2B5EF4-FFF2-40B4-BE49-F238E27FC236}">
+                <a16:creationId xmlns:a16="http://schemas.microsoft.com/office/drawing/2014/main" id="{A4BFC76E-0021-F6F2-9E6F-2BB7C516970B}"/>
+              </a:ext>
+            </a:extLst>
+          </p:cNvPr>
+          <p:cNvSpPr/>
           <p:nvPr/>
         </p:nvSpPr>
         <p:spPr>
           <a:xfrm>
-            <a:off x="3527129" y="2514600"/>
-            <a:ext cx="5642827" cy="1569660"/>
+            <a:off x="609600" y="2438400"/>
+            <a:ext cx="6172200" cy="533400"/>
           </a:xfrm>
           <a:prstGeom prst="rect">
             <a:avLst/>
           </a:prstGeom>
           <a:noFill/>
-        </p:spPr>
+          <a:ln w="44450">
+            <a:solidFill>
+              <a:srgbClr val="FF0000"/>
+            </a:solidFill>
+          </a:ln>
+        </p:spPr>
+        <p:style>
+          <a:lnRef idx="2">
+            <a:schemeClr val="accent1">
+              <a:shade val="50000"/>
+            </a:schemeClr>
+          </a:lnRef>
+          <a:fillRef idx="1">
+            <a:schemeClr val="accent1"/>
+          </a:fillRef>
+          <a:effectRef idx="0">
+            <a:schemeClr val="accent1"/>
+          </a:effectRef>
+          <a:fontRef idx="minor">
+            <a:schemeClr val="lt1"/>
+          </a:fontRef>
+        </p:style>
         <p:txBody>
-          <a:bodyPr wrap="none" rtlCol="0">
-            <a:spAutoFit/>
-          </a:bodyPr>
+          <a:bodyPr rtlCol="0" anchor="ctr"/>
           <a:lstStyle/>
           <a:p>
             <a:pPr algn="ctr"/>
-            <a:r>
-              <a:rPr lang="en-GB" sz="4800" dirty="0">
-                <a:solidFill>
-                  <a:srgbClr val="FF0000"/>
-                </a:solidFill>
-              </a:rPr>
-              <a:t>1) Array of </a:t>
-            </a:r>
-            <a:r>
-              <a:rPr lang="en-GB" sz="4800" b="1" dirty="0">
-                <a:solidFill>
-                  <a:srgbClr val="FF0000"/>
-                </a:solidFill>
-              </a:rPr>
-              <a:t>Primitives</a:t>
-            </a:r>
-            <a:r>
-              <a:rPr lang="en-GB" sz="4800" dirty="0">
-                <a:solidFill>
-                  <a:srgbClr val="FF0000"/>
-                </a:solidFill>
-              </a:rPr>
-              <a:t> </a:t>
-            </a:r>
-            <a:br>
-              <a:rPr lang="en-GB" sz="4800" dirty="0">
-                <a:solidFill>
-                  <a:srgbClr val="FF0000"/>
-                </a:solidFill>
-              </a:rPr>
-            </a:br>
-            <a:r>
-              <a:rPr lang="en-GB" sz="4800" dirty="0">
-                <a:solidFill>
-                  <a:srgbClr val="FF0000"/>
-                </a:solidFill>
-              </a:rPr>
-              <a:t>e.g. </a:t>
-            </a:r>
-            <a:r>
-              <a:rPr lang="en-GB" sz="4800" dirty="0" err="1">
-                <a:solidFill>
-                  <a:srgbClr val="FF0000"/>
-                </a:solidFill>
-              </a:rPr>
-              <a:t>int</a:t>
-            </a:r>
-            <a:endParaRPr lang="en-GB" sz="4800" dirty="0">
-              <a:solidFill>
-                <a:srgbClr val="FF0000"/>
-              </a:solidFill>
-            </a:endParaRPr>
+            <a:endParaRPr lang="en-IE"/>
           </a:p>
         </p:txBody>
       </p:sp>
     </p:spTree>
     <p:extLst>
       <p:ext uri="{BB962C8B-B14F-4D97-AF65-F5344CB8AC3E}">
-        <p14:creationId xmlns:p14="http://schemas.microsoft.com/office/powerpoint/2010/main" val="491014803"/>
+        <p14:creationId xmlns:p14="http://schemas.microsoft.com/office/powerpoint/2010/main" val="2215631965"/>
       </p:ext>
     </p:extLst>
   </p:cSld>
   <p:clrMapOvr>
     <a:masterClrMapping/>
   </p:clrMapOvr>
+  <p:timing>
+    <p:tnLst>
+      <p:par>
+        <p:cTn id="1" dur="indefinite" restart="never" nodeType="tmRoot">
+          <p:childTnLst>
+            <p:seq concurrent="1" nextAc="seek">
+              <p:cTn id="2" dur="indefinite" nodeType="mainSeq">
+                <p:childTnLst>
+                  <p:par>
+                    <p:cTn id="3" fill="hold">
+                      <p:stCondLst>
+                        <p:cond delay="indefinite"/>
+                      </p:stCondLst>
+                      <p:childTnLst>
+                        <p:par>
+                          <p:cTn id="4" fill="hold">
+                            <p:stCondLst>
+                              <p:cond delay="0"/>
+                            </p:stCondLst>
+                            <p:childTnLst>
+                              <p:par>
+                                <p:cTn id="5" presetID="21" presetClass="entr" presetSubtype="1" fill="hold" grpId="0" nodeType="clickEffect">
+                                  <p:stCondLst>
+                                    <p:cond delay="0"/>
+                                  </p:stCondLst>
+                                  <p:childTnLst>
+                                    <p:set>
+                                      <p:cBhvr>
+                                        <p:cTn id="6" dur="1" fill="hold">
+                                          <p:stCondLst>
+                                            <p:cond delay="0"/>
+                                          </p:stCondLst>
+                                        </p:cTn>
+                                        <p:tgtEl>
+                                          <p:spTgt spid="6"/>
+                                        </p:tgtEl>
+                                        <p:attrNameLst>
+                                          <p:attrName>style.visibility</p:attrName>
+                                        </p:attrNameLst>
+                                      </p:cBhvr>
+                                      <p:to>
+                                        <p:strVal val="visible"/>
+                                      </p:to>
+                                    </p:set>
+                                    <p:animEffect transition="in" filter="wheel(1)">
+                                      <p:cBhvr>
+                                        <p:cTn id="7" dur="2000"/>
+                                        <p:tgtEl>
+                                          <p:spTgt spid="6"/>
+                                        </p:tgtEl>
+                                      </p:cBhvr>
+                                    </p:animEffect>
+                                  </p:childTnLst>
+                                </p:cTn>
+                              </p:par>
+                            </p:childTnLst>
+                          </p:cTn>
+                        </p:par>
+                      </p:childTnLst>
+                    </p:cTn>
+                  </p:par>
+                </p:childTnLst>
+              </p:cTn>
+              <p:prevCondLst>
+                <p:cond evt="onPrev" delay="0">
+                  <p:tgtEl>
+                    <p:sldTgt/>
+                  </p:tgtEl>
+                </p:cond>
+              </p:prevCondLst>
+              <p:nextCondLst>
+                <p:cond evt="onNext" delay="0">
+                  <p:tgtEl>
+                    <p:sldTgt/>
+                  </p:tgtEl>
+                </p:cond>
+              </p:nextCondLst>
+            </p:seq>
+          </p:childTnLst>
+        </p:cTn>
+      </p:par>
+    </p:tnLst>
+    <p:bldLst>
+      <p:bldP spid="6" grpId="0" animBg="1"/>
+    </p:bldLst>
+  </p:timing>
 </p:sld>
 </file>
 
-<file path=ppt/slides/slide5.xml><?xml version="1.0" encoding="utf-8"?>
+<file path=ppt/slides/slide6.xml><?xml version="1.0" encoding="utf-8"?>
 <p:sld xmlns:a="http://schemas.openxmlformats.org/drawingml/2006/main" xmlns:r="http://schemas.openxmlformats.org/officeDocument/2006/relationships" xmlns:p="http://schemas.openxmlformats.org/presentationml/2006/main">
   <p:cSld>
     <p:spTree>
@@ -25148,7 +27356,7 @@
 </p:sld>
 </file>
 
-<file path=ppt/slides/slide6.xml><?xml version="1.0" encoding="utf-8"?>
+<file path=ppt/slides/slide7.xml><?xml version="1.0" encoding="utf-8"?>
 <p:sld xmlns:a="http://schemas.openxmlformats.org/drawingml/2006/main" xmlns:r="http://schemas.openxmlformats.org/officeDocument/2006/relationships" xmlns:p="http://schemas.openxmlformats.org/presentationml/2006/main">
   <p:cSld>
     <p:spTree>
@@ -25829,7 +28037,7 @@
 </p:sld>
 </file>
 
-<file path=ppt/slides/slide7.xml><?xml version="1.0" encoding="utf-8"?>
+<file path=ppt/slides/slide8.xml><?xml version="1.0" encoding="utf-8"?>
 <p:sld xmlns:a="http://schemas.openxmlformats.org/drawingml/2006/main" xmlns:r="http://schemas.openxmlformats.org/officeDocument/2006/relationships" xmlns:p="http://schemas.openxmlformats.org/presentationml/2006/main">
   <p:cSld>
     <p:spTree>
@@ -26692,7 +28900,7 @@
 </p:sld>
 </file>
 
-<file path=ppt/slides/slide8.xml><?xml version="1.0" encoding="utf-8"?>
+<file path=ppt/slides/slide9.xml><?xml version="1.0" encoding="utf-8"?>
 <p:sld xmlns:a="http://schemas.openxmlformats.org/drawingml/2006/main" xmlns:r="http://schemas.openxmlformats.org/officeDocument/2006/relationships" xmlns:p="http://schemas.openxmlformats.org/presentationml/2006/main">
   <p:cSld>
     <p:spTree>
@@ -27607,976 +29815,6 @@
     <p:extLst>
       <p:ext uri="{BB962C8B-B14F-4D97-AF65-F5344CB8AC3E}">
         <p14:creationId xmlns:p14="http://schemas.microsoft.com/office/powerpoint/2010/main" val="809623196"/>
-      </p:ext>
-    </p:extLst>
-  </p:cSld>
-  <p:clrMapOvr>
-    <a:masterClrMapping/>
-  </p:clrMapOvr>
-</p:sld>
-</file>
-
-<file path=ppt/slides/slide9.xml><?xml version="1.0" encoding="utf-8"?>
-<p:sld xmlns:a="http://schemas.openxmlformats.org/drawingml/2006/main" xmlns:r="http://schemas.openxmlformats.org/officeDocument/2006/relationships" xmlns:p="http://schemas.openxmlformats.org/presentationml/2006/main">
-  <p:cSld>
-    <p:spTree>
-      <p:nvGrpSpPr>
-        <p:cNvPr id="1" name=""/>
-        <p:cNvGrpSpPr/>
-        <p:nvPr/>
-      </p:nvGrpSpPr>
-      <p:grpSpPr>
-        <a:xfrm>
-          <a:off x="0" y="0"/>
-          <a:ext cx="0" cy="0"/>
-          <a:chOff x="0" y="0"/>
-          <a:chExt cx="0" cy="0"/>
-        </a:xfrm>
-      </p:grpSpPr>
-      <p:sp>
-        <p:nvSpPr>
-          <p:cNvPr id="3075" name="Rectangle 2"/>
-          <p:cNvSpPr>
-            <a:spLocks noGrp="1" noChangeArrowheads="1"/>
-          </p:cNvSpPr>
-          <p:nvPr>
-            <p:ph type="title"/>
-          </p:nvPr>
-        </p:nvSpPr>
-        <p:spPr/>
-        <p:txBody>
-          <a:bodyPr>
-            <a:normAutofit/>
-          </a:bodyPr>
-          <a:lstStyle/>
-          <a:p>
-            <a:pPr algn="ctr"/>
-            <a:r>
-              <a:rPr lang="en-IE" dirty="0"/>
-              <a:t>Structure of an </a:t>
-            </a:r>
-            <a:r>
-              <a:rPr lang="en-IE" b="1" dirty="0">
-                <a:solidFill>
-                  <a:srgbClr val="FF0000"/>
-                </a:solidFill>
-              </a:rPr>
-              <a:t>int</a:t>
-            </a:r>
-            <a:r>
-              <a:rPr lang="en-IE" dirty="0"/>
-              <a:t> primitive array</a:t>
-            </a:r>
-            <a:endParaRPr lang="en-GB" dirty="0"/>
-          </a:p>
-        </p:txBody>
-      </p:sp>
-      <p:sp>
-        <p:nvSpPr>
-          <p:cNvPr id="2" name="Rectangle 1">
-            <a:extLst>
-              <a:ext uri="{FF2B5EF4-FFF2-40B4-BE49-F238E27FC236}">
-                <a16:creationId xmlns:a16="http://schemas.microsoft.com/office/drawing/2014/main" id="{35F7EA93-B44B-4A4E-9E6B-B94903E49E4C}"/>
-              </a:ext>
-            </a:extLst>
-          </p:cNvPr>
-          <p:cNvSpPr/>
-          <p:nvPr/>
-        </p:nvSpPr>
-        <p:spPr>
-          <a:xfrm>
-            <a:off x="2057400" y="1713934"/>
-            <a:ext cx="2345642" cy="523220"/>
-          </a:xfrm>
-          <a:prstGeom prst="rect">
-            <a:avLst/>
-          </a:prstGeom>
-        </p:spPr>
-        <p:style>
-          <a:lnRef idx="1">
-            <a:schemeClr val="accent6"/>
-          </a:lnRef>
-          <a:fillRef idx="2">
-            <a:schemeClr val="accent6"/>
-          </a:fillRef>
-          <a:effectRef idx="1">
-            <a:schemeClr val="accent6"/>
-          </a:effectRef>
-          <a:fontRef idx="minor">
-            <a:schemeClr val="dk1"/>
-          </a:fontRef>
-        </p:style>
-        <p:txBody>
-          <a:bodyPr wrap="none">
-            <a:spAutoFit/>
-          </a:bodyPr>
-          <a:lstStyle/>
-          <a:p>
-            <a:r>
-              <a:rPr lang="en-GB" sz="2800" dirty="0" err="1">
-                <a:solidFill>
-                  <a:schemeClr val="bg1">
-                    <a:lumMod val="65000"/>
-                  </a:schemeClr>
-                </a:solidFill>
-              </a:rPr>
-              <a:t>int</a:t>
-            </a:r>
-            <a:r>
-              <a:rPr lang="en-GB" sz="2800" dirty="0">
-                <a:solidFill>
-                  <a:schemeClr val="bg1">
-                    <a:lumMod val="65000"/>
-                  </a:schemeClr>
-                </a:solidFill>
-              </a:rPr>
-              <a:t>[]  numbers;</a:t>
-            </a:r>
-          </a:p>
-        </p:txBody>
-      </p:sp>
-      <p:sp>
-        <p:nvSpPr>
-          <p:cNvPr id="17" name="Rectangle 5">
-            <a:extLst>
-              <a:ext uri="{FF2B5EF4-FFF2-40B4-BE49-F238E27FC236}">
-                <a16:creationId xmlns:a16="http://schemas.microsoft.com/office/drawing/2014/main" id="{FBFD3A2D-FE4D-4B00-B298-A720C5FC1B6E}"/>
-              </a:ext>
-            </a:extLst>
-          </p:cNvPr>
-          <p:cNvSpPr>
-            <a:spLocks noChangeArrowheads="1"/>
-          </p:cNvSpPr>
-          <p:nvPr/>
-        </p:nvSpPr>
-        <p:spPr bwMode="auto">
-          <a:xfrm>
-            <a:off x="6625066" y="2276406"/>
-            <a:ext cx="762000" cy="533400"/>
-          </a:xfrm>
-          <a:prstGeom prst="rect">
-            <a:avLst/>
-          </a:prstGeom>
-          <a:noFill/>
-          <a:ln w="19050">
-            <a:solidFill>
-              <a:schemeClr val="tx1"/>
-            </a:solidFill>
-            <a:miter lim="800000"/>
-            <a:headEnd/>
-            <a:tailEnd/>
-          </a:ln>
-          <a:extLst>
-            <a:ext uri="{909E8E84-426E-40DD-AFC4-6F175D3DCCD1}">
-              <a14:hiddenFill xmlns:a14="http://schemas.microsoft.com/office/drawing/2010/main">
-                <a:solidFill>
-                  <a:srgbClr val="FFFFFF"/>
-                </a:solidFill>
-              </a14:hiddenFill>
-            </a:ext>
-          </a:extLst>
-        </p:spPr>
-        <p:txBody>
-          <a:bodyPr wrap="none" anchor="ctr"/>
-          <a:lstStyle/>
-          <a:p>
-            <a:endParaRPr lang="en-IE"/>
-          </a:p>
-        </p:txBody>
-      </p:sp>
-      <p:sp>
-        <p:nvSpPr>
-          <p:cNvPr id="18" name="Text Box 11">
-            <a:extLst>
-              <a:ext uri="{FF2B5EF4-FFF2-40B4-BE49-F238E27FC236}">
-                <a16:creationId xmlns:a16="http://schemas.microsoft.com/office/drawing/2014/main" id="{A11F9141-ED94-4AF8-8E9C-6B257DD50E84}"/>
-              </a:ext>
-            </a:extLst>
-          </p:cNvPr>
-          <p:cNvSpPr txBox="1">
-            <a:spLocks noChangeArrowheads="1"/>
-          </p:cNvSpPr>
-          <p:nvPr/>
-        </p:nvSpPr>
-        <p:spPr bwMode="auto">
-          <a:xfrm>
-            <a:off x="6236925" y="1731755"/>
-            <a:ext cx="1905000" cy="523220"/>
-          </a:xfrm>
-          <a:prstGeom prst="rect">
-            <a:avLst/>
-          </a:prstGeom>
-          <a:noFill/>
-          <a:ln>
-            <a:noFill/>
-          </a:ln>
-          <a:extLst>
-            <a:ext uri="{909E8E84-426E-40DD-AFC4-6F175D3DCCD1}">
-              <a14:hiddenFill xmlns:a14="http://schemas.microsoft.com/office/drawing/2010/main">
-                <a:solidFill>
-                  <a:srgbClr val="FFFFFF"/>
-                </a:solidFill>
-              </a14:hiddenFill>
-            </a:ext>
-            <a:ext uri="{91240B29-F687-4F45-9708-019B960494DF}">
-              <a14:hiddenLine xmlns:a14="http://schemas.microsoft.com/office/drawing/2010/main" w="9525">
-                <a:solidFill>
-                  <a:srgbClr val="000000"/>
-                </a:solidFill>
-                <a:miter lim="800000"/>
-                <a:headEnd/>
-                <a:tailEnd/>
-              </a14:hiddenLine>
-            </a:ext>
-          </a:extLst>
-        </p:spPr>
-        <p:txBody>
-          <a:bodyPr wrap="square">
-            <a:spAutoFit/>
-          </a:bodyPr>
-          <a:lstStyle>
-            <a:lvl1pPr>
-              <a:defRPr sz="2400" b="1">
-                <a:solidFill>
-                  <a:schemeClr val="tx1"/>
-                </a:solidFill>
-                <a:latin typeface="Times" pitchFamily="-32" charset="0"/>
-              </a:defRPr>
-            </a:lvl1pPr>
-            <a:lvl2pPr marL="742950" indent="-285750">
-              <a:defRPr sz="2400" b="1">
-                <a:solidFill>
-                  <a:schemeClr val="tx1"/>
-                </a:solidFill>
-                <a:latin typeface="Times" pitchFamily="-32" charset="0"/>
-              </a:defRPr>
-            </a:lvl2pPr>
-            <a:lvl3pPr marL="1143000" indent="-228600">
-              <a:defRPr sz="2400" b="1">
-                <a:solidFill>
-                  <a:schemeClr val="tx1"/>
-                </a:solidFill>
-                <a:latin typeface="Times" pitchFamily="-32" charset="0"/>
-              </a:defRPr>
-            </a:lvl3pPr>
-            <a:lvl4pPr marL="1600200" indent="-228600">
-              <a:defRPr sz="2400" b="1">
-                <a:solidFill>
-                  <a:schemeClr val="tx1"/>
-                </a:solidFill>
-                <a:latin typeface="Times" pitchFamily="-32" charset="0"/>
-              </a:defRPr>
-            </a:lvl4pPr>
-            <a:lvl5pPr marL="2057400" indent="-228600">
-              <a:defRPr sz="2400" b="1">
-                <a:solidFill>
-                  <a:schemeClr val="tx1"/>
-                </a:solidFill>
-                <a:latin typeface="Times" pitchFamily="-32" charset="0"/>
-              </a:defRPr>
-            </a:lvl5pPr>
-            <a:lvl6pPr marL="2514600" indent="-228600" eaLnBrk="0" fontAlgn="base" hangingPunct="0">
-              <a:spcBef>
-                <a:spcPct val="0"/>
-              </a:spcBef>
-              <a:spcAft>
-                <a:spcPct val="0"/>
-              </a:spcAft>
-              <a:defRPr sz="2400" b="1">
-                <a:solidFill>
-                  <a:schemeClr val="tx1"/>
-                </a:solidFill>
-                <a:latin typeface="Times" pitchFamily="-32" charset="0"/>
-              </a:defRPr>
-            </a:lvl6pPr>
-            <a:lvl7pPr marL="2971800" indent="-228600" eaLnBrk="0" fontAlgn="base" hangingPunct="0">
-              <a:spcBef>
-                <a:spcPct val="0"/>
-              </a:spcBef>
-              <a:spcAft>
-                <a:spcPct val="0"/>
-              </a:spcAft>
-              <a:defRPr sz="2400" b="1">
-                <a:solidFill>
-                  <a:schemeClr val="tx1"/>
-                </a:solidFill>
-                <a:latin typeface="Times" pitchFamily="-32" charset="0"/>
-              </a:defRPr>
-            </a:lvl7pPr>
-            <a:lvl8pPr marL="3429000" indent="-228600" eaLnBrk="0" fontAlgn="base" hangingPunct="0">
-              <a:spcBef>
-                <a:spcPct val="0"/>
-              </a:spcBef>
-              <a:spcAft>
-                <a:spcPct val="0"/>
-              </a:spcAft>
-              <a:defRPr sz="2400" b="1">
-                <a:solidFill>
-                  <a:schemeClr val="tx1"/>
-                </a:solidFill>
-                <a:latin typeface="Times" pitchFamily="-32" charset="0"/>
-              </a:defRPr>
-            </a:lvl8pPr>
-            <a:lvl9pPr marL="3886200" indent="-228600" eaLnBrk="0" fontAlgn="base" hangingPunct="0">
-              <a:spcBef>
-                <a:spcPct val="0"/>
-              </a:spcBef>
-              <a:spcAft>
-                <a:spcPct val="0"/>
-              </a:spcAft>
-              <a:defRPr sz="2400" b="1">
-                <a:solidFill>
-                  <a:schemeClr val="tx1"/>
-                </a:solidFill>
-                <a:latin typeface="Times" pitchFamily="-32" charset="0"/>
-              </a:defRPr>
-            </a:lvl9pPr>
-          </a:lstStyle>
-          <a:p>
-            <a:pPr eaLnBrk="1" hangingPunct="1"/>
-            <a:r>
-              <a:rPr lang="en-GB" sz="2800" dirty="0">
-                <a:latin typeface="Courier New" pitchFamily="-32" charset="0"/>
-              </a:rPr>
-              <a:t>numbers</a:t>
-            </a:r>
-          </a:p>
-        </p:txBody>
-      </p:sp>
-      <p:cxnSp>
-        <p:nvCxnSpPr>
-          <p:cNvPr id="8" name="Straight Connector 7">
-            <a:extLst>
-              <a:ext uri="{FF2B5EF4-FFF2-40B4-BE49-F238E27FC236}">
-                <a16:creationId xmlns:a16="http://schemas.microsoft.com/office/drawing/2014/main" id="{2A041949-519F-45B3-B942-2E85729C0E5B}"/>
-              </a:ext>
-            </a:extLst>
-          </p:cNvPr>
-          <p:cNvCxnSpPr/>
-          <p:nvPr/>
-        </p:nvCxnSpPr>
-        <p:spPr>
-          <a:xfrm>
-            <a:off x="5181600" y="1447800"/>
-            <a:ext cx="0" cy="5516562"/>
-          </a:xfrm>
-          <a:prstGeom prst="line">
-            <a:avLst/>
-          </a:prstGeom>
-          <a:ln w="12700"/>
-        </p:spPr>
-        <p:style>
-          <a:lnRef idx="1">
-            <a:schemeClr val="dk1"/>
-          </a:lnRef>
-          <a:fillRef idx="0">
-            <a:schemeClr val="dk1"/>
-          </a:fillRef>
-          <a:effectRef idx="0">
-            <a:schemeClr val="dk1"/>
-          </a:effectRef>
-          <a:fontRef idx="minor">
-            <a:schemeClr val="tx1"/>
-          </a:fontRef>
-        </p:style>
-      </p:cxnSp>
-      <p:graphicFrame>
-        <p:nvGraphicFramePr>
-          <p:cNvPr id="9" name="Table 8">
-            <a:extLst>
-              <a:ext uri="{FF2B5EF4-FFF2-40B4-BE49-F238E27FC236}">
-                <a16:creationId xmlns:a16="http://schemas.microsoft.com/office/drawing/2014/main" id="{1ECF9212-2D61-43FF-9314-EB995008633C}"/>
-              </a:ext>
-            </a:extLst>
-          </p:cNvPr>
-          <p:cNvGraphicFramePr>
-            <a:graphicFrameLocks noGrp="1"/>
-          </p:cNvGraphicFramePr>
-          <p:nvPr/>
-        </p:nvGraphicFramePr>
-        <p:xfrm>
-          <a:off x="7086601" y="3733800"/>
-          <a:ext cx="2209801" cy="1828800"/>
-        </p:xfrm>
-        <a:graphic>
-          <a:graphicData uri="http://schemas.openxmlformats.org/drawingml/2006/table">
-            <a:tbl>
-              <a:tblPr>
-                <a:tableStyleId>{3C2FFA5D-87B4-456A-9821-1D502468CF0F}</a:tableStyleId>
-              </a:tblPr>
-              <a:tblGrid>
-                <a:gridCol w="685800">
-                  <a:extLst>
-                    <a:ext uri="{9D8B030D-6E8A-4147-A177-3AD203B41FA5}">
-                      <a16:colId xmlns:a16="http://schemas.microsoft.com/office/drawing/2014/main" val="3029030374"/>
-                    </a:ext>
-                  </a:extLst>
-                </a:gridCol>
-                <a:gridCol w="1524001">
-                  <a:extLst>
-                    <a:ext uri="{9D8B030D-6E8A-4147-A177-3AD203B41FA5}">
-                      <a16:colId xmlns:a16="http://schemas.microsoft.com/office/drawing/2014/main" val="4245855580"/>
-                    </a:ext>
-                  </a:extLst>
-                </a:gridCol>
-              </a:tblGrid>
-              <a:tr h="374610">
-                <a:tc>
-                  <a:txBody>
-                    <a:bodyPr/>
-                    <a:lstStyle/>
-                    <a:p>
-                      <a:pPr algn="ctr"/>
-                      <a:r>
-                        <a:rPr lang="en-IE" sz="2400" b="1" dirty="0">
-                          <a:solidFill>
-                            <a:srgbClr val="0070C0"/>
-                          </a:solidFill>
-                        </a:rPr>
-                        <a:t>0</a:t>
-                      </a:r>
-                    </a:p>
-                  </a:txBody>
-                  <a:tcPr/>
-                </a:tc>
-                <a:tc>
-                  <a:txBody>
-                    <a:bodyPr/>
-                    <a:lstStyle/>
-                    <a:p>
-                      <a:pPr algn="ctr"/>
-                      <a:r>
-                        <a:rPr lang="en-IE" sz="2400" b="1" dirty="0"/>
-                        <a:t>12</a:t>
-                      </a:r>
-                    </a:p>
-                  </a:txBody>
-                  <a:tcPr/>
-                </a:tc>
-                <a:extLst>
-                  <a:ext uri="{0D108BD9-81ED-4DB2-BD59-A6C34878D82A}">
-                    <a16:rowId xmlns:a16="http://schemas.microsoft.com/office/drawing/2014/main" val="1821123948"/>
-                  </a:ext>
-                </a:extLst>
-              </a:tr>
-              <a:tr h="374610">
-                <a:tc>
-                  <a:txBody>
-                    <a:bodyPr/>
-                    <a:lstStyle/>
-                    <a:p>
-                      <a:pPr algn="ctr"/>
-                      <a:r>
-                        <a:rPr lang="en-IE" sz="2400" b="1" dirty="0">
-                          <a:solidFill>
-                            <a:srgbClr val="0070C0"/>
-                          </a:solidFill>
-                        </a:rPr>
-                        <a:t>1</a:t>
-                      </a:r>
-                    </a:p>
-                  </a:txBody>
-                  <a:tcPr/>
-                </a:tc>
-                <a:tc>
-                  <a:txBody>
-                    <a:bodyPr/>
-                    <a:lstStyle/>
-                    <a:p>
-                      <a:pPr algn="ctr"/>
-                      <a:r>
-                        <a:rPr lang="en-IE" sz="2400" b="1" dirty="0"/>
-                        <a:t>0</a:t>
-                      </a:r>
-                    </a:p>
-                  </a:txBody>
-                  <a:tcPr/>
-                </a:tc>
-                <a:extLst>
-                  <a:ext uri="{0D108BD9-81ED-4DB2-BD59-A6C34878D82A}">
-                    <a16:rowId xmlns:a16="http://schemas.microsoft.com/office/drawing/2014/main" val="4286675138"/>
-                  </a:ext>
-                </a:extLst>
-              </a:tr>
-              <a:tr h="374610">
-                <a:tc>
-                  <a:txBody>
-                    <a:bodyPr/>
-                    <a:lstStyle/>
-                    <a:p>
-                      <a:pPr algn="ctr"/>
-                      <a:r>
-                        <a:rPr lang="en-IE" sz="2400" b="1" dirty="0">
-                          <a:solidFill>
-                            <a:srgbClr val="0070C0"/>
-                          </a:solidFill>
-                        </a:rPr>
-                        <a:t>2</a:t>
-                      </a:r>
-                    </a:p>
-                  </a:txBody>
-                  <a:tcPr/>
-                </a:tc>
-                <a:tc>
-                  <a:txBody>
-                    <a:bodyPr/>
-                    <a:lstStyle/>
-                    <a:p>
-                      <a:pPr algn="ctr"/>
-                      <a:r>
-                        <a:rPr lang="en-IE" sz="2400" b="1" dirty="0"/>
-                        <a:t>18</a:t>
-                      </a:r>
-                    </a:p>
-                  </a:txBody>
-                  <a:tcPr/>
-                </a:tc>
-                <a:extLst>
-                  <a:ext uri="{0D108BD9-81ED-4DB2-BD59-A6C34878D82A}">
-                    <a16:rowId xmlns:a16="http://schemas.microsoft.com/office/drawing/2014/main" val="1375079718"/>
-                  </a:ext>
-                </a:extLst>
-              </a:tr>
-              <a:tr h="374610">
-                <a:tc>
-                  <a:txBody>
-                    <a:bodyPr/>
-                    <a:lstStyle/>
-                    <a:p>
-                      <a:pPr algn="ctr"/>
-                      <a:r>
-                        <a:rPr lang="en-IE" sz="2400" b="1" dirty="0">
-                          <a:solidFill>
-                            <a:srgbClr val="0070C0"/>
-                          </a:solidFill>
-                        </a:rPr>
-                        <a:t>3</a:t>
-                      </a:r>
-                    </a:p>
-                  </a:txBody>
-                  <a:tcPr/>
-                </a:tc>
-                <a:tc>
-                  <a:txBody>
-                    <a:bodyPr/>
-                    <a:lstStyle/>
-                    <a:p>
-                      <a:pPr algn="ctr"/>
-                      <a:r>
-                        <a:rPr lang="en-IE" sz="2400" b="1" dirty="0"/>
-                        <a:t>0</a:t>
-                      </a:r>
-                    </a:p>
-                  </a:txBody>
-                  <a:tcPr/>
-                </a:tc>
-                <a:extLst>
-                  <a:ext uri="{0D108BD9-81ED-4DB2-BD59-A6C34878D82A}">
-                    <a16:rowId xmlns:a16="http://schemas.microsoft.com/office/drawing/2014/main" val="365423453"/>
-                  </a:ext>
-                </a:extLst>
-              </a:tr>
-            </a:tbl>
-          </a:graphicData>
-        </a:graphic>
-      </p:graphicFrame>
-      <p:cxnSp>
-        <p:nvCxnSpPr>
-          <p:cNvPr id="6" name="Straight Arrow Connector 5">
-            <a:extLst>
-              <a:ext uri="{FF2B5EF4-FFF2-40B4-BE49-F238E27FC236}">
-                <a16:creationId xmlns:a16="http://schemas.microsoft.com/office/drawing/2014/main" id="{2E0691DA-9F50-43E8-A565-BD56F9D71203}"/>
-              </a:ext>
-            </a:extLst>
-          </p:cNvPr>
-          <p:cNvCxnSpPr>
-            <a:endCxn id="9" idx="0"/>
-          </p:cNvCxnSpPr>
-          <p:nvPr/>
-        </p:nvCxnSpPr>
-        <p:spPr>
-          <a:xfrm>
-            <a:off x="7006066" y="2543106"/>
-            <a:ext cx="1185434" cy="1190694"/>
-          </a:xfrm>
-          <a:prstGeom prst="straightConnector1">
-            <a:avLst/>
-          </a:prstGeom>
-          <a:ln w="38100">
-            <a:tailEnd type="triangle"/>
-          </a:ln>
-        </p:spPr>
-        <p:style>
-          <a:lnRef idx="1">
-            <a:schemeClr val="accent1"/>
-          </a:lnRef>
-          <a:fillRef idx="0">
-            <a:schemeClr val="accent1"/>
-          </a:fillRef>
-          <a:effectRef idx="0">
-            <a:schemeClr val="accent1"/>
-          </a:effectRef>
-          <a:fontRef idx="minor">
-            <a:schemeClr val="tx1"/>
-          </a:fontRef>
-        </p:style>
-      </p:cxnSp>
-      <p:sp>
-        <p:nvSpPr>
-          <p:cNvPr id="14" name="Rectangle 13">
-            <a:extLst>
-              <a:ext uri="{FF2B5EF4-FFF2-40B4-BE49-F238E27FC236}">
-                <a16:creationId xmlns:a16="http://schemas.microsoft.com/office/drawing/2014/main" id="{7F374B64-6BC7-42EC-8C09-493550023041}"/>
-              </a:ext>
-            </a:extLst>
-          </p:cNvPr>
-          <p:cNvSpPr/>
-          <p:nvPr/>
-        </p:nvSpPr>
-        <p:spPr>
-          <a:xfrm>
-            <a:off x="1905001" y="4658380"/>
-            <a:ext cx="2685607" cy="523220"/>
-          </a:xfrm>
-          <a:prstGeom prst="rect">
-            <a:avLst/>
-          </a:prstGeom>
-        </p:spPr>
-        <p:style>
-          <a:lnRef idx="1">
-            <a:schemeClr val="accent6"/>
-          </a:lnRef>
-          <a:fillRef idx="2">
-            <a:schemeClr val="accent6"/>
-          </a:fillRef>
-          <a:effectRef idx="1">
-            <a:schemeClr val="accent6"/>
-          </a:effectRef>
-          <a:fontRef idx="minor">
-            <a:schemeClr val="dk1"/>
-          </a:fontRef>
-        </p:style>
-        <p:txBody>
-          <a:bodyPr wrap="none">
-            <a:spAutoFit/>
-          </a:bodyPr>
-          <a:lstStyle/>
-          <a:p>
-            <a:r>
-              <a:rPr lang="en-GB" sz="2800" dirty="0">
-                <a:solidFill>
-                  <a:schemeClr val="bg1">
-                    <a:lumMod val="65000"/>
-                  </a:schemeClr>
-                </a:solidFill>
-              </a:rPr>
-              <a:t>numbers[0] = 12;</a:t>
-            </a:r>
-            <a:endParaRPr lang="en-IE" sz="2800" dirty="0">
-              <a:solidFill>
-                <a:schemeClr val="bg1">
-                  <a:lumMod val="65000"/>
-                </a:schemeClr>
-              </a:solidFill>
-            </a:endParaRPr>
-          </a:p>
-        </p:txBody>
-      </p:sp>
-      <p:sp>
-        <p:nvSpPr>
-          <p:cNvPr id="15" name="Rectangle 14">
-            <a:extLst>
-              <a:ext uri="{FF2B5EF4-FFF2-40B4-BE49-F238E27FC236}">
-                <a16:creationId xmlns:a16="http://schemas.microsoft.com/office/drawing/2014/main" id="{9AF5FC9E-82FB-4509-9783-9F3D9B5246D3}"/>
-              </a:ext>
-            </a:extLst>
-          </p:cNvPr>
-          <p:cNvSpPr/>
-          <p:nvPr/>
-        </p:nvSpPr>
-        <p:spPr>
-          <a:xfrm>
-            <a:off x="1676401" y="2667000"/>
-            <a:ext cx="3411511" cy="523220"/>
-          </a:xfrm>
-          <a:prstGeom prst="rect">
-            <a:avLst/>
-          </a:prstGeom>
-        </p:spPr>
-        <p:style>
-          <a:lnRef idx="1">
-            <a:schemeClr val="accent6"/>
-          </a:lnRef>
-          <a:fillRef idx="2">
-            <a:schemeClr val="accent6"/>
-          </a:fillRef>
-          <a:effectRef idx="1">
-            <a:schemeClr val="accent6"/>
-          </a:effectRef>
-          <a:fontRef idx="minor">
-            <a:schemeClr val="dk1"/>
-          </a:fontRef>
-        </p:style>
-        <p:txBody>
-          <a:bodyPr wrap="none">
-            <a:spAutoFit/>
-          </a:bodyPr>
-          <a:lstStyle/>
-          <a:p>
-            <a:r>
-              <a:rPr lang="en-GB" sz="2800" dirty="0">
-                <a:solidFill>
-                  <a:schemeClr val="bg1">
-                    <a:lumMod val="65000"/>
-                  </a:schemeClr>
-                </a:solidFill>
-              </a:rPr>
-              <a:t>numbers = new </a:t>
-            </a:r>
-            <a:r>
-              <a:rPr lang="en-GB" sz="2800" dirty="0" err="1">
-                <a:solidFill>
-                  <a:schemeClr val="bg1">
-                    <a:lumMod val="65000"/>
-                  </a:schemeClr>
-                </a:solidFill>
-              </a:rPr>
-              <a:t>int</a:t>
-            </a:r>
-            <a:r>
-              <a:rPr lang="en-GB" sz="2800" dirty="0">
-                <a:solidFill>
-                  <a:schemeClr val="bg1">
-                    <a:lumMod val="65000"/>
-                  </a:schemeClr>
-                </a:solidFill>
-              </a:rPr>
-              <a:t>[4];</a:t>
-            </a:r>
-            <a:endParaRPr lang="en-IE" sz="2800" dirty="0">
-              <a:solidFill>
-                <a:schemeClr val="bg1">
-                  <a:lumMod val="65000"/>
-                </a:schemeClr>
-              </a:solidFill>
-            </a:endParaRPr>
-          </a:p>
-        </p:txBody>
-      </p:sp>
-      <p:sp>
-        <p:nvSpPr>
-          <p:cNvPr id="16" name="Rectangle 15">
-            <a:extLst>
-              <a:ext uri="{FF2B5EF4-FFF2-40B4-BE49-F238E27FC236}">
-                <a16:creationId xmlns:a16="http://schemas.microsoft.com/office/drawing/2014/main" id="{8D084A7C-13AA-4193-880D-38973F9A4D1B}"/>
-              </a:ext>
-            </a:extLst>
-          </p:cNvPr>
-          <p:cNvSpPr/>
-          <p:nvPr/>
-        </p:nvSpPr>
-        <p:spPr>
-          <a:xfrm>
-            <a:off x="1933798" y="3657600"/>
-            <a:ext cx="2685607" cy="523220"/>
-          </a:xfrm>
-          <a:prstGeom prst="rect">
-            <a:avLst/>
-          </a:prstGeom>
-        </p:spPr>
-        <p:style>
-          <a:lnRef idx="1">
-            <a:schemeClr val="accent6"/>
-          </a:lnRef>
-          <a:fillRef idx="2">
-            <a:schemeClr val="accent6"/>
-          </a:fillRef>
-          <a:effectRef idx="1">
-            <a:schemeClr val="accent6"/>
-          </a:effectRef>
-          <a:fontRef idx="minor">
-            <a:schemeClr val="dk1"/>
-          </a:fontRef>
-        </p:style>
-        <p:txBody>
-          <a:bodyPr wrap="none">
-            <a:spAutoFit/>
-          </a:bodyPr>
-          <a:lstStyle/>
-          <a:p>
-            <a:r>
-              <a:rPr lang="en-GB" sz="2800" dirty="0">
-                <a:solidFill>
-                  <a:schemeClr val="bg1">
-                    <a:lumMod val="65000"/>
-                  </a:schemeClr>
-                </a:solidFill>
-              </a:rPr>
-              <a:t>numbers[2] = 18;</a:t>
-            </a:r>
-            <a:endParaRPr lang="en-IE" sz="2800" dirty="0">
-              <a:solidFill>
-                <a:schemeClr val="bg1">
-                  <a:lumMod val="65000"/>
-                </a:schemeClr>
-              </a:solidFill>
-            </a:endParaRPr>
-          </a:p>
-        </p:txBody>
-      </p:sp>
-      <p:sp>
-        <p:nvSpPr>
-          <p:cNvPr id="20" name="Rectangle: Rounded Corners 19">
-            <a:extLst>
-              <a:ext uri="{FF2B5EF4-FFF2-40B4-BE49-F238E27FC236}">
-                <a16:creationId xmlns:a16="http://schemas.microsoft.com/office/drawing/2014/main" id="{287FEE5B-B7DB-4364-8031-BB5CD89E9089}"/>
-              </a:ext>
-            </a:extLst>
-          </p:cNvPr>
-          <p:cNvSpPr/>
-          <p:nvPr/>
-        </p:nvSpPr>
-        <p:spPr>
-          <a:xfrm>
-            <a:off x="5503695" y="5638869"/>
-            <a:ext cx="4859505" cy="1143000"/>
-          </a:xfrm>
-          <a:prstGeom prst="roundRect">
-            <a:avLst/>
-          </a:prstGeom>
-        </p:spPr>
-        <p:style>
-          <a:lnRef idx="1">
-            <a:schemeClr val="accent2"/>
-          </a:lnRef>
-          <a:fillRef idx="2">
-            <a:schemeClr val="accent2"/>
-          </a:fillRef>
-          <a:effectRef idx="1">
-            <a:schemeClr val="accent2"/>
-          </a:effectRef>
-          <a:fontRef idx="minor">
-            <a:schemeClr val="dk1"/>
-          </a:fontRef>
-        </p:style>
-        <p:txBody>
-          <a:bodyPr rtlCol="0" anchor="ctr"/>
-          <a:lstStyle/>
-          <a:p>
-            <a:pPr algn="ctr"/>
-            <a:r>
-              <a:rPr lang="en-IE" sz="2400" dirty="0"/>
-              <a:t>Here we are printing the contents of index location 2 </a:t>
-            </a:r>
-            <a:br>
-              <a:rPr lang="en-IE" sz="2400" dirty="0"/>
-            </a:br>
-            <a:r>
-              <a:rPr lang="en-IE" sz="2400" dirty="0"/>
-              <a:t>i.e. 18 will be printed to the console.</a:t>
-            </a:r>
-          </a:p>
-        </p:txBody>
-      </p:sp>
-      <p:sp>
-        <p:nvSpPr>
-          <p:cNvPr id="21" name="Rectangle 20">
-            <a:extLst>
-              <a:ext uri="{FF2B5EF4-FFF2-40B4-BE49-F238E27FC236}">
-                <a16:creationId xmlns:a16="http://schemas.microsoft.com/office/drawing/2014/main" id="{75A44A42-7850-424F-8580-12BEFA62B01D}"/>
-              </a:ext>
-            </a:extLst>
-          </p:cNvPr>
-          <p:cNvSpPr/>
-          <p:nvPr/>
-        </p:nvSpPr>
-        <p:spPr>
-          <a:xfrm>
-            <a:off x="1828062" y="5682972"/>
-            <a:ext cx="2964594" cy="523220"/>
-          </a:xfrm>
-          <a:prstGeom prst="rect">
-            <a:avLst/>
-          </a:prstGeom>
-        </p:spPr>
-        <p:style>
-          <a:lnRef idx="1">
-            <a:schemeClr val="accent6"/>
-          </a:lnRef>
-          <a:fillRef idx="2">
-            <a:schemeClr val="accent6"/>
-          </a:fillRef>
-          <a:effectRef idx="1">
-            <a:schemeClr val="accent6"/>
-          </a:effectRef>
-          <a:fontRef idx="minor">
-            <a:schemeClr val="dk1"/>
-          </a:fontRef>
-        </p:style>
-        <p:txBody>
-          <a:bodyPr wrap="none">
-            <a:spAutoFit/>
-          </a:bodyPr>
-          <a:lstStyle/>
-          <a:p>
-            <a:r>
-              <a:rPr lang="en-GB" sz="2800" b="1" dirty="0"/>
-              <a:t>print(numbers[2]);</a:t>
-            </a:r>
-            <a:endParaRPr lang="en-IE" sz="2800" b="1" dirty="0"/>
-          </a:p>
-        </p:txBody>
-      </p:sp>
-      <p:sp>
-        <p:nvSpPr>
-          <p:cNvPr id="22" name="Oval 21">
-            <a:extLst>
-              <a:ext uri="{FF2B5EF4-FFF2-40B4-BE49-F238E27FC236}">
-                <a16:creationId xmlns:a16="http://schemas.microsoft.com/office/drawing/2014/main" id="{D5DF7F76-128F-4003-87B4-11F6C4CEE431}"/>
-              </a:ext>
-            </a:extLst>
-          </p:cNvPr>
-          <p:cNvSpPr/>
-          <p:nvPr/>
-        </p:nvSpPr>
-        <p:spPr>
-          <a:xfrm>
-            <a:off x="6781800" y="4597365"/>
-            <a:ext cx="2971800" cy="523806"/>
-          </a:xfrm>
-          <a:prstGeom prst="ellipse">
-            <a:avLst/>
-          </a:prstGeom>
-          <a:noFill/>
-          <a:ln w="76200"/>
-        </p:spPr>
-        <p:style>
-          <a:lnRef idx="2">
-            <a:schemeClr val="accent2"/>
-          </a:lnRef>
-          <a:fillRef idx="1">
-            <a:schemeClr val="lt1"/>
-          </a:fillRef>
-          <a:effectRef idx="0">
-            <a:schemeClr val="accent2"/>
-          </a:effectRef>
-          <a:fontRef idx="minor">
-            <a:schemeClr val="dk1"/>
-          </a:fontRef>
-        </p:style>
-        <p:txBody>
-          <a:bodyPr rtlCol="0" anchor="ctr"/>
-          <a:lstStyle/>
-          <a:p>
-            <a:pPr algn="ctr"/>
-            <a:endParaRPr lang="en-IE"/>
-          </a:p>
-        </p:txBody>
-      </p:sp>
-    </p:spTree>
-    <p:extLst>
-      <p:ext uri="{BB962C8B-B14F-4D97-AF65-F5344CB8AC3E}">
-        <p14:creationId xmlns:p14="http://schemas.microsoft.com/office/powerpoint/2010/main" val="2177511620"/>
       </p:ext>
     </p:extLst>
   </p:cSld>

--- a/topic06-arrays/unit-1/talk-2-array-classes/b-array-classes.pptx
+++ b/topic06-arrays/unit-1/talk-2-array-classes/b-array-classes.pptx
@@ -234,7 +234,7 @@
           <a:p>
             <a:fld id="{58C3D141-1E1C-433C-AD3A-CD56CBBB4F9F}" type="datetimeFigureOut">
               <a:rPr lang="en-IE" smtClean="0"/>
-              <a:t>18/10/2025</a:t>
+              <a:t>19/10/2025</a:t>
             </a:fld>
             <a:endParaRPr lang="en-IE"/>
           </a:p>
@@ -8088,7 +8088,7 @@
             <a:fld id="{1D8BD707-D9CF-40AE-B4C6-C98DA3205C09}" type="datetimeFigureOut">
               <a:rPr lang="en-US" smtClean="0"/>
               <a:pPr/>
-              <a:t>10/18/25</a:t>
+              <a:t>10/19/25</a:t>
             </a:fld>
             <a:endParaRPr lang="en-US"/>
           </a:p>
@@ -8260,7 +8260,7 @@
             <a:fld id="{1D8BD707-D9CF-40AE-B4C6-C98DA3205C09}" type="datetimeFigureOut">
               <a:rPr lang="en-US" smtClean="0"/>
               <a:pPr/>
-              <a:t>10/18/25</a:t>
+              <a:t>10/19/25</a:t>
             </a:fld>
             <a:endParaRPr lang="en-US"/>
           </a:p>
@@ -8442,7 +8442,7 @@
             <a:fld id="{1D8BD707-D9CF-40AE-B4C6-C98DA3205C09}" type="datetimeFigureOut">
               <a:rPr lang="en-US" smtClean="0"/>
               <a:pPr/>
-              <a:t>10/18/25</a:t>
+              <a:t>10/19/25</a:t>
             </a:fld>
             <a:endParaRPr lang="en-US"/>
           </a:p>
@@ -9175,7 +9175,7 @@
             <a:fld id="{1D8BD707-D9CF-40AE-B4C6-C98DA3205C09}" type="datetimeFigureOut">
               <a:rPr lang="en-US" smtClean="0"/>
               <a:pPr/>
-              <a:t>10/18/25</a:t>
+              <a:t>10/19/25</a:t>
             </a:fld>
             <a:endParaRPr lang="en-US"/>
           </a:p>
@@ -9637,7 +9637,7 @@
             <a:fld id="{1D8BD707-D9CF-40AE-B4C6-C98DA3205C09}" type="datetimeFigureOut">
               <a:rPr lang="en-US" smtClean="0"/>
               <a:pPr/>
-              <a:t>10/18/25</a:t>
+              <a:t>10/19/25</a:t>
             </a:fld>
             <a:endParaRPr lang="en-US"/>
           </a:p>
@@ -9938,7 +9938,7 @@
             <a:fld id="{1D8BD707-D9CF-40AE-B4C6-C98DA3205C09}" type="datetimeFigureOut">
               <a:rPr lang="en-US" smtClean="0"/>
               <a:pPr/>
-              <a:t>10/18/25</a:t>
+              <a:t>10/19/25</a:t>
             </a:fld>
             <a:endParaRPr lang="en-US"/>
           </a:p>
@@ -10568,7 +10568,7 @@
             <a:fld id="{1D8BD707-D9CF-40AE-B4C6-C98DA3205C09}" type="datetimeFigureOut">
               <a:rPr lang="en-US" smtClean="0"/>
               <a:pPr/>
-              <a:t>10/18/25</a:t>
+              <a:t>10/19/25</a:t>
             </a:fld>
             <a:endParaRPr lang="en-US"/>
           </a:p>
@@ -10857,7 +10857,7 @@
             <a:fld id="{1D8BD707-D9CF-40AE-B4C6-C98DA3205C09}" type="datetimeFigureOut">
               <a:rPr lang="en-US" smtClean="0"/>
               <a:pPr/>
-              <a:t>10/18/25</a:t>
+              <a:t>10/19/25</a:t>
             </a:fld>
             <a:endParaRPr lang="en-US"/>
           </a:p>
@@ -11153,7 +11153,7 @@
             <a:fld id="{1D8BD707-D9CF-40AE-B4C6-C98DA3205C09}" type="datetimeFigureOut">
               <a:rPr lang="en-US" smtClean="0"/>
               <a:pPr/>
-              <a:t>10/18/25</a:t>
+              <a:t>10/19/25</a:t>
             </a:fld>
             <a:endParaRPr lang="en-US"/>
           </a:p>
@@ -11432,7 +11432,7 @@
             <a:fld id="{1D8BD707-D9CF-40AE-B4C6-C98DA3205C09}" type="datetimeFigureOut">
               <a:rPr lang="en-US" smtClean="0"/>
               <a:pPr/>
-              <a:t>10/18/25</a:t>
+              <a:t>10/19/25</a:t>
             </a:fld>
             <a:endParaRPr lang="en-US"/>
           </a:p>
@@ -11691,7 +11691,7 @@
             <a:fld id="{1D8BD707-D9CF-40AE-B4C6-C98DA3205C09}" type="datetimeFigureOut">
               <a:rPr lang="en-US" smtClean="0"/>
               <a:pPr/>
-              <a:t>10/18/25</a:t>
+              <a:t>10/19/25</a:t>
             </a:fld>
             <a:endParaRPr lang="en-US"/>
           </a:p>
@@ -11911,7 +11911,7 @@
             <a:fld id="{1D8BD707-D9CF-40AE-B4C6-C98DA3205C09}" type="datetimeFigureOut">
               <a:rPr lang="en-US" smtClean="0"/>
               <a:pPr/>
-              <a:t>10/18/25</a:t>
+              <a:t>10/19/25</a:t>
             </a:fld>
             <a:endParaRPr lang="en-US"/>
           </a:p>

--- a/topic06-arrays/unit-1/talk-2-array-classes/b-array-classes.pptx
+++ b/topic06-arrays/unit-1/talk-2-array-classes/b-array-classes.pptx
@@ -5,7 +5,7 @@
     <p:sldMasterId id="2147483660" r:id="rId1"/>
   </p:sldMasterIdLst>
   <p:notesMasterIdLst>
-    <p:notesMasterId r:id="rId29"/>
+    <p:notesMasterId r:id="rId30"/>
   </p:notesMasterIdLst>
   <p:sldIdLst>
     <p:sldId id="325" r:id="rId2"/>
@@ -34,7 +34,8 @@
     <p:sldId id="641" r:id="rId25"/>
     <p:sldId id="642" r:id="rId26"/>
     <p:sldId id="634" r:id="rId27"/>
-    <p:sldId id="347" r:id="rId28"/>
+    <p:sldId id="657" r:id="rId28"/>
+    <p:sldId id="347" r:id="rId29"/>
   </p:sldIdLst>
   <p:sldSz cx="12192000" cy="6858000"/>
   <p:notesSz cx="6858000" cy="9144000"/>
@@ -234,7 +235,7 @@
           <a:p>
             <a:fld id="{58C3D141-1E1C-433C-AD3A-CD56CBBB4F9F}" type="datetimeFigureOut">
               <a:rPr lang="en-IE" smtClean="0"/>
-              <a:t>19/10/2025</a:t>
+              <a:t>21/10/2025</a:t>
             </a:fld>
             <a:endParaRPr lang="en-IE"/>
           </a:p>
@@ -8088,7 +8089,7 @@
             <a:fld id="{1D8BD707-D9CF-40AE-B4C6-C98DA3205C09}" type="datetimeFigureOut">
               <a:rPr lang="en-US" smtClean="0"/>
               <a:pPr/>
-              <a:t>10/19/25</a:t>
+              <a:t>10/21/25</a:t>
             </a:fld>
             <a:endParaRPr lang="en-US"/>
           </a:p>
@@ -8260,7 +8261,7 @@
             <a:fld id="{1D8BD707-D9CF-40AE-B4C6-C98DA3205C09}" type="datetimeFigureOut">
               <a:rPr lang="en-US" smtClean="0"/>
               <a:pPr/>
-              <a:t>10/19/25</a:t>
+              <a:t>10/21/25</a:t>
             </a:fld>
             <a:endParaRPr lang="en-US"/>
           </a:p>
@@ -8442,7 +8443,7 @@
             <a:fld id="{1D8BD707-D9CF-40AE-B4C6-C98DA3205C09}" type="datetimeFigureOut">
               <a:rPr lang="en-US" smtClean="0"/>
               <a:pPr/>
-              <a:t>10/19/25</a:t>
+              <a:t>10/21/25</a:t>
             </a:fld>
             <a:endParaRPr lang="en-US"/>
           </a:p>
@@ -9175,7 +9176,7 @@
             <a:fld id="{1D8BD707-D9CF-40AE-B4C6-C98DA3205C09}" type="datetimeFigureOut">
               <a:rPr lang="en-US" smtClean="0"/>
               <a:pPr/>
-              <a:t>10/19/25</a:t>
+              <a:t>10/21/25</a:t>
             </a:fld>
             <a:endParaRPr lang="en-US"/>
           </a:p>
@@ -9637,7 +9638,7 @@
             <a:fld id="{1D8BD707-D9CF-40AE-B4C6-C98DA3205C09}" type="datetimeFigureOut">
               <a:rPr lang="en-US" smtClean="0"/>
               <a:pPr/>
-              <a:t>10/19/25</a:t>
+              <a:t>10/21/25</a:t>
             </a:fld>
             <a:endParaRPr lang="en-US"/>
           </a:p>
@@ -9938,7 +9939,7 @@
             <a:fld id="{1D8BD707-D9CF-40AE-B4C6-C98DA3205C09}" type="datetimeFigureOut">
               <a:rPr lang="en-US" smtClean="0"/>
               <a:pPr/>
-              <a:t>10/19/25</a:t>
+              <a:t>10/21/25</a:t>
             </a:fld>
             <a:endParaRPr lang="en-US"/>
           </a:p>
@@ -10568,7 +10569,7 @@
             <a:fld id="{1D8BD707-D9CF-40AE-B4C6-C98DA3205C09}" type="datetimeFigureOut">
               <a:rPr lang="en-US" smtClean="0"/>
               <a:pPr/>
-              <a:t>10/19/25</a:t>
+              <a:t>10/21/25</a:t>
             </a:fld>
             <a:endParaRPr lang="en-US"/>
           </a:p>
@@ -10857,7 +10858,7 @@
             <a:fld id="{1D8BD707-D9CF-40AE-B4C6-C98DA3205C09}" type="datetimeFigureOut">
               <a:rPr lang="en-US" smtClean="0"/>
               <a:pPr/>
-              <a:t>10/19/25</a:t>
+              <a:t>10/21/25</a:t>
             </a:fld>
             <a:endParaRPr lang="en-US"/>
           </a:p>
@@ -11153,7 +11154,7 @@
             <a:fld id="{1D8BD707-D9CF-40AE-B4C6-C98DA3205C09}" type="datetimeFigureOut">
               <a:rPr lang="en-US" smtClean="0"/>
               <a:pPr/>
-              <a:t>10/19/25</a:t>
+              <a:t>10/21/25</a:t>
             </a:fld>
             <a:endParaRPr lang="en-US"/>
           </a:p>
@@ -11432,7 +11433,7 @@
             <a:fld id="{1D8BD707-D9CF-40AE-B4C6-C98DA3205C09}" type="datetimeFigureOut">
               <a:rPr lang="en-US" smtClean="0"/>
               <a:pPr/>
-              <a:t>10/19/25</a:t>
+              <a:t>10/21/25</a:t>
             </a:fld>
             <a:endParaRPr lang="en-US"/>
           </a:p>
@@ -11691,7 +11692,7 @@
             <a:fld id="{1D8BD707-D9CF-40AE-B4C6-C98DA3205C09}" type="datetimeFigureOut">
               <a:rPr lang="en-US" smtClean="0"/>
               <a:pPr/>
-              <a:t>10/19/25</a:t>
+              <a:t>10/21/25</a:t>
             </a:fld>
             <a:endParaRPr lang="en-US"/>
           </a:p>
@@ -11911,7 +11912,7 @@
             <a:fld id="{1D8BD707-D9CF-40AE-B4C6-C98DA3205C09}" type="datetimeFigureOut">
               <a:rPr lang="en-US" smtClean="0"/>
               <a:pPr/>
-              <a:t>10/19/25</a:t>
+              <a:t>10/21/25</a:t>
             </a:fld>
             <a:endParaRPr lang="en-US"/>
           </a:p>
@@ -23835,6 +23836,16 @@
 <file path=ppt/slides/slide25.xml><?xml version="1.0" encoding="utf-8"?>
 <p:sld xmlns:a="http://schemas.openxmlformats.org/drawingml/2006/main" xmlns:r="http://schemas.openxmlformats.org/officeDocument/2006/relationships" xmlns:p="http://schemas.openxmlformats.org/presentationml/2006/main">
   <p:cSld>
+    <p:bg>
+      <p:bgPr>
+        <a:solidFill>
+          <a:schemeClr val="bg1">
+            <a:lumMod val="85000"/>
+          </a:schemeClr>
+        </a:solidFill>
+        <a:effectLst/>
+      </p:bgPr>
+    </p:bg>
     <p:spTree>
       <p:nvGrpSpPr>
         <p:cNvPr id="1" name=""/>
@@ -24782,7 +24793,7 @@
           <p:nvPr/>
         </p:nvPicPr>
         <p:blipFill>
-          <a:blip r:embed="rId3"/>
+          <a:blip r:embed="rId4"/>
           <a:stretch>
             <a:fillRect/>
           </a:stretch>
@@ -24805,7 +24816,7 @@
     </p:extLst>
   </p:cSld>
   <p:clrMapOvr>
-    <a:masterClrMapping/>
+    <a:overrideClrMapping bg1="lt1" tx1="dk1" bg2="lt2" tx2="dk2" accent1="accent1" accent2="accent2" accent3="accent3" accent4="accent4" accent5="accent5" accent6="accent6" hlink="hlink" folHlink="folHlink"/>
   </p:clrMapOvr>
   <p:timing>
     <p:tnLst>
@@ -25140,12 +25151,35 @@
         </p:nvSpPr>
         <p:spPr bwMode="auto">
           <a:xfrm>
-            <a:off x="2157473" y="1488195"/>
-            <a:ext cx="8001000" cy="4524315"/>
+            <a:off x="2157473" y="1857526"/>
+            <a:ext cx="8001000" cy="3785652"/>
           </a:xfrm>
           <a:prstGeom prst="rect">
             <a:avLst/>
           </a:prstGeom>
+          <a:gradFill>
+            <a:gsLst>
+              <a:gs pos="0">
+                <a:schemeClr val="accent1">
+                  <a:tint val="50000"/>
+                  <a:satMod val="300000"/>
+                </a:schemeClr>
+              </a:gs>
+              <a:gs pos="35000">
+                <a:schemeClr val="accent1">
+                  <a:tint val="37000"/>
+                  <a:satMod val="300000"/>
+                </a:schemeClr>
+              </a:gs>
+              <a:gs pos="100000">
+                <a:schemeClr val="accent1">
+                  <a:tint val="15000"/>
+                  <a:satMod val="350000"/>
+                </a:schemeClr>
+              </a:gs>
+            </a:gsLst>
+            <a:lin ang="16200000" scaled="1"/>
+          </a:gradFill>
           <a:ln/>
         </p:spPr>
         <p:style>
@@ -25189,22 +25223,22 @@
               <a:t>public </a:t>
             </a:r>
             <a:r>
-              <a:rPr lang="en-VI" altLang="en-VI" sz="2400" dirty="0">
+              <a:rPr lang="en-029" altLang="en-VI" sz="2400" dirty="0">
                 <a:solidFill>
                   <a:srgbClr val="000000"/>
                 </a:solidFill>
                 <a:latin typeface="JetBrains Mono"/>
               </a:rPr>
-              <a:t>String </a:t>
-            </a:r>
-            <a:r>
-              <a:rPr lang="en-VI" altLang="en-VI" sz="2400" dirty="0" err="1">
-                <a:solidFill>
-                  <a:srgbClr val="00627A"/>
+              <a:t>void</a:t>
+            </a:r>
+            <a:r>
+              <a:rPr lang="en-VI" altLang="en-VI" sz="2400" dirty="0">
+                <a:solidFill>
+                  <a:srgbClr val="000000"/>
                 </a:solidFill>
                 <a:latin typeface="JetBrains Mono"/>
               </a:rPr>
-              <a:t>list</a:t>
+              <a:t> </a:t>
             </a:r>
             <a:r>
               <a:rPr lang="en-029" altLang="en-VI" sz="2400" dirty="0" err="1">
@@ -25213,7 +25247,7 @@
                 </a:solidFill>
                 <a:latin typeface="JetBrains Mono"/>
               </a:rPr>
-              <a:t>Friends</a:t>
+              <a:t>printFriends</a:t>
             </a:r>
             <a:r>
               <a:rPr lang="en-VI" altLang="en-VI" sz="2400" dirty="0">
@@ -25240,6 +25274,42 @@
                 <a:spcPct val="0"/>
               </a:spcAft>
             </a:pPr>
+            <a:r>
+              <a:rPr lang="en-029" altLang="en-VI" sz="2400" dirty="0">
+                <a:solidFill>
+                  <a:srgbClr val="0033B3"/>
+                </a:solidFill>
+                <a:latin typeface="JetBrains Mono"/>
+              </a:rPr>
+              <a:t>        if  </a:t>
+            </a:r>
+            <a:r>
+              <a:rPr lang="en-029" altLang="en-VI" sz="2400" dirty="0">
+                <a:solidFill>
+                  <a:srgbClr val="080808"/>
+                </a:solidFill>
+                <a:latin typeface="JetBrains Mono"/>
+              </a:rPr>
+              <a:t>(size == 0 ) </a:t>
+            </a:r>
+            <a:r>
+              <a:rPr lang="en-029" altLang="en-VI" sz="2400" dirty="0">
+                <a:solidFill>
+                  <a:srgbClr val="0033B3"/>
+                </a:solidFill>
+                <a:latin typeface="JetBrains Mono"/>
+              </a:rPr>
+              <a:t>return</a:t>
+            </a:r>
+            <a:r>
+              <a:rPr lang="en-029" altLang="en-VI" sz="2400" dirty="0">
+                <a:solidFill>
+                  <a:srgbClr val="080808"/>
+                </a:solidFill>
+                <a:latin typeface="JetBrains Mono"/>
+              </a:rPr>
+              <a:t> “Sorry no Friends”;</a:t>
+            </a:r>
             <a:br>
               <a:rPr lang="en-VI" altLang="en-VI" sz="2400" dirty="0">
                 <a:solidFill>
@@ -25249,7 +25319,7 @@
               </a:rPr>
             </a:br>
             <a:r>
-              <a:rPr lang="en-VI" altLang="en-VI" sz="2400" dirty="0">
+              <a:rPr lang="en-029" altLang="en-VI" sz="2400" dirty="0">
                 <a:solidFill>
                   <a:srgbClr val="080808"/>
                 </a:solidFill>
@@ -25257,32 +25327,113 @@
               </a:rPr>
               <a:t>        </a:t>
             </a:r>
-            <a:r>
-              <a:rPr lang="en-VI" altLang="en-VI" sz="2400" dirty="0">
-                <a:solidFill>
-                  <a:srgbClr val="000000"/>
+          </a:p>
+          <a:p>
+            <a:pPr eaLnBrk="0" fontAlgn="base" hangingPunct="0">
+              <a:spcBef>
+                <a:spcPct val="0"/>
+              </a:spcBef>
+              <a:spcAft>
+                <a:spcPct val="0"/>
+              </a:spcAft>
+            </a:pPr>
+            <a:r>
+              <a:rPr lang="en-029" altLang="en-VI" sz="2400" dirty="0">
+                <a:solidFill>
+                  <a:srgbClr val="080808"/>
                 </a:solidFill>
                 <a:latin typeface="JetBrains Mono"/>
               </a:rPr>
-              <a:t>String </a:t>
-            </a:r>
-            <a:r>
-              <a:rPr lang="en-VI" altLang="en-VI" sz="2400" dirty="0" err="1">
-                <a:solidFill>
-                  <a:srgbClr val="080808"/>
+              <a:t>         </a:t>
+            </a:r>
+            <a:r>
+              <a:rPr lang="en-029" altLang="en-VI" sz="2400" dirty="0">
+                <a:solidFill>
+                  <a:srgbClr val="0033B3"/>
                 </a:solidFill>
                 <a:latin typeface="JetBrains Mono"/>
               </a:rPr>
-              <a:t>listOf</a:t>
-            </a:r>
-            <a:r>
-              <a:rPr lang="en-029" altLang="en-VI" sz="2400" dirty="0" err="1">
+              <a:t>else</a:t>
+            </a:r>
+            <a:r>
+              <a:rPr lang="en-029" altLang="en-VI" sz="2400" dirty="0">
                 <a:solidFill>
                   <a:srgbClr val="080808"/>
                 </a:solidFill>
                 <a:latin typeface="JetBrains Mono"/>
               </a:rPr>
-              <a:t>Friends</a:t>
+              <a:t> { </a:t>
+            </a:r>
+            <a:br>
+              <a:rPr lang="en-VI" altLang="en-VI" sz="2400" dirty="0">
+                <a:solidFill>
+                  <a:srgbClr val="080808"/>
+                </a:solidFill>
+                <a:latin typeface="JetBrains Mono"/>
+              </a:rPr>
+            </a:br>
+            <a:r>
+              <a:rPr lang="en-VI" altLang="en-VI" sz="2400" dirty="0">
+                <a:solidFill>
+                  <a:srgbClr val="080808"/>
+                </a:solidFill>
+                <a:latin typeface="JetBrains Mono"/>
+              </a:rPr>
+              <a:t>       </a:t>
+            </a:r>
+            <a:r>
+              <a:rPr lang="en-029" altLang="en-VI" sz="2400" dirty="0">
+                <a:solidFill>
+                  <a:srgbClr val="080808"/>
+                </a:solidFill>
+                <a:latin typeface="JetBrains Mono"/>
+              </a:rPr>
+              <a:t>        </a:t>
+            </a:r>
+            <a:r>
+              <a:rPr lang="en-VI" altLang="en-VI" sz="2400" dirty="0">
+                <a:solidFill>
+                  <a:srgbClr val="080808"/>
+                </a:solidFill>
+                <a:latin typeface="JetBrains Mono"/>
+              </a:rPr>
+              <a:t> </a:t>
+            </a:r>
+            <a:r>
+              <a:rPr lang="en-VI" altLang="en-VI" sz="2400" dirty="0">
+                <a:solidFill>
+                  <a:srgbClr val="0033B3"/>
+                </a:solidFill>
+                <a:latin typeface="JetBrains Mono"/>
+              </a:rPr>
+              <a:t>for </a:t>
+            </a:r>
+            <a:r>
+              <a:rPr lang="en-VI" altLang="en-VI" sz="2400" dirty="0">
+                <a:solidFill>
+                  <a:srgbClr val="080808"/>
+                </a:solidFill>
+                <a:latin typeface="JetBrains Mono"/>
+              </a:rPr>
+              <a:t>(</a:t>
+            </a:r>
+            <a:r>
+              <a:rPr lang="en-VI" altLang="en-VI" sz="2400" dirty="0">
+                <a:solidFill>
+                  <a:srgbClr val="0033B3"/>
+                </a:solidFill>
+                <a:latin typeface="JetBrains Mono"/>
+              </a:rPr>
+              <a:t>int </a:t>
+            </a:r>
+            <a:r>
+              <a:rPr lang="en-VI" altLang="en-VI" sz="2400" dirty="0" err="1">
+                <a:solidFill>
+                  <a:srgbClr val="080808"/>
+                </a:solidFill>
+                <a:latin typeface="JetBrains Mono"/>
+              </a:rPr>
+              <a:t>i</a:t>
             </a:r>
             <a:r>
               <a:rPr lang="en-VI" altLang="en-VI" sz="2400" dirty="0">
@@ -25296,11 +25447,11 @@
             <a:r>
               <a:rPr lang="en-VI" altLang="en-VI" sz="2400" dirty="0">
                 <a:solidFill>
-                  <a:srgbClr val="067D17"/>
+                  <a:srgbClr val="1750EB"/>
                 </a:solidFill>
                 <a:latin typeface="JetBrains Mono"/>
               </a:rPr>
-              <a:t>""</a:t>
+              <a:t>0</a:t>
             </a:r>
             <a:r>
               <a:rPr lang="en-VI" altLang="en-VI" sz="2400" dirty="0">
@@ -25309,7 +25460,213 @@
                 </a:solidFill>
                 <a:latin typeface="JetBrains Mono"/>
               </a:rPr>
-              <a:t>;</a:t>
+              <a:t>; </a:t>
+            </a:r>
+            <a:r>
+              <a:rPr lang="en-VI" altLang="en-VI" sz="2400" dirty="0" err="1">
+                <a:solidFill>
+                  <a:srgbClr val="080808"/>
+                </a:solidFill>
+                <a:latin typeface="JetBrains Mono"/>
+              </a:rPr>
+              <a:t>i</a:t>
+            </a:r>
+            <a:r>
+              <a:rPr lang="en-VI" altLang="en-VI" sz="2400" dirty="0">
+                <a:solidFill>
+                  <a:srgbClr val="080808"/>
+                </a:solidFill>
+                <a:latin typeface="JetBrains Mono"/>
+              </a:rPr>
+              <a:t> &lt; </a:t>
+            </a:r>
+            <a:r>
+              <a:rPr lang="en-GB" altLang="en-VI" sz="2400" dirty="0" err="1">
+                <a:solidFill>
+                  <a:srgbClr val="871094"/>
+                </a:solidFill>
+                <a:latin typeface="JetBrains Mono"/>
+              </a:rPr>
+              <a:t>friends.length</a:t>
+            </a:r>
+            <a:r>
+              <a:rPr lang="en-VI" altLang="en-VI" sz="2400" dirty="0">
+                <a:solidFill>
+                  <a:srgbClr val="080808"/>
+                </a:solidFill>
+                <a:latin typeface="JetBrains Mono"/>
+              </a:rPr>
+              <a:t>; </a:t>
+            </a:r>
+            <a:r>
+              <a:rPr lang="en-VI" altLang="en-VI" sz="2400" dirty="0" err="1">
+                <a:solidFill>
+                  <a:srgbClr val="080808"/>
+                </a:solidFill>
+                <a:latin typeface="JetBrains Mono"/>
+              </a:rPr>
+              <a:t>i</a:t>
+            </a:r>
+            <a:r>
+              <a:rPr lang="en-VI" altLang="en-VI" sz="2400" dirty="0">
+                <a:solidFill>
+                  <a:srgbClr val="080808"/>
+                </a:solidFill>
+                <a:latin typeface="JetBrains Mono"/>
+              </a:rPr>
+              <a:t>++) {</a:t>
+            </a:r>
+            <a:br>
+              <a:rPr lang="en-VI" altLang="en-VI" sz="2400" dirty="0">
+                <a:solidFill>
+                  <a:srgbClr val="080808"/>
+                </a:solidFill>
+                <a:latin typeface="JetBrains Mono"/>
+              </a:rPr>
+            </a:br>
+            <a:r>
+              <a:rPr lang="en-029" altLang="en-VI" sz="2400" dirty="0">
+                <a:solidFill>
+                  <a:srgbClr val="080808"/>
+                </a:solidFill>
+                <a:latin typeface="JetBrains Mono"/>
+              </a:rPr>
+              <a:t>	        friends[</a:t>
+            </a:r>
+            <a:r>
+              <a:rPr lang="en-029" altLang="en-VI" sz="2400" dirty="0" err="1">
+                <a:solidFill>
+                  <a:srgbClr val="080808"/>
+                </a:solidFill>
+                <a:latin typeface="JetBrains Mono"/>
+              </a:rPr>
+              <a:t>i</a:t>
+            </a:r>
+            <a:r>
+              <a:rPr lang="en-029" altLang="en-VI" sz="2400" dirty="0">
+                <a:solidFill>
+                  <a:srgbClr val="080808"/>
+                </a:solidFill>
+                <a:latin typeface="JetBrains Mono"/>
+              </a:rPr>
+              <a:t>]. </a:t>
+            </a:r>
+            <a:r>
+              <a:rPr lang="en-029" altLang="en-VI" sz="2400" dirty="0" err="1">
+                <a:solidFill>
+                  <a:srgbClr val="080808"/>
+                </a:solidFill>
+                <a:latin typeface="JetBrains Mono"/>
+              </a:rPr>
+              <a:t>printFirstName</a:t>
+            </a:r>
+            <a:r>
+              <a:rPr lang="en-029" altLang="en-VI" sz="2400" dirty="0">
+                <a:solidFill>
+                  <a:srgbClr val="080808"/>
+                </a:solidFill>
+                <a:latin typeface="JetBrains Mono"/>
+              </a:rPr>
+              <a:t>();</a:t>
+            </a:r>
+          </a:p>
+          <a:p>
+            <a:pPr eaLnBrk="0" fontAlgn="base" hangingPunct="0">
+              <a:spcBef>
+                <a:spcPct val="0"/>
+              </a:spcBef>
+              <a:spcAft>
+                <a:spcPct val="0"/>
+              </a:spcAft>
+            </a:pPr>
+            <a:r>
+              <a:rPr lang="en-IE" altLang="en-VI" sz="2400" dirty="0">
+                <a:solidFill>
+                  <a:srgbClr val="080808"/>
+                </a:solidFill>
+                <a:latin typeface="JetBrains Mono"/>
+              </a:rPr>
+              <a:t> 	        </a:t>
+            </a:r>
+            <a:r>
+              <a:rPr lang="en-029" altLang="en-VI" sz="2400" dirty="0">
+                <a:solidFill>
+                  <a:srgbClr val="080808"/>
+                </a:solidFill>
+                <a:latin typeface="JetBrains Mono"/>
+              </a:rPr>
+              <a:t>friends[</a:t>
+            </a:r>
+            <a:r>
+              <a:rPr lang="en-029" altLang="en-VI" sz="2400" dirty="0" err="1">
+                <a:solidFill>
+                  <a:srgbClr val="080808"/>
+                </a:solidFill>
+                <a:latin typeface="JetBrains Mono"/>
+              </a:rPr>
+              <a:t>i</a:t>
+            </a:r>
+            <a:r>
+              <a:rPr lang="en-029" altLang="en-VI" sz="2400" dirty="0">
+                <a:solidFill>
+                  <a:srgbClr val="080808"/>
+                </a:solidFill>
+                <a:latin typeface="JetBrains Mono"/>
+              </a:rPr>
+              <a:t>]. </a:t>
+            </a:r>
+            <a:r>
+              <a:rPr lang="en-029" altLang="en-VI" sz="2400" dirty="0" err="1">
+                <a:solidFill>
+                  <a:srgbClr val="080808"/>
+                </a:solidFill>
+                <a:latin typeface="JetBrains Mono"/>
+              </a:rPr>
+              <a:t>printSecondName</a:t>
+            </a:r>
+            <a:r>
+              <a:rPr lang="en-029" altLang="en-VI" sz="2400" dirty="0">
+                <a:solidFill>
+                  <a:srgbClr val="080808"/>
+                </a:solidFill>
+                <a:latin typeface="JetBrains Mono"/>
+              </a:rPr>
+              <a:t>();</a:t>
+            </a:r>
+            <a:br>
+              <a:rPr lang="en-VI" altLang="en-VI" sz="2400" dirty="0">
+                <a:solidFill>
+                  <a:srgbClr val="080808"/>
+                </a:solidFill>
+                <a:latin typeface="JetBrains Mono"/>
+              </a:rPr>
+            </a:br>
+            <a:r>
+              <a:rPr lang="en-VI" altLang="en-VI" sz="2400" dirty="0">
+                <a:solidFill>
+                  <a:srgbClr val="080808"/>
+                </a:solidFill>
+                <a:latin typeface="JetBrains Mono"/>
+              </a:rPr>
+              <a:t>        </a:t>
+            </a:r>
+            <a:r>
+              <a:rPr lang="en-029" altLang="en-VI" sz="2400" dirty="0">
+                <a:solidFill>
+                  <a:srgbClr val="080808"/>
+                </a:solidFill>
+                <a:latin typeface="JetBrains Mono"/>
+              </a:rPr>
+              <a:t>       </a:t>
+            </a:r>
+            <a:r>
+              <a:rPr lang="en-VI" altLang="en-VI" sz="2400" dirty="0">
+                <a:solidFill>
+                  <a:srgbClr val="080808"/>
+                </a:solidFill>
+                <a:latin typeface="JetBrains Mono"/>
+              </a:rPr>
+              <a:t>}</a:t>
             </a:r>
             <a:endParaRPr lang="en-GB" altLang="en-VI" sz="2400" dirty="0">
               <a:solidFill>
@@ -25327,14 +25684,15 @@
                 <a:spcPct val="0"/>
               </a:spcAft>
             </a:pPr>
-            <a:br>
-              <a:rPr lang="en-VI" altLang="en-VI" sz="2400" dirty="0">
+            <a:r>
+              <a:rPr lang="en-029" altLang="en-VI" sz="2400" dirty="0">
                 <a:solidFill>
                   <a:srgbClr val="080808"/>
                 </a:solidFill>
                 <a:latin typeface="JetBrains Mono"/>
               </a:rPr>
-            </a:br>
+              <a:t>          </a:t>
+            </a:r>
             <a:r>
               <a:rPr lang="en-VI" altLang="en-VI" sz="2400" dirty="0">
                 <a:solidFill>
@@ -25342,335 +25700,7 @@
                 </a:solidFill>
                 <a:latin typeface="JetBrains Mono"/>
               </a:rPr>
-              <a:t>        </a:t>
-            </a:r>
-            <a:r>
-              <a:rPr lang="en-VI" altLang="en-VI" sz="2400" dirty="0">
-                <a:solidFill>
-                  <a:srgbClr val="0033B3"/>
-                </a:solidFill>
-                <a:latin typeface="JetBrains Mono"/>
-              </a:rPr>
-              <a:t>for </a:t>
-            </a:r>
-            <a:r>
-              <a:rPr lang="en-VI" altLang="en-VI" sz="2400" dirty="0">
-                <a:solidFill>
-                  <a:srgbClr val="080808"/>
-                </a:solidFill>
-                <a:latin typeface="JetBrains Mono"/>
-              </a:rPr>
-              <a:t>(</a:t>
-            </a:r>
-            <a:r>
-              <a:rPr lang="en-VI" altLang="en-VI" sz="2400" dirty="0">
-                <a:solidFill>
-                  <a:srgbClr val="0033B3"/>
-                </a:solidFill>
-                <a:latin typeface="JetBrains Mono"/>
-              </a:rPr>
-              <a:t>int </a:t>
-            </a:r>
-            <a:r>
-              <a:rPr lang="en-VI" altLang="en-VI" sz="2400" dirty="0" err="1">
-                <a:solidFill>
-                  <a:srgbClr val="080808"/>
-                </a:solidFill>
-                <a:latin typeface="JetBrains Mono"/>
-              </a:rPr>
-              <a:t>i</a:t>
-            </a:r>
-            <a:r>
-              <a:rPr lang="en-VI" altLang="en-VI" sz="2400" dirty="0">
-                <a:solidFill>
-                  <a:srgbClr val="080808"/>
-                </a:solidFill>
-                <a:latin typeface="JetBrains Mono"/>
-              </a:rPr>
-              <a:t> = </a:t>
-            </a:r>
-            <a:r>
-              <a:rPr lang="en-VI" altLang="en-VI" sz="2400" dirty="0">
-                <a:solidFill>
-                  <a:srgbClr val="1750EB"/>
-                </a:solidFill>
-                <a:latin typeface="JetBrains Mono"/>
-              </a:rPr>
-              <a:t>0</a:t>
-            </a:r>
-            <a:r>
-              <a:rPr lang="en-VI" altLang="en-VI" sz="2400" dirty="0">
-                <a:solidFill>
-                  <a:srgbClr val="080808"/>
-                </a:solidFill>
-                <a:latin typeface="JetBrains Mono"/>
-              </a:rPr>
-              <a:t>; </a:t>
-            </a:r>
-            <a:r>
-              <a:rPr lang="en-VI" altLang="en-VI" sz="2400" dirty="0" err="1">
-                <a:solidFill>
-                  <a:srgbClr val="080808"/>
-                </a:solidFill>
-                <a:latin typeface="JetBrains Mono"/>
-              </a:rPr>
-              <a:t>i</a:t>
-            </a:r>
-            <a:r>
-              <a:rPr lang="en-VI" altLang="en-VI" sz="2400" dirty="0">
-                <a:solidFill>
-                  <a:srgbClr val="080808"/>
-                </a:solidFill>
-                <a:latin typeface="JetBrains Mono"/>
-              </a:rPr>
-              <a:t> &lt; </a:t>
-            </a:r>
-            <a:r>
-              <a:rPr lang="en-GB" altLang="en-VI" sz="2400" dirty="0" err="1">
-                <a:solidFill>
-                  <a:srgbClr val="871094"/>
-                </a:solidFill>
-                <a:latin typeface="JetBrains Mono"/>
-              </a:rPr>
-              <a:t>friends.length</a:t>
-            </a:r>
-            <a:r>
-              <a:rPr lang="en-VI" altLang="en-VI" sz="2400" dirty="0">
-                <a:solidFill>
-                  <a:srgbClr val="080808"/>
-                </a:solidFill>
-                <a:latin typeface="JetBrains Mono"/>
-              </a:rPr>
-              <a:t>; </a:t>
-            </a:r>
-            <a:r>
-              <a:rPr lang="en-VI" altLang="en-VI" sz="2400" dirty="0" err="1">
-                <a:solidFill>
-                  <a:srgbClr val="080808"/>
-                </a:solidFill>
-                <a:latin typeface="JetBrains Mono"/>
-              </a:rPr>
-              <a:t>i</a:t>
-            </a:r>
-            <a:r>
-              <a:rPr lang="en-VI" altLang="en-VI" sz="2400" dirty="0">
-                <a:solidFill>
-                  <a:srgbClr val="080808"/>
-                </a:solidFill>
-                <a:latin typeface="JetBrains Mono"/>
-              </a:rPr>
-              <a:t>++) {</a:t>
-            </a:r>
-            <a:br>
-              <a:rPr lang="en-VI" altLang="en-VI" sz="2400" dirty="0">
-                <a:solidFill>
-                  <a:srgbClr val="080808"/>
-                </a:solidFill>
-                <a:latin typeface="JetBrains Mono"/>
-              </a:rPr>
-            </a:br>
-            <a:r>
-              <a:rPr lang="en-029" altLang="en-VI" sz="2400" dirty="0">
-                <a:solidFill>
-                  <a:srgbClr val="080808"/>
-                </a:solidFill>
-                <a:latin typeface="JetBrains Mono"/>
-              </a:rPr>
-              <a:t>	friends[</a:t>
-            </a:r>
-            <a:r>
-              <a:rPr lang="en-029" altLang="en-VI" sz="2400" dirty="0" err="1">
-                <a:solidFill>
-                  <a:srgbClr val="080808"/>
-                </a:solidFill>
-                <a:latin typeface="JetBrains Mono"/>
-              </a:rPr>
-              <a:t>i</a:t>
-            </a:r>
-            <a:r>
-              <a:rPr lang="en-029" altLang="en-VI" sz="2400" dirty="0">
-                <a:solidFill>
-                  <a:srgbClr val="080808"/>
-                </a:solidFill>
-                <a:latin typeface="JetBrains Mono"/>
-              </a:rPr>
-              <a:t>]. </a:t>
-            </a:r>
-            <a:r>
-              <a:rPr lang="en-029" altLang="en-VI" sz="2400" dirty="0" err="1">
-                <a:solidFill>
-                  <a:srgbClr val="080808"/>
-                </a:solidFill>
-                <a:latin typeface="JetBrains Mono"/>
-              </a:rPr>
-              <a:t>printFirstName</a:t>
-            </a:r>
-            <a:r>
-              <a:rPr lang="en-029" altLang="en-VI" sz="2400" dirty="0">
-                <a:solidFill>
-                  <a:srgbClr val="080808"/>
-                </a:solidFill>
-                <a:latin typeface="JetBrains Mono"/>
-              </a:rPr>
-              <a:t>();</a:t>
-            </a:r>
-          </a:p>
-          <a:p>
-            <a:pPr eaLnBrk="0" fontAlgn="base" hangingPunct="0">
-              <a:spcBef>
-                <a:spcPct val="0"/>
-              </a:spcBef>
-              <a:spcAft>
-                <a:spcPct val="0"/>
-              </a:spcAft>
-            </a:pPr>
-            <a:r>
-              <a:rPr lang="en-IE" altLang="en-VI" sz="2400" dirty="0">
-                <a:solidFill>
-                  <a:srgbClr val="080808"/>
-                </a:solidFill>
-                <a:latin typeface="JetBrains Mono"/>
-              </a:rPr>
-              <a:t> 	</a:t>
-            </a:r>
-            <a:r>
-              <a:rPr lang="en-029" altLang="en-VI" sz="2400" dirty="0">
-                <a:solidFill>
-                  <a:srgbClr val="080808"/>
-                </a:solidFill>
-                <a:latin typeface="JetBrains Mono"/>
-              </a:rPr>
-              <a:t>friends[</a:t>
-            </a:r>
-            <a:r>
-              <a:rPr lang="en-029" altLang="en-VI" sz="2400" dirty="0" err="1">
-                <a:solidFill>
-                  <a:srgbClr val="080808"/>
-                </a:solidFill>
-                <a:latin typeface="JetBrains Mono"/>
-              </a:rPr>
-              <a:t>i</a:t>
-            </a:r>
-            <a:r>
-              <a:rPr lang="en-029" altLang="en-VI" sz="2400" dirty="0">
-                <a:solidFill>
-                  <a:srgbClr val="080808"/>
-                </a:solidFill>
-                <a:latin typeface="JetBrains Mono"/>
-              </a:rPr>
-              <a:t>]. </a:t>
-            </a:r>
-            <a:r>
-              <a:rPr lang="en-029" altLang="en-VI" sz="2400" dirty="0" err="1">
-                <a:solidFill>
-                  <a:srgbClr val="080808"/>
-                </a:solidFill>
-                <a:latin typeface="JetBrains Mono"/>
-              </a:rPr>
-              <a:t>printSecondName</a:t>
-            </a:r>
-            <a:r>
-              <a:rPr lang="en-029" altLang="en-VI" sz="2400" dirty="0">
-                <a:solidFill>
-                  <a:srgbClr val="080808"/>
-                </a:solidFill>
-                <a:latin typeface="JetBrains Mono"/>
-              </a:rPr>
-              <a:t>();</a:t>
-            </a:r>
-            <a:br>
-              <a:rPr lang="en-VI" altLang="en-VI" sz="2400" dirty="0">
-                <a:solidFill>
-                  <a:srgbClr val="080808"/>
-                </a:solidFill>
-                <a:latin typeface="JetBrains Mono"/>
-              </a:rPr>
-            </a:br>
-            <a:r>
-              <a:rPr lang="en-VI" altLang="en-VI" sz="2400" dirty="0">
-                <a:solidFill>
-                  <a:srgbClr val="080808"/>
-                </a:solidFill>
-                <a:latin typeface="JetBrains Mono"/>
-              </a:rPr>
-              <a:t>        }</a:t>
-            </a:r>
-            <a:endParaRPr lang="en-GB" altLang="en-VI" sz="2400" dirty="0">
-              <a:solidFill>
-                <a:srgbClr val="080808"/>
-              </a:solidFill>
-              <a:latin typeface="JetBrains Mono"/>
-            </a:endParaRPr>
-          </a:p>
-          <a:p>
-            <a:pPr eaLnBrk="0" fontAlgn="base" hangingPunct="0">
-              <a:spcBef>
-                <a:spcPct val="0"/>
-              </a:spcBef>
-              <a:spcAft>
-                <a:spcPct val="0"/>
-              </a:spcAft>
-            </a:pPr>
-            <a:br>
-              <a:rPr lang="en-VI" altLang="en-VI" sz="2400" dirty="0">
-                <a:solidFill>
-                  <a:srgbClr val="080808"/>
-                </a:solidFill>
-                <a:latin typeface="JetBrains Mono"/>
-              </a:rPr>
-            </a:br>
-            <a:r>
-              <a:rPr lang="en-VI" altLang="en-VI" sz="2400" dirty="0">
-                <a:solidFill>
-                  <a:srgbClr val="080808"/>
-                </a:solidFill>
-                <a:latin typeface="JetBrains Mono"/>
-              </a:rPr>
-              <a:t>        </a:t>
-            </a:r>
-            <a:r>
-              <a:rPr lang="en-VI" altLang="en-VI" sz="2400" dirty="0">
-                <a:solidFill>
-                  <a:srgbClr val="0033B3"/>
-                </a:solidFill>
-                <a:latin typeface="JetBrains Mono"/>
-              </a:rPr>
-              <a:t>return </a:t>
-            </a:r>
-            <a:r>
-              <a:rPr lang="en-VI" altLang="en-VI" sz="2400" dirty="0" err="1">
-                <a:solidFill>
-                  <a:srgbClr val="080808"/>
-                </a:solidFill>
-                <a:latin typeface="JetBrains Mono"/>
-              </a:rPr>
-              <a:t>listOfProducts</a:t>
-            </a:r>
-            <a:r>
-              <a:rPr lang="en-VI" altLang="en-VI" sz="2400" dirty="0">
-                <a:solidFill>
-                  <a:srgbClr val="080808"/>
-                </a:solidFill>
-                <a:latin typeface="JetBrains Mono"/>
-              </a:rPr>
-              <a:t>;</a:t>
-            </a:r>
-            <a:br>
-              <a:rPr lang="en-VI" altLang="en-VI" sz="2400" dirty="0">
-                <a:solidFill>
-                  <a:srgbClr val="080808"/>
-                </a:solidFill>
-                <a:latin typeface="JetBrains Mono"/>
-              </a:rPr>
-            </a:br>
-            <a:r>
-              <a:rPr lang="en-VI" altLang="en-VI" sz="2400" dirty="0">
-                <a:solidFill>
-                  <a:srgbClr val="080808"/>
-                </a:solidFill>
-                <a:latin typeface="JetBrains Mono"/>
-              </a:rPr>
-              <a:t>    }</a:t>
+              <a:t>}</a:t>
             </a:r>
             <a:br>
               <a:rPr lang="en-VI" altLang="en-VI" sz="2400" dirty="0">
@@ -25713,6 +25743,766 @@
         <p:spPr>
           <a:xfrm>
             <a:off x="1984651" y="6178754"/>
+            <a:ext cx="7971798" cy="400110"/>
+          </a:xfrm>
+          <a:prstGeom prst="rect">
+            <a:avLst/>
+          </a:prstGeom>
+        </p:spPr>
+        <p:style>
+          <a:lnRef idx="2">
+            <a:schemeClr val="accent4"/>
+          </a:lnRef>
+          <a:fillRef idx="1">
+            <a:schemeClr val="lt1"/>
+          </a:fillRef>
+          <a:effectRef idx="0">
+            <a:schemeClr val="accent4"/>
+          </a:effectRef>
+          <a:fontRef idx="minor">
+            <a:schemeClr val="dk1"/>
+          </a:fontRef>
+        </p:style>
+        <p:txBody>
+          <a:bodyPr wrap="none" rtlCol="0">
+            <a:spAutoFit/>
+          </a:bodyPr>
+          <a:lstStyle/>
+          <a:p>
+            <a:r>
+              <a:rPr lang="en-GB" sz="2000" dirty="0"/>
+              <a:t>Prints first  and second names of all friends  stored in the primitive array.  </a:t>
+            </a:r>
+            <a:endParaRPr lang="en-VI" sz="2000" dirty="0"/>
+          </a:p>
+        </p:txBody>
+      </p:sp>
+    </p:spTree>
+    <p:extLst>
+      <p:ext uri="{BB962C8B-B14F-4D97-AF65-F5344CB8AC3E}">
+        <p14:creationId xmlns:p14="http://schemas.microsoft.com/office/powerpoint/2010/main" val="825745404"/>
+      </p:ext>
+    </p:extLst>
+  </p:cSld>
+  <p:clrMapOvr>
+    <a:masterClrMapping/>
+  </p:clrMapOvr>
+</p:sld>
+</file>
+
+<file path=ppt/slides/slide27.xml><?xml version="1.0" encoding="utf-8"?>
+<p:sld xmlns:a="http://schemas.openxmlformats.org/drawingml/2006/main" xmlns:r="http://schemas.openxmlformats.org/officeDocument/2006/relationships" xmlns:p="http://schemas.openxmlformats.org/presentationml/2006/main">
+  <p:cSld>
+    <p:spTree>
+      <p:nvGrpSpPr>
+        <p:cNvPr id="1" name="">
+          <a:extLst>
+            <a:ext uri="{FF2B5EF4-FFF2-40B4-BE49-F238E27FC236}">
+              <a16:creationId xmlns:a16="http://schemas.microsoft.com/office/drawing/2014/main" id="{97ACA62A-DFEC-AD9C-433F-C97129F48BB9}"/>
+            </a:ext>
+          </a:extLst>
+        </p:cNvPr>
+        <p:cNvGrpSpPr/>
+        <p:nvPr/>
+      </p:nvGrpSpPr>
+      <p:grpSpPr>
+        <a:xfrm>
+          <a:off x="0" y="0"/>
+          <a:ext cx="0" cy="0"/>
+          <a:chOff x="0" y="0"/>
+          <a:chExt cx="0" cy="0"/>
+        </a:xfrm>
+      </p:grpSpPr>
+      <p:sp>
+        <p:nvSpPr>
+          <p:cNvPr id="2" name="Title 1">
+            <a:extLst>
+              <a:ext uri="{FF2B5EF4-FFF2-40B4-BE49-F238E27FC236}">
+                <a16:creationId xmlns:a16="http://schemas.microsoft.com/office/drawing/2014/main" id="{93F206BE-C046-EEDE-1365-A804FDB377F5}"/>
+              </a:ext>
+            </a:extLst>
+          </p:cNvPr>
+          <p:cNvSpPr>
+            <a:spLocks noGrp="1"/>
+          </p:cNvSpPr>
+          <p:nvPr>
+            <p:ph type="title"/>
+          </p:nvPr>
+        </p:nvSpPr>
+        <p:spPr/>
+        <p:txBody>
+          <a:bodyPr>
+            <a:normAutofit/>
+          </a:bodyPr>
+          <a:lstStyle/>
+          <a:p>
+            <a:pPr algn="ctr"/>
+            <a:r>
+              <a:rPr lang="en-IE" dirty="0"/>
+              <a:t>Example using a </a:t>
+            </a:r>
+            <a:r>
+              <a:rPr lang="en-IE" b="1" dirty="0">
+                <a:solidFill>
+                  <a:srgbClr val="FF0000"/>
+                </a:solidFill>
+              </a:rPr>
+              <a:t>Person </a:t>
+            </a:r>
+            <a:r>
+              <a:rPr lang="en-IE" dirty="0"/>
+              <a:t>object array</a:t>
+            </a:r>
+            <a:endParaRPr lang="en-IE" b="1" dirty="0"/>
+          </a:p>
+        </p:txBody>
+      </p:sp>
+      <p:sp>
+        <p:nvSpPr>
+          <p:cNvPr id="3" name="Rectangle 1">
+            <a:extLst>
+              <a:ext uri="{FF2B5EF4-FFF2-40B4-BE49-F238E27FC236}">
+                <a16:creationId xmlns:a16="http://schemas.microsoft.com/office/drawing/2014/main" id="{51316B3F-D829-3B85-008F-FE603F7CC0A8}"/>
+              </a:ext>
+            </a:extLst>
+          </p:cNvPr>
+          <p:cNvSpPr>
+            <a:spLocks noChangeArrowheads="1"/>
+          </p:cNvSpPr>
+          <p:nvPr/>
+        </p:nvSpPr>
+        <p:spPr bwMode="auto">
+          <a:xfrm>
+            <a:off x="2095500" y="1574048"/>
+            <a:ext cx="8001000" cy="4893647"/>
+          </a:xfrm>
+          <a:prstGeom prst="rect">
+            <a:avLst/>
+          </a:prstGeom>
+          <a:gradFill>
+            <a:gsLst>
+              <a:gs pos="0">
+                <a:schemeClr val="accent1">
+                  <a:tint val="50000"/>
+                  <a:satMod val="300000"/>
+                </a:schemeClr>
+              </a:gs>
+              <a:gs pos="35000">
+                <a:schemeClr val="accent1">
+                  <a:tint val="37000"/>
+                  <a:satMod val="300000"/>
+                </a:schemeClr>
+              </a:gs>
+              <a:gs pos="100000">
+                <a:schemeClr val="accent1">
+                  <a:tint val="15000"/>
+                  <a:satMod val="350000"/>
+                </a:schemeClr>
+              </a:gs>
+            </a:gsLst>
+            <a:lin ang="16200000" scaled="1"/>
+          </a:gradFill>
+          <a:ln/>
+        </p:spPr>
+        <p:style>
+          <a:lnRef idx="2">
+            <a:schemeClr val="accent4"/>
+          </a:lnRef>
+          <a:fillRef idx="1">
+            <a:schemeClr val="lt1"/>
+          </a:fillRef>
+          <a:effectRef idx="0">
+            <a:schemeClr val="accent4"/>
+          </a:effectRef>
+          <a:fontRef idx="minor">
+            <a:schemeClr val="dk1"/>
+          </a:fontRef>
+        </p:style>
+        <p:txBody>
+          <a:bodyPr vert="horz" wrap="square" lIns="91440" tIns="45720" rIns="91440" bIns="45720" numCol="1" anchor="ctr" anchorCtr="0" compatLnSpc="1">
+            <a:prstTxWarp prst="textNoShape">
+              <a:avLst/>
+            </a:prstTxWarp>
+            <a:spAutoFit/>
+          </a:bodyPr>
+          <a:lstStyle/>
+          <a:p>
+            <a:pPr eaLnBrk="0" fontAlgn="base" hangingPunct="0">
+              <a:spcBef>
+                <a:spcPct val="0"/>
+              </a:spcBef>
+              <a:spcAft>
+                <a:spcPct val="0"/>
+              </a:spcAft>
+            </a:pPr>
+            <a:r>
+              <a:rPr lang="en-IE" altLang="en-VI" sz="2400" dirty="0">
+                <a:solidFill>
+                  <a:srgbClr val="0033B3"/>
+                </a:solidFill>
+                <a:latin typeface="JetBrains Mono"/>
+              </a:rPr>
+              <a:t> public </a:t>
+            </a:r>
+            <a:r>
+              <a:rPr lang="en-IE" altLang="en-VI" sz="2400" dirty="0">
+                <a:solidFill>
+                  <a:schemeClr val="tx1"/>
+                </a:solidFill>
+                <a:latin typeface="JetBrains Mono"/>
+              </a:rPr>
+              <a:t>String</a:t>
+            </a:r>
+            <a:r>
+              <a:rPr lang="en-IE" altLang="en-VI" sz="2400" dirty="0">
+                <a:solidFill>
+                  <a:srgbClr val="0033B3"/>
+                </a:solidFill>
+                <a:latin typeface="JetBrains Mono"/>
+              </a:rPr>
+              <a:t> </a:t>
+            </a:r>
+            <a:r>
+              <a:rPr lang="en-IE" altLang="en-VI" sz="2400" dirty="0" err="1">
+                <a:solidFill>
+                  <a:srgbClr val="0033B3"/>
+                </a:solidFill>
+                <a:latin typeface="JetBrains Mono"/>
+              </a:rPr>
+              <a:t>l</a:t>
+            </a:r>
+            <a:r>
+              <a:rPr lang="en-IE" altLang="en-VI" sz="2400" dirty="0" err="1">
+                <a:solidFill>
+                  <a:srgbClr val="00627A"/>
+                </a:solidFill>
+                <a:latin typeface="JetBrains Mono"/>
+              </a:rPr>
+              <a:t>istOfFriends</a:t>
+            </a:r>
+            <a:r>
+              <a:rPr lang="en-IE" altLang="en-VI" sz="2400" dirty="0">
+                <a:solidFill>
+                  <a:srgbClr val="00627A"/>
+                </a:solidFill>
+                <a:latin typeface="JetBrains Mono"/>
+              </a:rPr>
+              <a:t>(</a:t>
+            </a:r>
+            <a:r>
+              <a:rPr lang="en-IE" altLang="en-VI" sz="2400" dirty="0">
+                <a:solidFill>
+                  <a:srgbClr val="0033B3"/>
+                </a:solidFill>
+                <a:latin typeface="JetBrains Mono"/>
+              </a:rPr>
+              <a:t>){</a:t>
+            </a:r>
+          </a:p>
+          <a:p>
+            <a:pPr eaLnBrk="0" fontAlgn="base" hangingPunct="0">
+              <a:spcBef>
+                <a:spcPct val="0"/>
+              </a:spcBef>
+              <a:spcAft>
+                <a:spcPct val="0"/>
+              </a:spcAft>
+            </a:pPr>
+            <a:endParaRPr lang="en-IE" altLang="en-VI" sz="2400" dirty="0">
+              <a:solidFill>
+                <a:schemeClr val="tx1"/>
+              </a:solidFill>
+              <a:latin typeface="JetBrains Mono"/>
+            </a:endParaRPr>
+          </a:p>
+          <a:p>
+            <a:pPr eaLnBrk="0" fontAlgn="base" hangingPunct="0">
+              <a:spcBef>
+                <a:spcPct val="0"/>
+              </a:spcBef>
+              <a:spcAft>
+                <a:spcPct val="0"/>
+              </a:spcAft>
+            </a:pPr>
+            <a:r>
+              <a:rPr lang="en-IE" altLang="en-VI" sz="2400" dirty="0">
+                <a:solidFill>
+                  <a:schemeClr val="tx1"/>
+                </a:solidFill>
+                <a:latin typeface="JetBrains Mono"/>
+              </a:rPr>
+              <a:t>          String </a:t>
+            </a:r>
+            <a:r>
+              <a:rPr lang="en-IE" altLang="en-VI" sz="2400" dirty="0" err="1">
+                <a:solidFill>
+                  <a:schemeClr val="tx1"/>
+                </a:solidFill>
+                <a:latin typeface="JetBrains Mono"/>
+              </a:rPr>
+              <a:t>listOfStudents</a:t>
+            </a:r>
+            <a:r>
+              <a:rPr lang="en-IE" altLang="en-VI" sz="2400" dirty="0">
+                <a:solidFill>
+                  <a:schemeClr val="tx1"/>
+                </a:solidFill>
+                <a:latin typeface="JetBrains Mono"/>
+              </a:rPr>
+              <a:t> = "List of friends \n";</a:t>
+            </a:r>
+          </a:p>
+          <a:p>
+            <a:pPr eaLnBrk="0" fontAlgn="base" hangingPunct="0">
+              <a:spcBef>
+                <a:spcPct val="0"/>
+              </a:spcBef>
+              <a:spcAft>
+                <a:spcPct val="0"/>
+              </a:spcAft>
+            </a:pPr>
+            <a:endParaRPr lang="en-IE" altLang="en-VI" sz="2400" dirty="0">
+              <a:solidFill>
+                <a:schemeClr val="tx1"/>
+              </a:solidFill>
+              <a:latin typeface="JetBrains Mono"/>
+            </a:endParaRPr>
+          </a:p>
+          <a:p>
+            <a:pPr eaLnBrk="0" fontAlgn="base" hangingPunct="0">
+              <a:spcBef>
+                <a:spcPct val="0"/>
+              </a:spcBef>
+              <a:spcAft>
+                <a:spcPct val="0"/>
+              </a:spcAft>
+            </a:pPr>
+            <a:r>
+              <a:rPr lang="en-029" altLang="en-VI" sz="2400" dirty="0">
+                <a:solidFill>
+                  <a:srgbClr val="080808"/>
+                </a:solidFill>
+                <a:latin typeface="JetBrains Mono"/>
+              </a:rPr>
+              <a:t>          </a:t>
+            </a:r>
+            <a:r>
+              <a:rPr lang="en-VI" altLang="en-VI" sz="2400" dirty="0">
+                <a:solidFill>
+                  <a:srgbClr val="080808"/>
+                </a:solidFill>
+                <a:latin typeface="JetBrains Mono"/>
+              </a:rPr>
+              <a:t> </a:t>
+            </a:r>
+            <a:r>
+              <a:rPr lang="en-VI" altLang="en-VI" sz="2400" dirty="0">
+                <a:solidFill>
+                  <a:srgbClr val="0033B3"/>
+                </a:solidFill>
+                <a:latin typeface="JetBrains Mono"/>
+              </a:rPr>
+              <a:t>for </a:t>
+            </a:r>
+            <a:r>
+              <a:rPr lang="en-VI" altLang="en-VI" sz="2400" dirty="0">
+                <a:solidFill>
+                  <a:srgbClr val="080808"/>
+                </a:solidFill>
+                <a:latin typeface="JetBrains Mono"/>
+              </a:rPr>
+              <a:t>(</a:t>
+            </a:r>
+            <a:r>
+              <a:rPr lang="en-VI" altLang="en-VI" sz="2400" dirty="0">
+                <a:solidFill>
+                  <a:srgbClr val="0033B3"/>
+                </a:solidFill>
+                <a:latin typeface="JetBrains Mono"/>
+              </a:rPr>
+              <a:t>int </a:t>
+            </a:r>
+            <a:r>
+              <a:rPr lang="en-VI" altLang="en-VI" sz="2400" dirty="0" err="1">
+                <a:solidFill>
+                  <a:srgbClr val="080808"/>
+                </a:solidFill>
+                <a:latin typeface="JetBrains Mono"/>
+              </a:rPr>
+              <a:t>i</a:t>
+            </a:r>
+            <a:r>
+              <a:rPr lang="en-VI" altLang="en-VI" sz="2400" dirty="0">
+                <a:solidFill>
+                  <a:srgbClr val="080808"/>
+                </a:solidFill>
+                <a:latin typeface="JetBrains Mono"/>
+              </a:rPr>
+              <a:t> = </a:t>
+            </a:r>
+            <a:r>
+              <a:rPr lang="en-VI" altLang="en-VI" sz="2400" dirty="0">
+                <a:solidFill>
+                  <a:srgbClr val="1750EB"/>
+                </a:solidFill>
+                <a:latin typeface="JetBrains Mono"/>
+              </a:rPr>
+              <a:t>0</a:t>
+            </a:r>
+            <a:r>
+              <a:rPr lang="en-VI" altLang="en-VI" sz="2400" dirty="0">
+                <a:solidFill>
+                  <a:srgbClr val="080808"/>
+                </a:solidFill>
+                <a:latin typeface="JetBrains Mono"/>
+              </a:rPr>
+              <a:t>; </a:t>
+            </a:r>
+            <a:r>
+              <a:rPr lang="en-VI" altLang="en-VI" sz="2400" dirty="0" err="1">
+                <a:solidFill>
+                  <a:srgbClr val="080808"/>
+                </a:solidFill>
+                <a:latin typeface="JetBrains Mono"/>
+              </a:rPr>
+              <a:t>i</a:t>
+            </a:r>
+            <a:r>
+              <a:rPr lang="en-VI" altLang="en-VI" sz="2400" dirty="0">
+                <a:solidFill>
+                  <a:srgbClr val="080808"/>
+                </a:solidFill>
+                <a:latin typeface="JetBrains Mono"/>
+              </a:rPr>
+              <a:t> &lt; </a:t>
+            </a:r>
+            <a:r>
+              <a:rPr lang="en-GB" altLang="en-VI" sz="2400" dirty="0" err="1">
+                <a:solidFill>
+                  <a:srgbClr val="871094"/>
+                </a:solidFill>
+                <a:latin typeface="JetBrains Mono"/>
+              </a:rPr>
+              <a:t>friends.length</a:t>
+            </a:r>
+            <a:r>
+              <a:rPr lang="en-VI" altLang="en-VI" sz="2400" dirty="0">
+                <a:solidFill>
+                  <a:srgbClr val="080808"/>
+                </a:solidFill>
+                <a:latin typeface="JetBrains Mono"/>
+              </a:rPr>
+              <a:t>; </a:t>
+            </a:r>
+            <a:r>
+              <a:rPr lang="en-VI" altLang="en-VI" sz="2400" dirty="0" err="1">
+                <a:solidFill>
+                  <a:srgbClr val="080808"/>
+                </a:solidFill>
+                <a:latin typeface="JetBrains Mono"/>
+              </a:rPr>
+              <a:t>i</a:t>
+            </a:r>
+            <a:r>
+              <a:rPr lang="en-VI" altLang="en-VI" sz="2400" dirty="0">
+                <a:solidFill>
+                  <a:srgbClr val="080808"/>
+                </a:solidFill>
+                <a:latin typeface="JetBrains Mono"/>
+              </a:rPr>
+              <a:t>++) {</a:t>
+            </a:r>
+            <a:endParaRPr lang="en-029" altLang="en-VI" sz="2400" dirty="0">
+              <a:solidFill>
+                <a:srgbClr val="080808"/>
+              </a:solidFill>
+              <a:latin typeface="JetBrains Mono"/>
+            </a:endParaRPr>
+          </a:p>
+          <a:p>
+            <a:pPr eaLnBrk="0" fontAlgn="base" hangingPunct="0">
+              <a:spcBef>
+                <a:spcPct val="0"/>
+              </a:spcBef>
+              <a:spcAft>
+                <a:spcPct val="0"/>
+              </a:spcAft>
+            </a:pPr>
+            <a:br>
+              <a:rPr lang="en-VI" altLang="en-VI" sz="2400" dirty="0">
+                <a:solidFill>
+                  <a:srgbClr val="080808"/>
+                </a:solidFill>
+                <a:latin typeface="JetBrains Mono"/>
+              </a:rPr>
+            </a:br>
+            <a:r>
+              <a:rPr lang="en-IE" altLang="en-VI" sz="2400" dirty="0">
+                <a:solidFill>
+                  <a:schemeClr val="tx1"/>
+                </a:solidFill>
+                <a:latin typeface="JetBrains Mono"/>
+              </a:rPr>
+              <a:t>                     </a:t>
+            </a:r>
+            <a:r>
+              <a:rPr lang="en-IE" altLang="en-VI" sz="2400" dirty="0" err="1">
+                <a:solidFill>
+                  <a:schemeClr val="tx1"/>
+                </a:solidFill>
+                <a:latin typeface="JetBrains Mono"/>
+              </a:rPr>
+              <a:t>listOfStudents</a:t>
+            </a:r>
+            <a:r>
+              <a:rPr lang="en-IE" altLang="en-VI" sz="2400" dirty="0">
+                <a:solidFill>
+                  <a:schemeClr val="tx1"/>
+                </a:solidFill>
+                <a:latin typeface="JetBrains Mono"/>
+              </a:rPr>
+              <a:t>  += friends[</a:t>
+            </a:r>
+            <a:r>
+              <a:rPr lang="en-IE" altLang="en-VI" sz="2400" dirty="0" err="1">
+                <a:solidFill>
+                  <a:schemeClr val="tx1"/>
+                </a:solidFill>
+                <a:latin typeface="JetBrains Mono"/>
+              </a:rPr>
+              <a:t>i</a:t>
+            </a:r>
+            <a:r>
+              <a:rPr lang="en-IE" altLang="en-VI" sz="2400" dirty="0">
+                <a:solidFill>
+                  <a:schemeClr val="tx1"/>
+                </a:solidFill>
+                <a:latin typeface="JetBrains Mono"/>
+              </a:rPr>
+              <a:t>].</a:t>
+            </a:r>
+            <a:r>
+              <a:rPr lang="en-IE" altLang="en-VI" sz="2400" dirty="0" err="1">
+                <a:solidFill>
+                  <a:schemeClr val="tx1"/>
+                </a:solidFill>
+                <a:latin typeface="JetBrains Mono"/>
+              </a:rPr>
+              <a:t>getFirstName</a:t>
+            </a:r>
+            <a:r>
+              <a:rPr lang="en-IE" altLang="en-VI" sz="2400" dirty="0">
+                <a:solidFill>
+                  <a:schemeClr val="tx1"/>
+                </a:solidFill>
+                <a:latin typeface="JetBrains Mono"/>
+              </a:rPr>
+              <a:t>() + "  " </a:t>
+            </a:r>
+          </a:p>
+          <a:p>
+            <a:pPr eaLnBrk="0" fontAlgn="base" hangingPunct="0">
+              <a:spcBef>
+                <a:spcPct val="0"/>
+              </a:spcBef>
+              <a:spcAft>
+                <a:spcPct val="0"/>
+              </a:spcAft>
+            </a:pPr>
+            <a:r>
+              <a:rPr lang="en-IE" altLang="en-VI" sz="2400" dirty="0">
+                <a:solidFill>
+                  <a:schemeClr val="tx1"/>
+                </a:solidFill>
+                <a:latin typeface="JetBrains Mono"/>
+              </a:rPr>
+              <a:t>		                     + friends[</a:t>
+            </a:r>
+            <a:r>
+              <a:rPr lang="en-IE" altLang="en-VI" sz="2400" dirty="0" err="1">
+                <a:solidFill>
+                  <a:schemeClr val="tx1"/>
+                </a:solidFill>
+                <a:latin typeface="JetBrains Mono"/>
+              </a:rPr>
+              <a:t>i</a:t>
+            </a:r>
+            <a:r>
+              <a:rPr lang="en-IE" altLang="en-VI" sz="2400" dirty="0">
+                <a:solidFill>
+                  <a:schemeClr val="tx1"/>
+                </a:solidFill>
+                <a:latin typeface="JetBrains Mono"/>
+              </a:rPr>
+              <a:t>].</a:t>
+            </a:r>
+            <a:r>
+              <a:rPr lang="en-IE" altLang="en-VI" sz="2400" dirty="0" err="1">
+                <a:solidFill>
+                  <a:schemeClr val="tx1"/>
+                </a:solidFill>
+                <a:latin typeface="JetBrains Mono"/>
+              </a:rPr>
+              <a:t>getSecondName</a:t>
+            </a:r>
+            <a:r>
+              <a:rPr lang="en-IE" altLang="en-VI" sz="2400" dirty="0">
+                <a:solidFill>
+                  <a:schemeClr val="tx1"/>
+                </a:solidFill>
+                <a:latin typeface="JetBrains Mono"/>
+              </a:rPr>
+              <a:t>() + "\n";</a:t>
+            </a:r>
+          </a:p>
+          <a:p>
+            <a:pPr eaLnBrk="0" fontAlgn="base" hangingPunct="0">
+              <a:spcBef>
+                <a:spcPct val="0"/>
+              </a:spcBef>
+              <a:spcAft>
+                <a:spcPct val="0"/>
+              </a:spcAft>
+            </a:pPr>
+            <a:r>
+              <a:rPr lang="en-IE" altLang="en-VI" sz="2400" dirty="0">
+                <a:solidFill>
+                  <a:schemeClr val="tx1"/>
+                </a:solidFill>
+                <a:latin typeface="JetBrains Mono"/>
+              </a:rPr>
+              <a:t>          </a:t>
+            </a:r>
+          </a:p>
+          <a:p>
+            <a:pPr eaLnBrk="0" fontAlgn="base" hangingPunct="0">
+              <a:spcBef>
+                <a:spcPct val="0"/>
+              </a:spcBef>
+              <a:spcAft>
+                <a:spcPct val="0"/>
+              </a:spcAft>
+            </a:pPr>
+            <a:r>
+              <a:rPr lang="en-IE" altLang="en-VI" sz="2400" dirty="0">
+                <a:solidFill>
+                  <a:schemeClr val="tx1"/>
+                </a:solidFill>
+                <a:latin typeface="JetBrains Mono"/>
+              </a:rPr>
+              <a:t>               </a:t>
+            </a:r>
+            <a:r>
+              <a:rPr lang="en-IE" altLang="en-VI" sz="2400" dirty="0">
+                <a:solidFill>
+                  <a:srgbClr val="0033B3"/>
+                </a:solidFill>
+                <a:latin typeface="JetBrains Mono"/>
+              </a:rPr>
+              <a:t>return</a:t>
+            </a:r>
+            <a:r>
+              <a:rPr lang="en-IE" altLang="en-VI" sz="2400" dirty="0">
+                <a:solidFill>
+                  <a:schemeClr val="tx1"/>
+                </a:solidFill>
+                <a:latin typeface="JetBrains Mono"/>
+              </a:rPr>
+              <a:t> </a:t>
+            </a:r>
+            <a:r>
+              <a:rPr lang="en-IE" altLang="en-VI" sz="2400" dirty="0" err="1">
+                <a:solidFill>
+                  <a:schemeClr val="tx1"/>
+                </a:solidFill>
+                <a:latin typeface="JetBrains Mono"/>
+              </a:rPr>
+              <a:t>listOfStudents</a:t>
+            </a:r>
+            <a:r>
+              <a:rPr lang="en-IE" altLang="en-VI" sz="2400" dirty="0">
+                <a:solidFill>
+                  <a:schemeClr val="tx1"/>
+                </a:solidFill>
+                <a:latin typeface="JetBrains Mono"/>
+              </a:rPr>
+              <a:t>;</a:t>
+            </a:r>
+          </a:p>
+          <a:p>
+            <a:pPr eaLnBrk="0" fontAlgn="base" hangingPunct="0">
+              <a:spcBef>
+                <a:spcPct val="0"/>
+              </a:spcBef>
+              <a:spcAft>
+                <a:spcPct val="0"/>
+              </a:spcAft>
+            </a:pPr>
+            <a:r>
+              <a:rPr lang="en-IE" altLang="en-VI" sz="2400" dirty="0">
+                <a:solidFill>
+                  <a:schemeClr val="tx1"/>
+                </a:solidFill>
+                <a:latin typeface="JetBrains Mono"/>
+              </a:rPr>
+              <a:t>       }</a:t>
+            </a:r>
+          </a:p>
+          <a:p>
+            <a:pPr eaLnBrk="0" fontAlgn="base" hangingPunct="0">
+              <a:spcBef>
+                <a:spcPct val="0"/>
+              </a:spcBef>
+              <a:spcAft>
+                <a:spcPct val="0"/>
+              </a:spcAft>
+            </a:pPr>
+            <a:r>
+              <a:rPr lang="en-IE" altLang="en-VI" sz="2400" dirty="0">
+                <a:solidFill>
+                  <a:schemeClr val="tx1"/>
+                </a:solidFill>
+                <a:latin typeface="JetBrains Mono"/>
+              </a:rPr>
+              <a:t>   }</a:t>
+            </a:r>
+          </a:p>
+          <a:p>
+            <a:pPr eaLnBrk="0" fontAlgn="base" hangingPunct="0">
+              <a:spcBef>
+                <a:spcPct val="0"/>
+              </a:spcBef>
+              <a:spcAft>
+                <a:spcPct val="0"/>
+              </a:spcAft>
+            </a:pPr>
+            <a:r>
+              <a:rPr lang="en-VI" altLang="en-VI" sz="2400" dirty="0">
+                <a:solidFill>
+                  <a:schemeClr val="tx1"/>
+                </a:solidFill>
+                <a:latin typeface="JetBrains Mono"/>
+              </a:rPr>
+              <a:t>}</a:t>
+            </a:r>
+          </a:p>
+        </p:txBody>
+      </p:sp>
+      <p:sp>
+        <p:nvSpPr>
+          <p:cNvPr id="7" name="TextBox 6">
+            <a:extLst>
+              <a:ext uri="{FF2B5EF4-FFF2-40B4-BE49-F238E27FC236}">
+                <a16:creationId xmlns:a16="http://schemas.microsoft.com/office/drawing/2014/main" id="{D5B75913-F634-8664-2524-0E44604C45EB}"/>
+              </a:ext>
+            </a:extLst>
+          </p:cNvPr>
+          <p:cNvSpPr txBox="1"/>
+          <p:nvPr/>
+        </p:nvSpPr>
+        <p:spPr>
+          <a:xfrm>
+            <a:off x="1984651" y="6457890"/>
             <a:ext cx="8346644" cy="400110"/>
           </a:xfrm>
           <a:prstGeom prst="rect">
@@ -25750,7 +26540,7 @@
     </p:spTree>
     <p:extLst>
       <p:ext uri="{BB962C8B-B14F-4D97-AF65-F5344CB8AC3E}">
-        <p14:creationId xmlns:p14="http://schemas.microsoft.com/office/powerpoint/2010/main" val="825745404"/>
+        <p14:creationId xmlns:p14="http://schemas.microsoft.com/office/powerpoint/2010/main" val="3075507651"/>
       </p:ext>
     </p:extLst>
   </p:cSld>
@@ -25760,7 +26550,7 @@
 </p:sld>
 </file>
 
-<file path=ppt/slides/slide27.xml><?xml version="1.0" encoding="utf-8"?>
+<file path=ppt/slides/slide28.xml><?xml version="1.0" encoding="utf-8"?>
 <p:sld xmlns:a="http://schemas.openxmlformats.org/drawingml/2006/main" xmlns:r="http://schemas.openxmlformats.org/officeDocument/2006/relationships" xmlns:p="http://schemas.openxmlformats.org/presentationml/2006/main">
   <p:cSld>
     <p:spTree>
@@ -30390,4 +31180,47 @@
   <a:objectDefaults/>
   <a:extraClrSchemeLst/>
 </a:theme>
+</file>
+
+<file path=ppt/theme/themeOverride1.xml><?xml version="1.0" encoding="utf-8"?>
+<a:themeOverride xmlns:a="http://schemas.openxmlformats.org/drawingml/2006/main">
+  <a:clrScheme name="Office">
+    <a:dk1>
+      <a:sysClr val="windowText" lastClr="000000"/>
+    </a:dk1>
+    <a:lt1>
+      <a:sysClr val="window" lastClr="FFFFFF"/>
+    </a:lt1>
+    <a:dk2>
+      <a:srgbClr val="1F497D"/>
+    </a:dk2>
+    <a:lt2>
+      <a:srgbClr val="EEECE1"/>
+    </a:lt2>
+    <a:accent1>
+      <a:srgbClr val="4F81BD"/>
+    </a:accent1>
+    <a:accent2>
+      <a:srgbClr val="C0504D"/>
+    </a:accent2>
+    <a:accent3>
+      <a:srgbClr val="9BBB59"/>
+    </a:accent3>
+    <a:accent4>
+      <a:srgbClr val="8064A2"/>
+    </a:accent4>
+    <a:accent5>
+      <a:srgbClr val="4BACC6"/>
+    </a:accent5>
+    <a:accent6>
+      <a:srgbClr val="F79646"/>
+    </a:accent6>
+    <a:hlink>
+      <a:srgbClr val="0000FF"/>
+    </a:hlink>
+    <a:folHlink>
+      <a:srgbClr val="800080"/>
+    </a:folHlink>
+  </a:clrScheme>
+</a:themeOverride>
 </file>
--- a/topic06-arrays/unit-1/talk-2-array-classes/b-array-classes.pptx
+++ b/topic06-arrays/unit-1/talk-2-array-classes/b-array-classes.pptx
@@ -21772,10 +21772,10 @@
       </p:sp>
       <p:pic>
         <p:nvPicPr>
-          <p:cNvPr id="7" name="Picture 6">
+          <p:cNvPr id="8" name="Picture 7">
             <a:extLst>
               <a:ext uri="{FF2B5EF4-FFF2-40B4-BE49-F238E27FC236}">
-                <a16:creationId xmlns:a16="http://schemas.microsoft.com/office/drawing/2014/main" id="{BA288E3A-0485-A15B-D8F7-8972FDDA99A7}"/>
+                <a16:creationId xmlns:a16="http://schemas.microsoft.com/office/drawing/2014/main" id="{61CD5B0A-E36A-F080-A79F-67276BF92753}"/>
               </a:ext>
             </a:extLst>
           </p:cNvPr>
@@ -21792,8 +21792,8 @@
         </p:blipFill>
         <p:spPr>
           <a:xfrm>
-            <a:off x="6128307" y="1391473"/>
-            <a:ext cx="5422900" cy="5080000"/>
+            <a:off x="6324600" y="1705054"/>
+            <a:ext cx="4203700" cy="4749800"/>
           </a:xfrm>
           <a:prstGeom prst="rect">
             <a:avLst/>
